--- a/labs/lab13/slides/slides.pptx
+++ b/labs/lab13/slides/slides.pptx
@@ -4,6 +4,9 @@
   <p:sldMasterIdLst>
     <p:sldMasterId id="2147483696" r:id="rId1"/>
   </p:sldMasterIdLst>
+  <p:notesMasterIdLst>
+    <p:notesMasterId r:id="rId17"/>
+  </p:notesMasterIdLst>
   <p:sldIdLst>
     <p:sldId id="256" r:id="rId2"/>
     <p:sldId id="257" r:id="rId3"/>
@@ -20,21 +23,6 @@
     <p:sldId id="268" r:id="rId14"/>
     <p:sldId id="269" r:id="rId15"/>
     <p:sldId id="270" r:id="rId16"/>
-    <p:sldId id="271" r:id="rId17"/>
-    <p:sldId id="272" r:id="rId18"/>
-    <p:sldId id="273" r:id="rId19"/>
-    <p:sldId id="274" r:id="rId20"/>
-    <p:sldId id="275" r:id="rId21"/>
-    <p:sldId id="276" r:id="rId22"/>
-    <p:sldId id="277" r:id="rId23"/>
-    <p:sldId id="278" r:id="rId24"/>
-    <p:sldId id="279" r:id="rId25"/>
-    <p:sldId id="280" r:id="rId26"/>
-    <p:sldId id="281" r:id="rId27"/>
-    <p:sldId id="282" r:id="rId28"/>
-    <p:sldId id="283" r:id="rId29"/>
-    <p:sldId id="284" r:id="rId30"/>
-    <p:sldId id="285" r:id="rId31"/>
   </p:sldIdLst>
   <p:sldSz cx="12192000" cy="6858000"/>
   <p:notesSz cx="6858000" cy="9144000"/>
@@ -141,6 +129,1435 @@
 </p:presentation>
 </file>
 
+<file path=ppt/notesMasters/notesMaster1.xml><?xml version="1.0" encoding="utf-8"?>
+<p:notesMaster xmlns:a="http://schemas.openxmlformats.org/drawingml/2006/main" xmlns:r="http://schemas.openxmlformats.org/officeDocument/2006/relationships" xmlns:p="http://schemas.openxmlformats.org/presentationml/2006/main">
+  <p:cSld>
+    <p:bg>
+      <p:bgRef idx="1001">
+        <a:schemeClr val="bg1"/>
+      </p:bgRef>
+    </p:bg>
+    <p:spTree>
+      <p:nvGrpSpPr>
+        <p:cNvPr id="1" name=""/>
+        <p:cNvGrpSpPr/>
+        <p:nvPr/>
+      </p:nvGrpSpPr>
+      <p:grpSpPr>
+        <a:xfrm>
+          <a:off x="0" y="0"/>
+          <a:ext cx="0" cy="0"/>
+          <a:chOff x="0" y="0"/>
+          <a:chExt cx="0" cy="0"/>
+        </a:xfrm>
+      </p:grpSpPr>
+      <p:sp>
+        <p:nvSpPr>
+          <p:cNvPr id="2" name="Header Placeholder 1"/>
+          <p:cNvSpPr>
+            <a:spLocks noGrp="1"/>
+          </p:cNvSpPr>
+          <p:nvPr>
+            <p:ph type="hdr" sz="quarter"/>
+          </p:nvPr>
+        </p:nvSpPr>
+        <p:spPr>
+          <a:xfrm>
+            <a:off x="0" y="0"/>
+            <a:ext cx="2971800" cy="458788"/>
+          </a:xfrm>
+          <a:prstGeom prst="rect">
+            <a:avLst/>
+          </a:prstGeom>
+        </p:spPr>
+        <p:txBody>
+          <a:bodyPr vert="horz" lIns="91440" tIns="45720" rIns="91440" bIns="45720" rtlCol="0"/>
+          <a:lstStyle>
+            <a:lvl1pPr algn="l">
+              <a:defRPr sz="1200"/>
+            </a:lvl1pPr>
+          </a:lstStyle>
+          <a:p>
+            <a:endParaRPr lang="en-US"/>
+          </a:p>
+        </p:txBody>
+      </p:sp>
+      <p:sp>
+        <p:nvSpPr>
+          <p:cNvPr id="3" name="Date Placeholder 2"/>
+          <p:cNvSpPr>
+            <a:spLocks noGrp="1"/>
+          </p:cNvSpPr>
+          <p:nvPr>
+            <p:ph type="dt" idx="1"/>
+          </p:nvPr>
+        </p:nvSpPr>
+        <p:spPr>
+          <a:xfrm>
+            <a:off x="3884613" y="0"/>
+            <a:ext cx="2971800" cy="458788"/>
+          </a:xfrm>
+          <a:prstGeom prst="rect">
+            <a:avLst/>
+          </a:prstGeom>
+        </p:spPr>
+        <p:txBody>
+          <a:bodyPr vert="horz" lIns="91440" tIns="45720" rIns="91440" bIns="45720" rtlCol="0"/>
+          <a:lstStyle>
+            <a:lvl1pPr algn="r">
+              <a:defRPr sz="1200"/>
+            </a:lvl1pPr>
+          </a:lstStyle>
+          <a:p>
+            <a:fld id="{0F9C1CCF-B725-44A7-AA57-5E433BD85C9F}" type="datetimeFigureOut">
+              <a:rPr lang="en-US" smtClean="0"/>
+              <a:t>1/2/22</a:t>
+            </a:fld>
+            <a:endParaRPr lang="en-US"/>
+          </a:p>
+        </p:txBody>
+      </p:sp>
+      <p:sp>
+        <p:nvSpPr>
+          <p:cNvPr id="4" name="Slide Image Placeholder 3"/>
+          <p:cNvSpPr>
+            <a:spLocks noGrp="1" noRot="1" noChangeAspect="1"/>
+          </p:cNvSpPr>
+          <p:nvPr>
+            <p:ph type="sldImg" idx="2"/>
+          </p:nvPr>
+        </p:nvSpPr>
+        <p:spPr>
+          <a:xfrm>
+            <a:off x="685800" y="1143000"/>
+            <a:ext cx="5486400" cy="3086100"/>
+          </a:xfrm>
+          <a:prstGeom prst="rect">
+            <a:avLst/>
+          </a:prstGeom>
+          <a:noFill/>
+          <a:ln w="12700">
+            <a:solidFill>
+              <a:prstClr val="black"/>
+            </a:solidFill>
+          </a:ln>
+        </p:spPr>
+        <p:txBody>
+          <a:bodyPr vert="horz" lIns="91440" tIns="45720" rIns="91440" bIns="45720" rtlCol="0" anchor="ctr"/>
+          <a:lstStyle/>
+          <a:p>
+            <a:endParaRPr lang="en-US"/>
+          </a:p>
+        </p:txBody>
+      </p:sp>
+      <p:sp>
+        <p:nvSpPr>
+          <p:cNvPr id="5" name="Notes Placeholder 4"/>
+          <p:cNvSpPr>
+            <a:spLocks noGrp="1"/>
+          </p:cNvSpPr>
+          <p:nvPr>
+            <p:ph type="body" sz="quarter" idx="3"/>
+          </p:nvPr>
+        </p:nvSpPr>
+        <p:spPr>
+          <a:xfrm>
+            <a:off x="685800" y="4400550"/>
+            <a:ext cx="5486400" cy="3600450"/>
+          </a:xfrm>
+          <a:prstGeom prst="rect">
+            <a:avLst/>
+          </a:prstGeom>
+        </p:spPr>
+        <p:txBody>
+          <a:bodyPr vert="horz" lIns="91440" tIns="45720" rIns="91440" bIns="45720" rtlCol="0"/>
+          <a:lstStyle/>
+          <a:p>
+            <a:pPr lvl="0"/>
+            <a:r>
+              <a:rPr lang="en-US"/>
+              <a:t>Click to edit Master text styles</a:t>
+            </a:r>
+          </a:p>
+          <a:p>
+            <a:pPr lvl="1"/>
+            <a:r>
+              <a:rPr lang="en-US"/>
+              <a:t>Second level</a:t>
+            </a:r>
+          </a:p>
+          <a:p>
+            <a:pPr lvl="2"/>
+            <a:r>
+              <a:rPr lang="en-US"/>
+              <a:t>Third level</a:t>
+            </a:r>
+          </a:p>
+          <a:p>
+            <a:pPr lvl="3"/>
+            <a:r>
+              <a:rPr lang="en-US"/>
+              <a:t>Fourth level</a:t>
+            </a:r>
+          </a:p>
+          <a:p>
+            <a:pPr lvl="4"/>
+            <a:r>
+              <a:rPr lang="en-US"/>
+              <a:t>Fifth level</a:t>
+            </a:r>
+          </a:p>
+        </p:txBody>
+      </p:sp>
+      <p:sp>
+        <p:nvSpPr>
+          <p:cNvPr id="6" name="Footer Placeholder 5"/>
+          <p:cNvSpPr>
+            <a:spLocks noGrp="1"/>
+          </p:cNvSpPr>
+          <p:nvPr>
+            <p:ph type="ftr" sz="quarter" idx="4"/>
+          </p:nvPr>
+        </p:nvSpPr>
+        <p:spPr>
+          <a:xfrm>
+            <a:off x="0" y="8685213"/>
+            <a:ext cx="2971800" cy="458787"/>
+          </a:xfrm>
+          <a:prstGeom prst="rect">
+            <a:avLst/>
+          </a:prstGeom>
+        </p:spPr>
+        <p:txBody>
+          <a:bodyPr vert="horz" lIns="91440" tIns="45720" rIns="91440" bIns="45720" rtlCol="0" anchor="b"/>
+          <a:lstStyle>
+            <a:lvl1pPr algn="l">
+              <a:defRPr sz="1200"/>
+            </a:lvl1pPr>
+          </a:lstStyle>
+          <a:p>
+            <a:endParaRPr lang="en-US"/>
+          </a:p>
+        </p:txBody>
+      </p:sp>
+      <p:sp>
+        <p:nvSpPr>
+          <p:cNvPr id="7" name="Slide Number Placeholder 6"/>
+          <p:cNvSpPr>
+            <a:spLocks noGrp="1"/>
+          </p:cNvSpPr>
+          <p:nvPr>
+            <p:ph type="sldNum" sz="quarter" idx="5"/>
+          </p:nvPr>
+        </p:nvSpPr>
+        <p:spPr>
+          <a:xfrm>
+            <a:off x="3884613" y="8685213"/>
+            <a:ext cx="2971800" cy="458787"/>
+          </a:xfrm>
+          <a:prstGeom prst="rect">
+            <a:avLst/>
+          </a:prstGeom>
+        </p:spPr>
+        <p:txBody>
+          <a:bodyPr vert="horz" lIns="91440" tIns="45720" rIns="91440" bIns="45720" rtlCol="0" anchor="b"/>
+          <a:lstStyle>
+            <a:lvl1pPr algn="r">
+              <a:defRPr sz="1200"/>
+            </a:lvl1pPr>
+          </a:lstStyle>
+          <a:p>
+            <a:fld id="{18BDFEC3-8487-43E8-A154-7C12CBC1FFF2}" type="slidenum">
+              <a:rPr lang="en-US" smtClean="0"/>
+              <a:t>‹#›</a:t>
+            </a:fld>
+            <a:endParaRPr lang="en-US"/>
+          </a:p>
+        </p:txBody>
+      </p:sp>
+    </p:spTree>
+    <p:extLst>
+      <p:ext uri="{BB962C8B-B14F-4D97-AF65-F5344CB8AC3E}">
+        <p14:creationId xmlns:p14="http://schemas.microsoft.com/office/powerpoint/2010/main" val="3782709779"/>
+      </p:ext>
+    </p:extLst>
+  </p:cSld>
+  <p:clrMap bg1="lt1" tx1="dk1" bg2="lt2" tx2="dk2" accent1="accent1" accent2="accent2" accent3="accent3" accent4="accent4" accent5="accent5" accent6="accent6" hlink="hlink" folHlink="folHlink"/>
+  <p:notesStyle>
+    <a:lvl1pPr marL="0" algn="l" defTabSz="914400" rtl="0" eaLnBrk="1" latinLnBrk="0" hangingPunct="1">
+      <a:defRPr sz="1200" kern="1200">
+        <a:solidFill>
+          <a:schemeClr val="tx1"/>
+        </a:solidFill>
+        <a:latin typeface="+mn-lt"/>
+        <a:ea typeface="+mn-ea"/>
+        <a:cs typeface="+mn-cs"/>
+      </a:defRPr>
+    </a:lvl1pPr>
+    <a:lvl2pPr marL="457200" algn="l" defTabSz="914400" rtl="0" eaLnBrk="1" latinLnBrk="0" hangingPunct="1">
+      <a:defRPr sz="1200" kern="1200">
+        <a:solidFill>
+          <a:schemeClr val="tx1"/>
+        </a:solidFill>
+        <a:latin typeface="+mn-lt"/>
+        <a:ea typeface="+mn-ea"/>
+        <a:cs typeface="+mn-cs"/>
+      </a:defRPr>
+    </a:lvl2pPr>
+    <a:lvl3pPr marL="914400" algn="l" defTabSz="914400" rtl="0" eaLnBrk="1" latinLnBrk="0" hangingPunct="1">
+      <a:defRPr sz="1200" kern="1200">
+        <a:solidFill>
+          <a:schemeClr val="tx1"/>
+        </a:solidFill>
+        <a:latin typeface="+mn-lt"/>
+        <a:ea typeface="+mn-ea"/>
+        <a:cs typeface="+mn-cs"/>
+      </a:defRPr>
+    </a:lvl3pPr>
+    <a:lvl4pPr marL="1371600" algn="l" defTabSz="914400" rtl="0" eaLnBrk="1" latinLnBrk="0" hangingPunct="1">
+      <a:defRPr sz="1200" kern="1200">
+        <a:solidFill>
+          <a:schemeClr val="tx1"/>
+        </a:solidFill>
+        <a:latin typeface="+mn-lt"/>
+        <a:ea typeface="+mn-ea"/>
+        <a:cs typeface="+mn-cs"/>
+      </a:defRPr>
+    </a:lvl4pPr>
+    <a:lvl5pPr marL="1828800" algn="l" defTabSz="914400" rtl="0" eaLnBrk="1" latinLnBrk="0" hangingPunct="1">
+      <a:defRPr sz="1200" kern="1200">
+        <a:solidFill>
+          <a:schemeClr val="tx1"/>
+        </a:solidFill>
+        <a:latin typeface="+mn-lt"/>
+        <a:ea typeface="+mn-ea"/>
+        <a:cs typeface="+mn-cs"/>
+      </a:defRPr>
+    </a:lvl5pPr>
+    <a:lvl6pPr marL="2286000" algn="l" defTabSz="914400" rtl="0" eaLnBrk="1" latinLnBrk="0" hangingPunct="1">
+      <a:defRPr sz="1200" kern="1200">
+        <a:solidFill>
+          <a:schemeClr val="tx1"/>
+        </a:solidFill>
+        <a:latin typeface="+mn-lt"/>
+        <a:ea typeface="+mn-ea"/>
+        <a:cs typeface="+mn-cs"/>
+      </a:defRPr>
+    </a:lvl6pPr>
+    <a:lvl7pPr marL="2743200" algn="l" defTabSz="914400" rtl="0" eaLnBrk="1" latinLnBrk="0" hangingPunct="1">
+      <a:defRPr sz="1200" kern="1200">
+        <a:solidFill>
+          <a:schemeClr val="tx1"/>
+        </a:solidFill>
+        <a:latin typeface="+mn-lt"/>
+        <a:ea typeface="+mn-ea"/>
+        <a:cs typeface="+mn-cs"/>
+      </a:defRPr>
+    </a:lvl7pPr>
+    <a:lvl8pPr marL="3200400" algn="l" defTabSz="914400" rtl="0" eaLnBrk="1" latinLnBrk="0" hangingPunct="1">
+      <a:defRPr sz="1200" kern="1200">
+        <a:solidFill>
+          <a:schemeClr val="tx1"/>
+        </a:solidFill>
+        <a:latin typeface="+mn-lt"/>
+        <a:ea typeface="+mn-ea"/>
+        <a:cs typeface="+mn-cs"/>
+      </a:defRPr>
+    </a:lvl8pPr>
+    <a:lvl9pPr marL="3657600" algn="l" defTabSz="914400" rtl="0" eaLnBrk="1" latinLnBrk="0" hangingPunct="1">
+      <a:defRPr sz="1200" kern="1200">
+        <a:solidFill>
+          <a:schemeClr val="tx1"/>
+        </a:solidFill>
+        <a:latin typeface="+mn-lt"/>
+        <a:ea typeface="+mn-ea"/>
+        <a:cs typeface="+mn-cs"/>
+      </a:defRPr>
+    </a:lvl9pPr>
+  </p:notesStyle>
+</p:notesMaster>
+</file>
+
+<file path=ppt/notesSlides/notesSlide1.xml><?xml version="1.0" encoding="utf-8"?>
+<p:notes xmlns:a="http://schemas.openxmlformats.org/drawingml/2006/main" xmlns:r="http://schemas.openxmlformats.org/officeDocument/2006/relationships" xmlns:p="http://schemas.openxmlformats.org/presentationml/2006/main">
+  <p:cSld>
+    <p:spTree>
+      <p:nvGrpSpPr>
+        <p:cNvPr id="1" name=""/>
+        <p:cNvGrpSpPr/>
+        <p:nvPr/>
+      </p:nvGrpSpPr>
+      <p:grpSpPr>
+        <a:xfrm>
+          <a:off x="0" y="0"/>
+          <a:ext cx="0" cy="0"/>
+          <a:chOff x="0" y="0"/>
+          <a:chExt cx="0" cy="0"/>
+        </a:xfrm>
+      </p:grpSpPr>
+      <p:sp>
+        <p:nvSpPr>
+          <p:cNvPr id="2" name="Slide Image Placeholder 1"/>
+          <p:cNvSpPr>
+            <a:spLocks noGrp="1" noRot="1" noChangeAspect="1"/>
+          </p:cNvSpPr>
+          <p:nvPr>
+            <p:ph type="sldImg"/>
+          </p:nvPr>
+        </p:nvSpPr>
+        <p:spPr/>
+      </p:sp>
+      <p:sp>
+        <p:nvSpPr>
+          <p:cNvPr id="3" name="Notes Placeholder 2"/>
+          <p:cNvSpPr>
+            <a:spLocks noGrp="1"/>
+          </p:cNvSpPr>
+          <p:nvPr>
+            <p:ph type="body" idx="1"/>
+          </p:nvPr>
+        </p:nvSpPr>
+        <p:spPr/>
+        <p:txBody>
+          <a:bodyPr/>
+          <a:lstStyle/>
+          <a:p>
+            <a:pPr lvl="0" indent="0" marL="0">
+              <a:buNone/>
+            </a:pPr>
+            <a:r>
+              <a:rPr/>
+              <a:t>Both worksheet analyses use the same Husker file and the same post-1997 selection.</a:t>
+            </a:r>
+          </a:p>
+        </p:txBody>
+      </p:sp>
+      <p:sp>
+        <p:nvSpPr>
+          <p:cNvPr id="4" name="Slide Number Placeholder 3"/>
+          <p:cNvSpPr>
+            <a:spLocks noGrp="1"/>
+          </p:cNvSpPr>
+          <p:nvPr>
+            <p:ph type="sldNum" sz="quarter" idx="10"/>
+          </p:nvPr>
+        </p:nvSpPr>
+        <p:spPr/>
+        <p:txBody>
+          <a:bodyPr/>
+          <a:lstStyle/>
+          <a:p>
+            <a:fld id="{18BDFEC3-8487-43E8-A154-7C12CBC1FFF2}" type="slidenum">
+              <a:rPr lang="en-US"/>
+              <a:t>2</a:t>
+            </a:fld>
+            <a:endParaRPr lang="en-US"/>
+          </a:p>
+        </p:txBody>
+      </p:sp>
+    </p:spTree>
+  </p:cSld>
+</p:notes>
+</file>
+
+<file path=ppt/notesSlides/notesSlide10.xml><?xml version="1.0" encoding="utf-8"?>
+<p:notes xmlns:a="http://schemas.openxmlformats.org/drawingml/2006/main" xmlns:r="http://schemas.openxmlformats.org/officeDocument/2006/relationships" xmlns:p="http://schemas.openxmlformats.org/presentationml/2006/main">
+  <p:cSld>
+    <p:spTree>
+      <p:nvGrpSpPr>
+        <p:cNvPr id="1" name=""/>
+        <p:cNvGrpSpPr/>
+        <p:nvPr/>
+      </p:nvGrpSpPr>
+      <p:grpSpPr>
+        <a:xfrm>
+          <a:off x="0" y="0"/>
+          <a:ext cx="0" cy="0"/>
+          <a:chOff x="0" y="0"/>
+          <a:chExt cx="0" cy="0"/>
+        </a:xfrm>
+      </p:grpSpPr>
+      <p:sp>
+        <p:nvSpPr>
+          <p:cNvPr id="2" name="Slide Image Placeholder 1"/>
+          <p:cNvSpPr>
+            <a:spLocks noGrp="1" noRot="1" noChangeAspect="1"/>
+          </p:cNvSpPr>
+          <p:nvPr>
+            <p:ph type="sldImg"/>
+          </p:nvPr>
+        </p:nvSpPr>
+        <p:spPr/>
+      </p:sp>
+      <p:sp>
+        <p:nvSpPr>
+          <p:cNvPr id="3" name="Notes Placeholder 2"/>
+          <p:cNvSpPr>
+            <a:spLocks noGrp="1"/>
+          </p:cNvSpPr>
+          <p:nvPr>
+            <p:ph type="body" idx="1"/>
+          </p:nvPr>
+        </p:nvSpPr>
+        <p:spPr/>
+        <p:txBody>
+          <a:bodyPr/>
+          <a:lstStyle/>
+          <a:p>
+            <a:pPr lvl="0" indent="0" marL="0">
+              <a:buNone/>
+            </a:pPr>
+            <a:r>
+              <a:rPr/>
+              <a:t>The comparison describes what adjustment changed. It does not, by itself, identify a causal mechanism.</a:t>
+            </a:r>
+          </a:p>
+        </p:txBody>
+      </p:sp>
+      <p:sp>
+        <p:nvSpPr>
+          <p:cNvPr id="4" name="Slide Number Placeholder 3"/>
+          <p:cNvSpPr>
+            <a:spLocks noGrp="1"/>
+          </p:cNvSpPr>
+          <p:nvPr>
+            <p:ph type="sldNum" sz="quarter" idx="10"/>
+          </p:nvPr>
+        </p:nvSpPr>
+        <p:spPr/>
+        <p:txBody>
+          <a:bodyPr/>
+          <a:lstStyle/>
+          <a:p>
+            <a:fld id="{18BDFEC3-8487-43E8-A154-7C12CBC1FFF2}" type="slidenum">
+              <a:rPr lang="en-US"/>
+              <a:t>12</a:t>
+            </a:fld>
+            <a:endParaRPr lang="en-US"/>
+          </a:p>
+        </p:txBody>
+      </p:sp>
+    </p:spTree>
+  </p:cSld>
+</p:notes>
+</file>
+
+<file path=ppt/notesSlides/notesSlide11.xml><?xml version="1.0" encoding="utf-8"?>
+<p:notes xmlns:a="http://schemas.openxmlformats.org/drawingml/2006/main" xmlns:r="http://schemas.openxmlformats.org/officeDocument/2006/relationships" xmlns:p="http://schemas.openxmlformats.org/presentationml/2006/main">
+  <p:cSld>
+    <p:spTree>
+      <p:nvGrpSpPr>
+        <p:cNvPr id="1" name=""/>
+        <p:cNvGrpSpPr/>
+        <p:nvPr/>
+      </p:nvGrpSpPr>
+      <p:grpSpPr>
+        <a:xfrm>
+          <a:off x="0" y="0"/>
+          <a:ext cx="0" cy="0"/>
+          <a:chOff x="0" y="0"/>
+          <a:chExt cx="0" cy="0"/>
+        </a:xfrm>
+      </p:grpSpPr>
+      <p:sp>
+        <p:nvSpPr>
+          <p:cNvPr id="2" name="Slide Image Placeholder 1"/>
+          <p:cNvSpPr>
+            <a:spLocks noGrp="1" noRot="1" noChangeAspect="1"/>
+          </p:cNvSpPr>
+          <p:nvPr>
+            <p:ph type="sldImg"/>
+          </p:nvPr>
+        </p:nvSpPr>
+        <p:spPr/>
+      </p:sp>
+      <p:sp>
+        <p:nvSpPr>
+          <p:cNvPr id="3" name="Notes Placeholder 2"/>
+          <p:cNvSpPr>
+            <a:spLocks noGrp="1"/>
+          </p:cNvSpPr>
+          <p:nvPr>
+            <p:ph type="body" idx="1"/>
+          </p:nvPr>
+        </p:nvSpPr>
+        <p:spPr/>
+        <p:txBody>
+          <a:bodyPr/>
+          <a:lstStyle/>
+          <a:p>
+            <a:pPr lvl="0" indent="0" marL="0">
+              <a:buNone/>
+            </a:pPr>
+            <a:r>
+              <a:rPr/>
+              <a:t>Check model N and predictor correlations before interpreting unusual coefficient changes. Win and home are binary predictors, so verify their 0/1 labels.</a:t>
+            </a:r>
+          </a:p>
+        </p:txBody>
+      </p:sp>
+      <p:sp>
+        <p:nvSpPr>
+          <p:cNvPr id="4" name="Slide Number Placeholder 3"/>
+          <p:cNvSpPr>
+            <a:spLocks noGrp="1"/>
+          </p:cNvSpPr>
+          <p:nvPr>
+            <p:ph type="sldNum" sz="quarter" idx="10"/>
+          </p:nvPr>
+        </p:nvSpPr>
+        <p:spPr/>
+        <p:txBody>
+          <a:bodyPr/>
+          <a:lstStyle/>
+          <a:p>
+            <a:fld id="{18BDFEC3-8487-43E8-A154-7C12CBC1FFF2}" type="slidenum">
+              <a:rPr lang="en-US"/>
+              <a:t>13</a:t>
+            </a:fld>
+            <a:endParaRPr lang="en-US"/>
+          </a:p>
+        </p:txBody>
+      </p:sp>
+    </p:spTree>
+  </p:cSld>
+</p:notes>
+</file>
+
+<file path=ppt/notesSlides/notesSlide12.xml><?xml version="1.0" encoding="utf-8"?>
+<p:notes xmlns:a="http://schemas.openxmlformats.org/drawingml/2006/main" xmlns:r="http://schemas.openxmlformats.org/officeDocument/2006/relationships" xmlns:p="http://schemas.openxmlformats.org/presentationml/2006/main">
+  <p:cSld>
+    <p:spTree>
+      <p:nvGrpSpPr>
+        <p:cNvPr id="1" name=""/>
+        <p:cNvGrpSpPr/>
+        <p:nvPr/>
+      </p:nvGrpSpPr>
+      <p:grpSpPr>
+        <a:xfrm>
+          <a:off x="0" y="0"/>
+          <a:ext cx="0" cy="0"/>
+          <a:chOff x="0" y="0"/>
+          <a:chExt cx="0" cy="0"/>
+        </a:xfrm>
+      </p:grpSpPr>
+      <p:sp>
+        <p:nvSpPr>
+          <p:cNvPr id="2" name="Slide Image Placeholder 1"/>
+          <p:cNvSpPr>
+            <a:spLocks noGrp="1" noRot="1" noChangeAspect="1"/>
+          </p:cNvSpPr>
+          <p:nvPr>
+            <p:ph type="sldImg"/>
+          </p:nvPr>
+        </p:nvSpPr>
+        <p:spPr/>
+      </p:sp>
+      <p:sp>
+        <p:nvSpPr>
+          <p:cNvPr id="3" name="Notes Placeholder 2"/>
+          <p:cNvSpPr>
+            <a:spLocks noGrp="1"/>
+          </p:cNvSpPr>
+          <p:nvPr>
+            <p:ph type="body" idx="1"/>
+          </p:nvPr>
+        </p:nvSpPr>
+        <p:spPr/>
+        <p:txBody>
+          <a:bodyPr/>
+          <a:lstStyle/>
+          <a:p>
+            <a:pPr lvl="0" indent="0" marL="0">
+              <a:buNone/>
+            </a:pPr>
+            <a:r>
+              <a:rPr/>
+              <a:t>This output is generated with create_apa_regression_table(), following the final reporting section of the SPSS regression handout.</a:t>
+            </a:r>
+          </a:p>
+          <a:p>
+            <a:pPr lvl="0" indent="0" marL="0">
+              <a:buNone/>
+            </a:pPr>
+          </a:p>
+          <a:p>
+            <a:pPr lvl="0" indent="0" marL="0">
+              <a:buNone/>
+            </a:pPr>
+            <a:r>
+              <a:rPr/>
+              <a:t>For rushing yards, passing yards, temperature, conference game, and home game, the standardized coefficients are β = .73, .49, .00, −.11, and .07, respectively.</a:t>
+            </a:r>
+          </a:p>
+        </p:txBody>
+      </p:sp>
+      <p:sp>
+        <p:nvSpPr>
+          <p:cNvPr id="4" name="Slide Number Placeholder 3"/>
+          <p:cNvSpPr>
+            <a:spLocks noGrp="1"/>
+          </p:cNvSpPr>
+          <p:nvPr>
+            <p:ph type="sldNum" sz="quarter" idx="10"/>
+          </p:nvPr>
+        </p:nvSpPr>
+        <p:spPr/>
+        <p:txBody>
+          <a:bodyPr/>
+          <a:lstStyle/>
+          <a:p>
+            <a:fld id="{18BDFEC3-8487-43E8-A154-7C12CBC1FFF2}" type="slidenum">
+              <a:rPr lang="en-US"/>
+              <a:t>14</a:t>
+            </a:fld>
+            <a:endParaRPr lang="en-US"/>
+          </a:p>
+        </p:txBody>
+      </p:sp>
+    </p:spTree>
+  </p:cSld>
+</p:notes>
+</file>
+
+<file path=ppt/notesSlides/notesSlide13.xml><?xml version="1.0" encoding="utf-8"?>
+<p:notes xmlns:a="http://schemas.openxmlformats.org/drawingml/2006/main" xmlns:r="http://schemas.openxmlformats.org/officeDocument/2006/relationships" xmlns:p="http://schemas.openxmlformats.org/presentationml/2006/main">
+  <p:cSld>
+    <p:spTree>
+      <p:nvGrpSpPr>
+        <p:cNvPr id="1" name=""/>
+        <p:cNvGrpSpPr/>
+        <p:nvPr/>
+      </p:nvGrpSpPr>
+      <p:grpSpPr>
+        <a:xfrm>
+          <a:off x="0" y="0"/>
+          <a:ext cx="0" cy="0"/>
+          <a:chOff x="0" y="0"/>
+          <a:chExt cx="0" cy="0"/>
+        </a:xfrm>
+      </p:grpSpPr>
+      <p:sp>
+        <p:nvSpPr>
+          <p:cNvPr id="2" name="Slide Image Placeholder 1"/>
+          <p:cNvSpPr>
+            <a:spLocks noGrp="1" noRot="1" noChangeAspect="1"/>
+          </p:cNvSpPr>
+          <p:nvPr>
+            <p:ph type="sldImg"/>
+          </p:nvPr>
+        </p:nvSpPr>
+        <p:spPr/>
+      </p:sp>
+      <p:sp>
+        <p:nvSpPr>
+          <p:cNvPr id="3" name="Notes Placeholder 2"/>
+          <p:cNvSpPr>
+            <a:spLocks noGrp="1"/>
+          </p:cNvSpPr>
+          <p:nvPr>
+            <p:ph type="body" idx="1"/>
+          </p:nvPr>
+        </p:nvSpPr>
+        <p:spPr/>
+        <p:txBody>
+          <a:bodyPr/>
+          <a:lstStyle/>
+          <a:p>
+            <a:pPr lvl="0" indent="0" marL="0">
+              <a:buNone/>
+            </a:pPr>
+            <a:r>
+              <a:rPr/>
+              <a:t>Keep conclusions associative. For binary predictors, name the group coded 1 and the reference group coded 0 rather than describing a one-unit quantitative increase.</a:t>
+            </a:r>
+          </a:p>
+        </p:txBody>
+      </p:sp>
+      <p:sp>
+        <p:nvSpPr>
+          <p:cNvPr id="4" name="Slide Number Placeholder 3"/>
+          <p:cNvSpPr>
+            <a:spLocks noGrp="1"/>
+          </p:cNvSpPr>
+          <p:nvPr>
+            <p:ph type="sldNum" sz="quarter" idx="10"/>
+          </p:nvPr>
+        </p:nvSpPr>
+        <p:spPr/>
+        <p:txBody>
+          <a:bodyPr/>
+          <a:lstStyle/>
+          <a:p>
+            <a:fld id="{18BDFEC3-8487-43E8-A154-7C12CBC1FFF2}" type="slidenum">
+              <a:rPr lang="en-US"/>
+              <a:t>15</a:t>
+            </a:fld>
+            <a:endParaRPr lang="en-US"/>
+          </a:p>
+        </p:txBody>
+      </p:sp>
+    </p:spTree>
+  </p:cSld>
+</p:notes>
+</file>
+
+<file path=ppt/notesSlides/notesSlide2.xml><?xml version="1.0" encoding="utf-8"?>
+<p:notes xmlns:a="http://schemas.openxmlformats.org/drawingml/2006/main" xmlns:r="http://schemas.openxmlformats.org/officeDocument/2006/relationships" xmlns:p="http://schemas.openxmlformats.org/presentationml/2006/main">
+  <p:cSld>
+    <p:spTree>
+      <p:nvGrpSpPr>
+        <p:cNvPr id="1" name=""/>
+        <p:cNvGrpSpPr/>
+        <p:nvPr/>
+      </p:nvGrpSpPr>
+      <p:grpSpPr>
+        <a:xfrm>
+          <a:off x="0" y="0"/>
+          <a:ext cx="0" cy="0"/>
+          <a:chOff x="0" y="0"/>
+          <a:chExt cx="0" cy="0"/>
+        </a:xfrm>
+      </p:grpSpPr>
+      <p:sp>
+        <p:nvSpPr>
+          <p:cNvPr id="2" name="Slide Image Placeholder 1"/>
+          <p:cNvSpPr>
+            <a:spLocks noGrp="1" noRot="1" noChangeAspect="1"/>
+          </p:cNvSpPr>
+          <p:nvPr>
+            <p:ph type="sldImg"/>
+          </p:nvPr>
+        </p:nvSpPr>
+        <p:spPr/>
+      </p:sp>
+      <p:sp>
+        <p:nvSpPr>
+          <p:cNvPr id="3" name="Notes Placeholder 2"/>
+          <p:cNvSpPr>
+            <a:spLocks noGrp="1"/>
+          </p:cNvSpPr>
+          <p:nvPr>
+            <p:ph type="body" idx="1"/>
+          </p:nvPr>
+        </p:nvSpPr>
+        <p:spPr/>
+        <p:txBody>
+          <a:bodyPr/>
+          <a:lstStyle/>
+          <a:p>
+            <a:pPr lvl="0" indent="0" marL="0">
+              <a:buNone/>
+            </a:pPr>
+            <a:r>
+              <a:rPr/>
+              <a:t>Keep the dataset and saved syntax open together. Inspect variables and cases in the Data Editor; reproduce every command in the Syntax Editor.</a:t>
+            </a:r>
+          </a:p>
+        </p:txBody>
+      </p:sp>
+      <p:sp>
+        <p:nvSpPr>
+          <p:cNvPr id="4" name="Slide Number Placeholder 3"/>
+          <p:cNvSpPr>
+            <a:spLocks noGrp="1"/>
+          </p:cNvSpPr>
+          <p:nvPr>
+            <p:ph type="sldNum" sz="quarter" idx="10"/>
+          </p:nvPr>
+        </p:nvSpPr>
+        <p:spPr/>
+        <p:txBody>
+          <a:bodyPr/>
+          <a:lstStyle/>
+          <a:p>
+            <a:fld id="{18BDFEC3-8487-43E8-A154-7C12CBC1FFF2}" type="slidenum">
+              <a:rPr lang="en-US"/>
+              <a:t>3</a:t>
+            </a:fld>
+            <a:endParaRPr lang="en-US"/>
+          </a:p>
+        </p:txBody>
+      </p:sp>
+    </p:spTree>
+  </p:cSld>
+</p:notes>
+</file>
+
+<file path=ppt/notesSlides/notesSlide3.xml><?xml version="1.0" encoding="utf-8"?>
+<p:notes xmlns:a="http://schemas.openxmlformats.org/drawingml/2006/main" xmlns:r="http://schemas.openxmlformats.org/officeDocument/2006/relationships" xmlns:p="http://schemas.openxmlformats.org/presentationml/2006/main">
+  <p:cSld>
+    <p:spTree>
+      <p:nvGrpSpPr>
+        <p:cNvPr id="1" name=""/>
+        <p:cNvGrpSpPr/>
+        <p:nvPr/>
+      </p:nvGrpSpPr>
+      <p:grpSpPr>
+        <a:xfrm>
+          <a:off x="0" y="0"/>
+          <a:ext cx="0" cy="0"/>
+          <a:chOff x="0" y="0"/>
+          <a:chExt cx="0" cy="0"/>
+        </a:xfrm>
+      </p:grpSpPr>
+      <p:sp>
+        <p:nvSpPr>
+          <p:cNvPr id="2" name="Slide Image Placeholder 1"/>
+          <p:cNvSpPr>
+            <a:spLocks noGrp="1" noRot="1" noChangeAspect="1"/>
+          </p:cNvSpPr>
+          <p:nvPr>
+            <p:ph type="sldImg"/>
+          </p:nvPr>
+        </p:nvSpPr>
+        <p:spPr/>
+      </p:sp>
+      <p:sp>
+        <p:nvSpPr>
+          <p:cNvPr id="3" name="Notes Placeholder 2"/>
+          <p:cNvSpPr>
+            <a:spLocks noGrp="1"/>
+          </p:cNvSpPr>
+          <p:nvPr>
+            <p:ph type="body" idx="1"/>
+          </p:nvPr>
+        </p:nvSpPr>
+        <p:spPr/>
+        <p:txBody>
+          <a:bodyPr/>
+          <a:lstStyle/>
+          <a:p>
+            <a:pPr lvl="0" indent="0" marL="0">
+              <a:buNone/>
+            </a:pPr>
+            <a:r>
+              <a:rPr/>
+              <a:t>The Output Viewer accumulates tables, charts, warnings, and processing notes. Keep it open beside the data and syntax windows, and export only the results needed for the worksheet or report.</a:t>
+            </a:r>
+          </a:p>
+        </p:txBody>
+      </p:sp>
+      <p:sp>
+        <p:nvSpPr>
+          <p:cNvPr id="4" name="Slide Number Placeholder 3"/>
+          <p:cNvSpPr>
+            <a:spLocks noGrp="1"/>
+          </p:cNvSpPr>
+          <p:nvPr>
+            <p:ph type="sldNum" sz="quarter" idx="10"/>
+          </p:nvPr>
+        </p:nvSpPr>
+        <p:spPr/>
+        <p:txBody>
+          <a:bodyPr/>
+          <a:lstStyle/>
+          <a:p>
+            <a:fld id="{18BDFEC3-8487-43E8-A154-7C12CBC1FFF2}" type="slidenum">
+              <a:rPr lang="en-US"/>
+              <a:t>4</a:t>
+            </a:fld>
+            <a:endParaRPr lang="en-US"/>
+          </a:p>
+        </p:txBody>
+      </p:sp>
+    </p:spTree>
+  </p:cSld>
+</p:notes>
+</file>
+
+<file path=ppt/notesSlides/notesSlide4.xml><?xml version="1.0" encoding="utf-8"?>
+<p:notes xmlns:a="http://schemas.openxmlformats.org/drawingml/2006/main" xmlns:r="http://schemas.openxmlformats.org/officeDocument/2006/relationships" xmlns:p="http://schemas.openxmlformats.org/presentationml/2006/main">
+  <p:cSld>
+    <p:spTree>
+      <p:nvGrpSpPr>
+        <p:cNvPr id="1" name=""/>
+        <p:cNvGrpSpPr/>
+        <p:nvPr/>
+      </p:nvGrpSpPr>
+      <p:grpSpPr>
+        <a:xfrm>
+          <a:off x="0" y="0"/>
+          <a:ext cx="0" cy="0"/>
+          <a:chOff x="0" y="0"/>
+          <a:chExt cx="0" cy="0"/>
+        </a:xfrm>
+      </p:grpSpPr>
+      <p:sp>
+        <p:nvSpPr>
+          <p:cNvPr id="2" name="Slide Image Placeholder 1"/>
+          <p:cNvSpPr>
+            <a:spLocks noGrp="1" noRot="1" noChangeAspect="1"/>
+          </p:cNvSpPr>
+          <p:nvPr>
+            <p:ph type="sldImg"/>
+          </p:nvPr>
+        </p:nvSpPr>
+        <p:spPr/>
+      </p:sp>
+      <p:sp>
+        <p:nvSpPr>
+          <p:cNvPr id="3" name="Notes Placeholder 2"/>
+          <p:cNvSpPr>
+            <a:spLocks noGrp="1"/>
+          </p:cNvSpPr>
+          <p:nvPr>
+            <p:ph type="body" idx="1"/>
+          </p:nvPr>
+        </p:nvSpPr>
+        <p:spPr/>
+        <p:txBody>
+          <a:bodyPr/>
+          <a:lstStyle/>
+          <a:p>
+            <a:pPr lvl="0" indent="0" marL="0">
+              <a:buNone/>
+            </a:pPr>
+            <a:r>
+              <a:rPr/>
+              <a:t>The worksheet’s central task is comparing each bivariate correlation with its adjusted regression coefficient.</a:t>
+            </a:r>
+          </a:p>
+        </p:txBody>
+      </p:sp>
+      <p:sp>
+        <p:nvSpPr>
+          <p:cNvPr id="4" name="Slide Number Placeholder 3"/>
+          <p:cNvSpPr>
+            <a:spLocks noGrp="1"/>
+          </p:cNvSpPr>
+          <p:nvPr>
+            <p:ph type="sldNum" sz="quarter" idx="10"/>
+          </p:nvPr>
+        </p:nvSpPr>
+        <p:spPr/>
+        <p:txBody>
+          <a:bodyPr/>
+          <a:lstStyle/>
+          <a:p>
+            <a:fld id="{18BDFEC3-8487-43E8-A154-7C12CBC1FFF2}" type="slidenum">
+              <a:rPr lang="en-US"/>
+              <a:t>5</a:t>
+            </a:fld>
+            <a:endParaRPr lang="en-US"/>
+          </a:p>
+        </p:txBody>
+      </p:sp>
+    </p:spTree>
+  </p:cSld>
+</p:notes>
+</file>
+
+<file path=ppt/notesSlides/notesSlide5.xml><?xml version="1.0" encoding="utf-8"?>
+<p:notes xmlns:a="http://schemas.openxmlformats.org/drawingml/2006/main" xmlns:r="http://schemas.openxmlformats.org/officeDocument/2006/relationships" xmlns:p="http://schemas.openxmlformats.org/presentationml/2006/main">
+  <p:cSld>
+    <p:spTree>
+      <p:nvGrpSpPr>
+        <p:cNvPr id="1" name=""/>
+        <p:cNvGrpSpPr/>
+        <p:nvPr/>
+      </p:nvGrpSpPr>
+      <p:grpSpPr>
+        <a:xfrm>
+          <a:off x="0" y="0"/>
+          <a:ext cx="0" cy="0"/>
+          <a:chOff x="0" y="0"/>
+          <a:chExt cx="0" cy="0"/>
+        </a:xfrm>
+      </p:grpSpPr>
+      <p:sp>
+        <p:nvSpPr>
+          <p:cNvPr id="2" name="Slide Image Placeholder 1"/>
+          <p:cNvSpPr>
+            <a:spLocks noGrp="1" noRot="1" noChangeAspect="1"/>
+          </p:cNvSpPr>
+          <p:nvPr>
+            <p:ph type="sldImg"/>
+          </p:nvPr>
+        </p:nvSpPr>
+        <p:spPr/>
+      </p:sp>
+      <p:sp>
+        <p:nvSpPr>
+          <p:cNvPr id="3" name="Notes Placeholder 2"/>
+          <p:cNvSpPr>
+            <a:spLocks noGrp="1"/>
+          </p:cNvSpPr>
+          <p:nvPr>
+            <p:ph type="body" idx="1"/>
+          </p:nvPr>
+        </p:nvSpPr>
+        <p:spPr/>
+        <p:txBody>
+          <a:bodyPr/>
+          <a:lstStyle/>
+          <a:p>
+            <a:pPr lvl="0" indent="0" marL="0">
+              <a:buNone/>
+            </a:pPr>
+            <a:r>
+              <a:rPr/>
+              <a:t>Quantitative coefficients describe a one-unit change. A binary 0/1 coefficient is an adjusted difference between group 1 and group 0.</a:t>
+            </a:r>
+          </a:p>
+        </p:txBody>
+      </p:sp>
+      <p:sp>
+        <p:nvSpPr>
+          <p:cNvPr id="4" name="Slide Number Placeholder 3"/>
+          <p:cNvSpPr>
+            <a:spLocks noGrp="1"/>
+          </p:cNvSpPr>
+          <p:nvPr>
+            <p:ph type="sldNum" sz="quarter" idx="10"/>
+          </p:nvPr>
+        </p:nvSpPr>
+        <p:spPr/>
+        <p:txBody>
+          <a:bodyPr/>
+          <a:lstStyle/>
+          <a:p>
+            <a:fld id="{18BDFEC3-8487-43E8-A154-7C12CBC1FFF2}" type="slidenum">
+              <a:rPr lang="en-US"/>
+              <a:t>6</a:t>
+            </a:fld>
+            <a:endParaRPr lang="en-US"/>
+          </a:p>
+        </p:txBody>
+      </p:sp>
+    </p:spTree>
+  </p:cSld>
+</p:notes>
+</file>
+
+<file path=ppt/notesSlides/notesSlide6.xml><?xml version="1.0" encoding="utf-8"?>
+<p:notes xmlns:a="http://schemas.openxmlformats.org/drawingml/2006/main" xmlns:r="http://schemas.openxmlformats.org/officeDocument/2006/relationships" xmlns:p="http://schemas.openxmlformats.org/presentationml/2006/main">
+  <p:cSld>
+    <p:spTree>
+      <p:nvGrpSpPr>
+        <p:cNvPr id="1" name=""/>
+        <p:cNvGrpSpPr/>
+        <p:nvPr/>
+      </p:nvGrpSpPr>
+      <p:grpSpPr>
+        <a:xfrm>
+          <a:off x="0" y="0"/>
+          <a:ext cx="0" cy="0"/>
+          <a:chOff x="0" y="0"/>
+          <a:chExt cx="0" cy="0"/>
+        </a:xfrm>
+      </p:grpSpPr>
+      <p:sp>
+        <p:nvSpPr>
+          <p:cNvPr id="2" name="Slide Image Placeholder 1"/>
+          <p:cNvSpPr>
+            <a:spLocks noGrp="1" noRot="1" noChangeAspect="1"/>
+          </p:cNvSpPr>
+          <p:nvPr>
+            <p:ph type="sldImg"/>
+          </p:nvPr>
+        </p:nvSpPr>
+        <p:spPr/>
+      </p:sp>
+      <p:sp>
+        <p:nvSpPr>
+          <p:cNvPr id="3" name="Notes Placeholder 2"/>
+          <p:cNvSpPr>
+            <a:spLocks noGrp="1"/>
+          </p:cNvSpPr>
+          <p:nvPr>
+            <p:ph type="body" idx="1"/>
+          </p:nvPr>
+        </p:nvSpPr>
+        <p:spPr/>
+        <p:txBody>
+          <a:bodyPr/>
+          <a:lstStyle/>
+          <a:p>
+            <a:pPr lvl="0" indent="0" marL="0">
+              <a:buNone/>
+            </a:pPr>
+            <a:r>
+              <a:rPr/>
+              <a:t>Keep this filter active for both models. No game from 1997 or earlier should appear in the active sample.</a:t>
+            </a:r>
+          </a:p>
+        </p:txBody>
+      </p:sp>
+      <p:sp>
+        <p:nvSpPr>
+          <p:cNvPr id="4" name="Slide Number Placeholder 3"/>
+          <p:cNvSpPr>
+            <a:spLocks noGrp="1"/>
+          </p:cNvSpPr>
+          <p:nvPr>
+            <p:ph type="sldNum" sz="quarter" idx="10"/>
+          </p:nvPr>
+        </p:nvSpPr>
+        <p:spPr/>
+        <p:txBody>
+          <a:bodyPr/>
+          <a:lstStyle/>
+          <a:p>
+            <a:fld id="{18BDFEC3-8487-43E8-A154-7C12CBC1FFF2}" type="slidenum">
+              <a:rPr lang="en-US"/>
+              <a:t>7</a:t>
+            </a:fld>
+            <a:endParaRPr lang="en-US"/>
+          </a:p>
+        </p:txBody>
+      </p:sp>
+    </p:spTree>
+  </p:cSld>
+</p:notes>
+</file>
+
+<file path=ppt/notesSlides/notesSlide7.xml><?xml version="1.0" encoding="utf-8"?>
+<p:notes xmlns:a="http://schemas.openxmlformats.org/drawingml/2006/main" xmlns:r="http://schemas.openxmlformats.org/officeDocument/2006/relationships" xmlns:p="http://schemas.openxmlformats.org/presentationml/2006/main">
+  <p:cSld>
+    <p:spTree>
+      <p:nvGrpSpPr>
+        <p:cNvPr id="1" name=""/>
+        <p:cNvGrpSpPr/>
+        <p:nvPr/>
+      </p:nvGrpSpPr>
+      <p:grpSpPr>
+        <a:xfrm>
+          <a:off x="0" y="0"/>
+          <a:ext cx="0" cy="0"/>
+          <a:chOff x="0" y="0"/>
+          <a:chExt cx="0" cy="0"/>
+        </a:xfrm>
+      </p:grpSpPr>
+      <p:sp>
+        <p:nvSpPr>
+          <p:cNvPr id="2" name="Slide Image Placeholder 1"/>
+          <p:cNvSpPr>
+            <a:spLocks noGrp="1" noRot="1" noChangeAspect="1"/>
+          </p:cNvSpPr>
+          <p:nvPr>
+            <p:ph type="sldImg"/>
+          </p:nvPr>
+        </p:nvSpPr>
+        <p:spPr/>
+      </p:sp>
+      <p:sp>
+        <p:nvSpPr>
+          <p:cNvPr id="3" name="Notes Placeholder 2"/>
+          <p:cNvSpPr>
+            <a:spLocks noGrp="1"/>
+          </p:cNvSpPr>
+          <p:nvPr>
+            <p:ph type="body" idx="1"/>
+          </p:nvPr>
+        </p:nvSpPr>
+        <p:spPr/>
+        <p:txBody>
+          <a:bodyPr/>
+          <a:lstStyle/>
+          <a:p>
+            <a:pPr lvl="0" indent="0" marL="0">
+              <a:buNone/>
+            </a:pPr>
+            <a:r>
+              <a:rPr/>
+              <a:t>Classify each predictor as quantitative or binary, then record its r and p with Nebraska total score in the worksheet table.</a:t>
+            </a:r>
+          </a:p>
+        </p:txBody>
+      </p:sp>
+      <p:sp>
+        <p:nvSpPr>
+          <p:cNvPr id="4" name="Slide Number Placeholder 3"/>
+          <p:cNvSpPr>
+            <a:spLocks noGrp="1"/>
+          </p:cNvSpPr>
+          <p:nvPr>
+            <p:ph type="sldNum" sz="quarter" idx="10"/>
+          </p:nvPr>
+        </p:nvSpPr>
+        <p:spPr/>
+        <p:txBody>
+          <a:bodyPr/>
+          <a:lstStyle/>
+          <a:p>
+            <a:fld id="{18BDFEC3-8487-43E8-A154-7C12CBC1FFF2}" type="slidenum">
+              <a:rPr lang="en-US"/>
+              <a:t>8</a:t>
+            </a:fld>
+            <a:endParaRPr lang="en-US"/>
+          </a:p>
+        </p:txBody>
+      </p:sp>
+    </p:spTree>
+  </p:cSld>
+</p:notes>
+</file>
+
+<file path=ppt/notesSlides/notesSlide8.xml><?xml version="1.0" encoding="utf-8"?>
+<p:notes xmlns:a="http://schemas.openxmlformats.org/drawingml/2006/main" xmlns:r="http://schemas.openxmlformats.org/officeDocument/2006/relationships" xmlns:p="http://schemas.openxmlformats.org/presentationml/2006/main">
+  <p:cSld>
+    <p:spTree>
+      <p:nvGrpSpPr>
+        <p:cNvPr id="1" name=""/>
+        <p:cNvGrpSpPr/>
+        <p:nvPr/>
+      </p:nvGrpSpPr>
+      <p:grpSpPr>
+        <a:xfrm>
+          <a:off x="0" y="0"/>
+          <a:ext cx="0" cy="0"/>
+          <a:chOff x="0" y="0"/>
+          <a:chExt cx="0" cy="0"/>
+        </a:xfrm>
+      </p:grpSpPr>
+      <p:sp>
+        <p:nvSpPr>
+          <p:cNvPr id="2" name="Slide Image Placeholder 1"/>
+          <p:cNvSpPr>
+            <a:spLocks noGrp="1" noRot="1" noChangeAspect="1"/>
+          </p:cNvSpPr>
+          <p:nvPr>
+            <p:ph type="sldImg"/>
+          </p:nvPr>
+        </p:nvSpPr>
+        <p:spPr/>
+      </p:sp>
+      <p:sp>
+        <p:nvSpPr>
+          <p:cNvPr id="3" name="Notes Placeholder 2"/>
+          <p:cNvSpPr>
+            <a:spLocks noGrp="1"/>
+          </p:cNvSpPr>
+          <p:nvPr>
+            <p:ph type="body" idx="1"/>
+          </p:nvPr>
+        </p:nvSpPr>
+        <p:spPr/>
+        <p:txBody>
+          <a:bodyPr/>
+          <a:lstStyle/>
+          <a:p>
+            <a:pPr lvl="0" indent="0" marL="0">
+              <a:buNone/>
+            </a:pPr>
+            <a:r>
+              <a:rPr/>
+              <a:t>Answer whether the full model works from the omnibus F test, and how well it works from R squared. Interpret coefficients only after the model-level result.</a:t>
+            </a:r>
+          </a:p>
+        </p:txBody>
+      </p:sp>
+      <p:sp>
+        <p:nvSpPr>
+          <p:cNvPr id="4" name="Slide Number Placeholder 3"/>
+          <p:cNvSpPr>
+            <a:spLocks noGrp="1"/>
+          </p:cNvSpPr>
+          <p:nvPr>
+            <p:ph type="sldNum" sz="quarter" idx="10"/>
+          </p:nvPr>
+        </p:nvSpPr>
+        <p:spPr/>
+        <p:txBody>
+          <a:bodyPr/>
+          <a:lstStyle/>
+          <a:p>
+            <a:fld id="{18BDFEC3-8487-43E8-A154-7C12CBC1FFF2}" type="slidenum">
+              <a:rPr lang="en-US"/>
+              <a:t>9</a:t>
+            </a:fld>
+            <a:endParaRPr lang="en-US"/>
+          </a:p>
+        </p:txBody>
+      </p:sp>
+    </p:spTree>
+  </p:cSld>
+</p:notes>
+</file>
+
+<file path=ppt/notesSlides/notesSlide9.xml><?xml version="1.0" encoding="utf-8"?>
+<p:notes xmlns:a="http://schemas.openxmlformats.org/drawingml/2006/main" xmlns:r="http://schemas.openxmlformats.org/officeDocument/2006/relationships" xmlns:p="http://schemas.openxmlformats.org/presentationml/2006/main">
+  <p:cSld>
+    <p:spTree>
+      <p:nvGrpSpPr>
+        <p:cNvPr id="1" name=""/>
+        <p:cNvGrpSpPr/>
+        <p:nvPr/>
+      </p:nvGrpSpPr>
+      <p:grpSpPr>
+        <a:xfrm>
+          <a:off x="0" y="0"/>
+          <a:ext cx="0" cy="0"/>
+          <a:chOff x="0" y="0"/>
+          <a:chExt cx="0" cy="0"/>
+        </a:xfrm>
+      </p:grpSpPr>
+      <p:sp>
+        <p:nvSpPr>
+          <p:cNvPr id="2" name="Slide Image Placeholder 1"/>
+          <p:cNvSpPr>
+            <a:spLocks noGrp="1" noRot="1" noChangeAspect="1"/>
+          </p:cNvSpPr>
+          <p:nvPr>
+            <p:ph type="sldImg"/>
+          </p:nvPr>
+        </p:nvSpPr>
+        <p:spPr/>
+      </p:sp>
+      <p:sp>
+        <p:nvSpPr>
+          <p:cNvPr id="3" name="Notes Placeholder 2"/>
+          <p:cNvSpPr>
+            <a:spLocks noGrp="1"/>
+          </p:cNvSpPr>
+          <p:nvPr>
+            <p:ph type="body" idx="1"/>
+          </p:nvPr>
+        </p:nvSpPr>
+        <p:spPr/>
+        <p:txBody>
+          <a:bodyPr/>
+          <a:lstStyle/>
+          <a:p>
+            <a:pPr lvl="0" indent="0" marL="0">
+              <a:buNone/>
+            </a:pPr>
+            <a:r>
+              <a:rPr/>
+              <a:t>Read the model-level ANOVA and R squared first, then use this coefficients table to interpret the planned predictors in their original units.</a:t>
+            </a:r>
+          </a:p>
+        </p:txBody>
+      </p:sp>
+      <p:sp>
+        <p:nvSpPr>
+          <p:cNvPr id="4" name="Slide Number Placeholder 3"/>
+          <p:cNvSpPr>
+            <a:spLocks noGrp="1"/>
+          </p:cNvSpPr>
+          <p:nvPr>
+            <p:ph type="sldNum" sz="quarter" idx="10"/>
+          </p:nvPr>
+        </p:nvSpPr>
+        <p:spPr/>
+        <p:txBody>
+          <a:bodyPr/>
+          <a:lstStyle/>
+          <a:p>
+            <a:fld id="{18BDFEC3-8487-43E8-A154-7C12CBC1FFF2}" type="slidenum">
+              <a:rPr lang="en-US"/>
+              <a:t>11</a:t>
+            </a:fld>
+            <a:endParaRPr lang="en-US"/>
+          </a:p>
+        </p:txBody>
+      </p:sp>
+    </p:spTree>
+  </p:cSld>
+</p:notes>
+</file>
+
 <file path=ppt/slideLayouts/slideLayout1.xml><?xml version="1.0" encoding="utf-8"?>
 <p:sldLayout xmlns:a="http://schemas.openxmlformats.org/drawingml/2006/main" xmlns:r="http://schemas.openxmlformats.org/officeDocument/2006/relationships" xmlns:p="http://schemas.openxmlformats.org/presentationml/2006/main" type="title" preserve="1">
   <p:cSld name="Title Slide">
@@ -238,10 +1655,7 @@
               <a:buNone/>
               <a:defRPr sz="2000">
                 <a:solidFill>
-                  <a:schemeClr val="tx1">
-                    <a:lumMod val="75000"/>
-                    <a:lumOff val="25000"/>
-                  </a:schemeClr>
+                  <a:srgbClr val="FFFFFF"/>
                 </a:solidFill>
               </a:defRPr>
             </a:lvl1pPr>
@@ -2983,7 +4397,7 @@
         </a:buClr>
         <a:buFont charset="0" panose="020B0604020202020204" pitchFamily="34" typeface="Arial"/>
         <a:buChar char="•"/>
-        <a:defRPr kern="1200" sz="1800">
+        <a:defRPr kern="1200" sz="2000">
           <a:solidFill>
             <a:schemeClr val="tx1">
               <a:lumMod val="85000"/>
@@ -3007,7 +4421,7 @@
         </a:buClr>
         <a:buFont charset="0" panose="020B0604020202020204" pitchFamily="34" typeface="Arial"/>
         <a:buChar char="•"/>
-        <a:defRPr kern="1200" sz="1600">
+        <a:defRPr kern="1200" sz="2000">
           <a:solidFill>
             <a:schemeClr val="tx1">
               <a:lumMod val="85000"/>
@@ -3031,7 +4445,7 @@
         </a:buClr>
         <a:buFont charset="0" panose="020B0604020202020204" pitchFamily="34" typeface="Arial"/>
         <a:buChar char="•"/>
-        <a:defRPr kern="1200" sz="1600">
+        <a:defRPr kern="1200" sz="2000">
           <a:solidFill>
             <a:schemeClr val="tx1">
               <a:lumMod val="85000"/>
@@ -3055,7 +4469,7 @@
         </a:buClr>
         <a:buFont charset="0" panose="020B0604020202020204" pitchFamily="34" typeface="Arial"/>
         <a:buChar char="•"/>
-        <a:defRPr kern="1200" sz="1600">
+        <a:defRPr kern="1200" sz="2000">
           <a:solidFill>
             <a:schemeClr val="tx1">
               <a:lumMod val="85000"/>
@@ -3079,7 +4493,7 @@
         </a:buClr>
         <a:buFont charset="0" panose="020B0604020202020204" pitchFamily="34" typeface="Arial"/>
         <a:buChar char="•"/>
-        <a:defRPr kern="1200" sz="1600">
+        <a:defRPr kern="1200" sz="2000">
           <a:solidFill>
             <a:schemeClr val="tx1">
               <a:lumMod val="85000"/>
@@ -3103,7 +4517,7 @@
         </a:buClr>
         <a:buFont charset="0" panose="020B0604020202020204" pitchFamily="34" typeface="Arial"/>
         <a:buChar char="•"/>
-        <a:defRPr kern="1200" sz="1600">
+        <a:defRPr kern="1200" sz="2000">
           <a:solidFill>
             <a:schemeClr val="tx1"/>
           </a:solidFill>
@@ -3124,7 +4538,7 @@
         </a:buClr>
         <a:buFont charset="0" panose="020B0604020202020204" pitchFamily="34" typeface="Arial"/>
         <a:buChar char="•"/>
-        <a:defRPr kern="1200" sz="1600">
+        <a:defRPr kern="1200" sz="2000">
           <a:solidFill>
             <a:schemeClr val="tx1"/>
           </a:solidFill>
@@ -3145,7 +4559,7 @@
         </a:buClr>
         <a:buFont charset="0" panose="020B0604020202020204" pitchFamily="34" typeface="Arial"/>
         <a:buChar char="•"/>
-        <a:defRPr baseline="0" kern="1200" sz="1600">
+        <a:defRPr baseline="0" kern="1200" sz="2000">
           <a:solidFill>
             <a:schemeClr val="tx1"/>
           </a:solidFill>
@@ -3166,7 +4580,7 @@
         </a:buClr>
         <a:buFont charset="0" panose="020B0604020202020204" pitchFamily="34" typeface="Arial"/>
         <a:buChar char="•"/>
-        <a:defRPr baseline="0" kern="1200" sz="1600">
+        <a:defRPr baseline="0" kern="1200" sz="2000">
           <a:solidFill>
             <a:schemeClr val="tx1"/>
           </a:solidFill>
@@ -3181,7 +4595,7 @@
         <a:defRPr lang="en-US"/>
       </a:defPPr>
       <a:lvl1pPr algn="l" defTabSz="914400" eaLnBrk="1" hangingPunct="1" latinLnBrk="0" marL="0" rtl="0">
-        <a:defRPr kern="1200" sz="1800">
+        <a:defRPr kern="1200" sz="2000">
           <a:solidFill>
             <a:schemeClr val="tx1"/>
           </a:solidFill>
@@ -3191,7 +4605,7 @@
         </a:defRPr>
       </a:lvl1pPr>
       <a:lvl2pPr algn="l" defTabSz="914400" eaLnBrk="1" hangingPunct="1" latinLnBrk="0" marL="457200" rtl="0">
-        <a:defRPr kern="1200" sz="1800">
+        <a:defRPr kern="1200" sz="2000">
           <a:solidFill>
             <a:schemeClr val="tx1"/>
           </a:solidFill>
@@ -3201,7 +4615,7 @@
         </a:defRPr>
       </a:lvl2pPr>
       <a:lvl3pPr algn="l" defTabSz="914400" eaLnBrk="1" hangingPunct="1" latinLnBrk="0" marL="914400" rtl="0">
-        <a:defRPr kern="1200" sz="1800">
+        <a:defRPr kern="1200" sz="2000">
           <a:solidFill>
             <a:schemeClr val="tx1"/>
           </a:solidFill>
@@ -3211,7 +4625,7 @@
         </a:defRPr>
       </a:lvl3pPr>
       <a:lvl4pPr algn="l" defTabSz="914400" eaLnBrk="1" hangingPunct="1" latinLnBrk="0" marL="1371600" rtl="0">
-        <a:defRPr kern="1200" sz="1800">
+        <a:defRPr kern="1200" sz="2000">
           <a:solidFill>
             <a:schemeClr val="tx1"/>
           </a:solidFill>
@@ -3221,7 +4635,7 @@
         </a:defRPr>
       </a:lvl4pPr>
       <a:lvl5pPr algn="l" defTabSz="914400" eaLnBrk="1" hangingPunct="1" latinLnBrk="0" marL="1828800" rtl="0">
-        <a:defRPr kern="1200" sz="1800">
+        <a:defRPr kern="1200" sz="2000">
           <a:solidFill>
             <a:schemeClr val="tx1"/>
           </a:solidFill>
@@ -3231,7 +4645,7 @@
         </a:defRPr>
       </a:lvl5pPr>
       <a:lvl6pPr algn="l" defTabSz="914400" eaLnBrk="1" hangingPunct="1" latinLnBrk="0" marL="2286000" rtl="0">
-        <a:defRPr kern="1200" sz="1800">
+        <a:defRPr kern="1200" sz="2000">
           <a:solidFill>
             <a:schemeClr val="tx1"/>
           </a:solidFill>
@@ -3241,7 +4655,7 @@
         </a:defRPr>
       </a:lvl6pPr>
       <a:lvl7pPr algn="l" defTabSz="914400" eaLnBrk="1" hangingPunct="1" latinLnBrk="0" marL="2743200" rtl="0">
-        <a:defRPr kern="1200" sz="1800">
+        <a:defRPr kern="1200" sz="2000">
           <a:solidFill>
             <a:schemeClr val="tx1"/>
           </a:solidFill>
@@ -3251,7 +4665,7 @@
         </a:defRPr>
       </a:lvl7pPr>
       <a:lvl8pPr algn="l" defTabSz="914400" eaLnBrk="1" hangingPunct="1" latinLnBrk="0" marL="3200400" rtl="0">
-        <a:defRPr kern="1200" sz="1800">
+        <a:defRPr kern="1200" sz="2000">
           <a:solidFill>
             <a:schemeClr val="tx1"/>
           </a:solidFill>
@@ -3261,7 +4675,7 @@
         </a:defRPr>
       </a:lvl8pPr>
       <a:lvl9pPr algn="l" defTabSz="914400" eaLnBrk="1" hangingPunct="1" latinLnBrk="0" marL="3657600" rtl="0">
-        <a:defRPr kern="1200" sz="1800">
+        <a:defRPr kern="1200" sz="2000">
           <a:solidFill>
             <a:schemeClr val="tx1"/>
           </a:solidFill>
@@ -3325,7 +4739,7 @@
             </a:pPr>
             <a:r>
               <a:rPr/>
-              <a:t>Multiple Regression</a:t>
+              <a:t>Read Multiple Regression</a:t>
             </a:r>
           </a:p>
         </p:txBody>
@@ -3356,13 +4770,13 @@
             </a:pPr>
             <a:r>
               <a:rPr/>
-              <a:t>Lab 13</a:t>
+              <a:t>Lab 13 · One Outcome, Several Predictors</a:t>
             </a:r>
             <a:br/>
             <a:br/>
             <a:r>
               <a:rPr/>
-              <a:t>PSYCH 350-Lab</a:t>
+              <a:t>PSYC 350 Laboratory</a:t>
             </a:r>
           </a:p>
         </p:txBody>
@@ -3399,34 +4813,56 @@
             <p:ph type="title"/>
           </p:nvPr>
         </p:nvSpPr>
-        <p:spPr bwMode="blackWhite">
+        <p:spPr>
           <a:xfrm>
-            <a:off x="1097280" y="2386744"/>
-            <a:ext cx="9997440" cy="1645920"/>
+            <a:off x="1097280" y="964692"/>
+            <a:ext cx="9997440" cy="1188720"/>
           </a:xfrm>
-          <a:solidFill>
-            <a:srgbClr val="FFFFFF"/>
-          </a:solidFill>
-          <a:ln w="38100">
-            <a:solidFill>
-              <a:srgbClr val="404040"/>
-            </a:solidFill>
+        </p:spPr>
+        <p:txBody>
+          <a:bodyPr/>
+          <a:lstStyle/>
+          <a:p>
+            <a:pPr lvl="0" indent="0" marL="0">
+              <a:buNone/>
+            </a:pPr>
+            <a:r>
+              <a:rPr/>
+              <a:t>9 Read B, SE, t, and p by row</a:t>
+            </a:r>
+          </a:p>
+        </p:txBody>
+      </p:sp>
+      <p:pic>
+        <p:nvPicPr>
+          <p:cNvPr descr="SPSS-style regression coefficients output predicting Nebraska total score after 1997; the displayed standardized Beta column is blank, so students use the package-generated APA table later in the deck for beta values" id="0" name="Picture 1"/>
+          <p:cNvPicPr>
+            <a:picLocks noGrp="1" noChangeAspect="1"/>
+          </p:cNvPicPr>
+          <p:nvPr/>
+        </p:nvPicPr>
+        <p:blipFill>
+          <a:blip r:embed="rId2"/>
+          <a:stretch>
+            <a:fillRect/>
+          </a:stretch>
+        </p:blipFill>
+        <p:spPr bwMode="auto">
+          <a:xfrm>
+            <a:off x="1092200" y="2692400"/>
+            <a:ext cx="9994900" cy="2984500"/>
+          </a:xfrm>
+          <a:prstGeom prst="rect">
+            <a:avLst/>
+          </a:prstGeom>
+          <a:noFill/>
+          <a:ln w="9525">
+            <a:noFill/>
+            <a:headEnd/>
+            <a:tailEnd/>
           </a:ln>
         </p:spPr>
-        <p:txBody>
-          <a:bodyPr/>
-          <a:lstStyle/>
-          <a:p>
-            <a:pPr lvl="0" indent="0" marL="0">
-              <a:buNone/>
-            </a:pPr>
-            <a:r>
-              <a:rPr/>
-              <a:t>Meet the Predictors</a:t>
-            </a:r>
-          </a:p>
-        </p:txBody>
-      </p:sp>
+      </p:pic>
     </p:spTree>
   </p:cSld>
 </p:sld>
@@ -3474,237 +4910,72 @@
             </a:pPr>
             <a:r>
               <a:rPr/>
-              <a:t>Two Kinds of Predictors</a:t>
-            </a:r>
-          </a:p>
-        </p:txBody>
-      </p:sp>
-      <p:sp>
-        <p:nvSpPr>
-          <p:cNvPr id="1025" name="callout-note" descr="note callout: Quantitative. Rushing yards, passing yards, temperatureb = change in Y per 1 unit of X, holding the others constant"/>
-          <p:cNvSpPr/>
-          <p:nvPr/>
-        </p:nvSpPr>
-        <p:spPr>
-          <a:xfrm>
-            <a:off x="1097280" y="2633472"/>
-            <a:ext cx="9994392" cy="899160"/>
-          </a:xfrm>
-          <a:prstGeom prst="roundRect">
-            <a:avLst>
-              <a:gd name="adj" fmla="val 6000"/>
-            </a:avLst>
-          </a:prstGeom>
-          <a:solidFill>
-            <a:srgbClr val="FEFDFA"/>
-          </a:solidFill>
-          <a:ln w="19050">
-            <a:solidFill>
-              <a:srgbClr val="0066CC"/>
-            </a:solidFill>
-          </a:ln>
-        </p:spPr>
-        <p:txBody>
-          <a:bodyPr lIns="91440" tIns="68580" rIns="91440" bIns="68580" anchor="t" wrap="square">
-            <a:normAutofit/>
-          </a:bodyPr>
-          <a:lstStyle/>
-          <a:p/>
-        </p:txBody>
-      </p:sp>
-      <p:sp>
-        <p:nvSpPr>
-          <p:cNvPr id="1026" name="callout-title" descr=""/>
-          <p:cNvSpPr/>
-          <p:nvPr/>
-        </p:nvSpPr>
-        <p:spPr>
-          <a:xfrm>
-            <a:off x="1097280" y="2633472"/>
-            <a:ext cx="9994392" cy="320040"/>
-          </a:xfrm>
-          <a:prstGeom prst="roundRect">
-            <a:avLst>
-              <a:gd name="adj" fmla="val 6000"/>
-            </a:avLst>
-          </a:prstGeom>
-          <a:solidFill>
-            <a:srgbClr val="0066CC"/>
-          </a:solidFill>
-          <a:ln>
-            <a:noFill/>
-          </a:ln>
-        </p:spPr>
-        <p:txBody>
-          <a:bodyPr lIns="91440" tIns="68580" rIns="91440" bIns="68580" anchor="t" wrap="square">
-            <a:normAutofit/>
-          </a:bodyPr>
-          <a:lstStyle/>
-          <a:p>
-            <a:pPr algn="l"/>
-            <a:r>
-              <a:rPr lang="en-US" sz="1400" b="1" dirty="0">
-                <a:solidFill>
-                  <a:srgbClr val="FEFDFA"/>
-                </a:solidFill>
-              </a:rPr>
-              <a:t>Quantitative</a:t>
-            </a:r>
-          </a:p>
-        </p:txBody>
-      </p:sp>
-      <p:sp>
-        <p:nvSpPr>
-          <p:cNvPr id="1027" name="callout-body" descr=""/>
-          <p:cNvSpPr/>
-          <p:nvPr/>
-        </p:nvSpPr>
-        <p:spPr>
-          <a:xfrm>
-            <a:off x="1097280" y="2953512"/>
-            <a:ext cx="9994392" cy="579120"/>
-          </a:xfrm>
-          <a:prstGeom prst="roundRect">
-            <a:avLst>
-              <a:gd name="adj" fmla="val 6000"/>
-            </a:avLst>
-          </a:prstGeom>
-          <a:solidFill>
-            <a:srgbClr val="FEFDFA"/>
-          </a:solidFill>
-          <a:ln>
-            <a:noFill/>
-          </a:ln>
-        </p:spPr>
-        <p:txBody>
-          <a:bodyPr lIns="91440" tIns="68580" rIns="91440" bIns="68580" anchor="t" wrap="square">
-            <a:normAutofit/>
-          </a:bodyPr>
-          <a:lstStyle/>
-          <a:p>
-            <a:pPr algn="l"/>
-            <a:r>
-              <a:rPr lang="en-US" sz="1200" b="0" dirty="0">
-                <a:solidFill>
-                  <a:srgbClr val="010B13"/>
-                </a:solidFill>
-              </a:rPr>
-              <a:t>Rushing yards, passing yards, temperatureb = change in Y per 1 unit of X, holding the others constant</a:t>
-            </a:r>
-          </a:p>
-        </p:txBody>
-      </p:sp>
-      <p:sp>
-        <p:nvSpPr>
-          <p:cNvPr id="1028" name="callout-tip" descr="tip callout: Binary (0 / 1). Home game? Conference game? Win? (no = 0, yes = 1)b = the mean shift when the answer is “yes”"/>
-          <p:cNvSpPr/>
-          <p:nvPr/>
-        </p:nvSpPr>
-        <p:spPr>
-          <a:xfrm>
-            <a:off x="1097280" y="3624072"/>
-            <a:ext cx="9994392" cy="899160"/>
-          </a:xfrm>
-          <a:prstGeom prst="roundRect">
-            <a:avLst>
-              <a:gd name="adj" fmla="val 6000"/>
-            </a:avLst>
-          </a:prstGeom>
-          <a:solidFill>
-            <a:srgbClr val="FEFDFA"/>
-          </a:solidFill>
-          <a:ln w="19050">
-            <a:solidFill>
-              <a:srgbClr val="009955"/>
-            </a:solidFill>
-          </a:ln>
-        </p:spPr>
-        <p:txBody>
-          <a:bodyPr lIns="91440" tIns="68580" rIns="91440" bIns="68580" anchor="t" wrap="square">
-            <a:normAutofit/>
-          </a:bodyPr>
-          <a:lstStyle/>
-          <a:p/>
-        </p:txBody>
-      </p:sp>
-      <p:sp>
-        <p:nvSpPr>
-          <p:cNvPr id="1029" name="callout-title" descr=""/>
-          <p:cNvSpPr/>
-          <p:nvPr/>
-        </p:nvSpPr>
-        <p:spPr>
-          <a:xfrm>
-            <a:off x="1097280" y="3624072"/>
-            <a:ext cx="9994392" cy="320040"/>
-          </a:xfrm>
-          <a:prstGeom prst="roundRect">
-            <a:avLst>
-              <a:gd name="adj" fmla="val 6000"/>
-            </a:avLst>
-          </a:prstGeom>
-          <a:solidFill>
-            <a:srgbClr val="009955"/>
-          </a:solidFill>
-          <a:ln>
-            <a:noFill/>
-          </a:ln>
-        </p:spPr>
-        <p:txBody>
-          <a:bodyPr lIns="91440" tIns="68580" rIns="91440" bIns="68580" anchor="t" wrap="square">
-            <a:normAutofit/>
-          </a:bodyPr>
-          <a:lstStyle/>
-          <a:p>
-            <a:pPr algn="l"/>
-            <a:r>
-              <a:rPr lang="en-US" sz="1400" b="1" dirty="0">
-                <a:solidFill>
-                  <a:srgbClr val="FEFDFA"/>
-                </a:solidFill>
-              </a:rPr>
-              <a:t>Binary (0 / 1)</a:t>
-            </a:r>
-          </a:p>
-        </p:txBody>
-      </p:sp>
-      <p:sp>
-        <p:nvSpPr>
-          <p:cNvPr id="1030" name="callout-body" descr=""/>
-          <p:cNvSpPr/>
-          <p:nvPr/>
-        </p:nvSpPr>
-        <p:spPr>
-          <a:xfrm>
-            <a:off x="1097280" y="3944112"/>
-            <a:ext cx="9994392" cy="579120"/>
-          </a:xfrm>
-          <a:prstGeom prst="roundRect">
-            <a:avLst>
-              <a:gd name="adj" fmla="val 6000"/>
-            </a:avLst>
-          </a:prstGeom>
-          <a:solidFill>
-            <a:srgbClr val="FEFDFA"/>
-          </a:solidFill>
-          <a:ln>
-            <a:noFill/>
-          </a:ln>
-        </p:spPr>
-        <p:txBody>
-          <a:bodyPr lIns="91440" tIns="68580" rIns="91440" bIns="68580" anchor="t" wrap="square">
-            <a:normAutofit/>
-          </a:bodyPr>
-          <a:lstStyle/>
-          <a:p>
-            <a:pPr algn="l"/>
-            <a:r>
-              <a:rPr lang="en-US" sz="1200" b="0" dirty="0">
-                <a:solidFill>
-                  <a:srgbClr val="010B13"/>
-                </a:solidFill>
-              </a:rPr>
-              <a:t>Home game? Conference game? Win? (no = 0, yes = 1)b = the mean shift when the answer is “yes”</a:t>
+              <a:t>9 Read B, SE, t, and p by row (continued)</a:t>
+            </a:r>
+          </a:p>
+        </p:txBody>
+      </p:sp>
+      <p:sp>
+        <p:nvSpPr>
+          <p:cNvPr id="3" name="Content Placeholder 2"/>
+          <p:cNvSpPr>
+            <a:spLocks noGrp="1"/>
+          </p:cNvSpPr>
+          <p:nvPr>
+            <p:ph idx="1"/>
+          </p:nvPr>
+        </p:nvSpPr>
+        <p:spPr/>
+        <p:txBody>
+          <a:bodyPr/>
+          <a:lstStyle/>
+          <a:p>
+            <a:pPr lvl="0" indent="0" marL="0">
+              <a:buNone/>
+            </a:pPr>
+            <a:r>
+              <a:rPr/>
+              <a:t>The SPSS-style teaching image leaves standardized </a:t>
+            </a:r>
+            <a:r>
+              <a:rPr b="1"/>
+              <a:t>Beta</a:t>
+            </a:r>
+            <a:r>
+              <a:rPr/>
+              <a:t> blank. Read </a:t>
+            </a:r>
+            <a:r>
+              <a:rPr i="1"/>
+              <a:t>B</a:t>
+            </a:r>
+            <a:r>
+              <a:rPr/>
+              <a:t>, </a:t>
+            </a:r>
+            <a:r>
+              <a:rPr i="1"/>
+              <a:t>SE</a:t>
+            </a:r>
+            <a:r>
+              <a:rPr/>
+              <a:t>, </a:t>
+            </a:r>
+            <a:r>
+              <a:rPr i="1"/>
+              <a:t>t</a:t>
+            </a:r>
+            <a:r>
+              <a:rPr/>
+              <a:t>, and </a:t>
+            </a:r>
+            <a:r>
+              <a:rPr i="1"/>
+              <a:t>p</a:t>
+            </a:r>
+            <a:r>
+              <a:rPr/>
+              <a:t> here; use the package-generated APA table later in the deck for β.</a:t>
             </a:r>
           </a:p>
         </p:txBody>
@@ -3756,544 +5027,7 @@
             </a:pPr>
             <a:r>
               <a:rPr/>
-              <a:t>Seeing a Binary Predictor</a:t>
-            </a:r>
-          </a:p>
-        </p:txBody>
-      </p:sp>
-      <p:pic>
-        <p:nvPicPr>
-          <p:cNvPr descr="Scatterplot of Nebraska score versus rushing yards with parallel regression lines for home and away games, showing how a binary predictor shifts the intercept" id="0" name="Picture 1"/>
-          <p:cNvPicPr>
-            <a:picLocks noGrp="1" noChangeAspect="1"/>
-          </p:cNvPicPr>
-          <p:nvPr/>
-        </p:nvPicPr>
-        <p:blipFill>
-          <a:blip r:embed="rId2"/>
-          <a:stretch>
-            <a:fillRect/>
-          </a:stretch>
-        </p:blipFill>
-        <p:spPr bwMode="auto">
-          <a:xfrm>
-            <a:off x="1295400" y="2628900"/>
-            <a:ext cx="4508500" cy="3098800"/>
-          </a:xfrm>
-          <a:prstGeom prst="rect">
-            <a:avLst/>
-          </a:prstGeom>
-          <a:noFill/>
-          <a:ln w="9525">
-            <a:noFill/>
-            <a:headEnd/>
-            <a:tailEnd/>
-          </a:ln>
-        </p:spPr>
-      </p:pic>
-      <p:sp>
-        <p:nvSpPr>
-          <p:cNvPr id="4" name="Content Placeholder 3"/>
-          <p:cNvSpPr>
-            <a:spLocks noGrp="1"/>
-          </p:cNvSpPr>
-          <p:nvPr>
-            <p:ph idx="2" sz="half"/>
-          </p:nvPr>
-        </p:nvSpPr>
-        <p:spPr/>
-        <p:txBody>
-          <a:bodyPr/>
-          <a:lstStyle/>
-          <a:p>
-            <a:pPr lvl="0"/>
-            <a:r>
-              <a:rPr b="1"/>
-              <a:t>Same slope</a:t>
-            </a:r>
-            <a:r>
-              <a:rPr/>
-              <a:t> for rushing yards, home or away</a:t>
-            </a:r>
-          </a:p>
-          <a:p>
-            <a:pPr lvl="0"/>
-            <a:r>
-              <a:rPr/>
-              <a:t>The home line sits </a:t>
-            </a:r>
-            <a:r>
-              <a:rPr b="1"/>
-              <a:t>higher</a:t>
-            </a:r>
-            <a:r>
-              <a:rPr/>
-              <a:t> by exactly the </a:t>
-            </a:r>
-            <a:r>
-              <a:rPr i="1"/>
-              <a:t>b</a:t>
-            </a:r>
-            <a:r>
-              <a:rPr/>
-              <a:t> for “home game”</a:t>
-            </a:r>
-          </a:p>
-          <a:p>
-            <a:pPr lvl="0"/>
-            <a:r>
-              <a:rPr/>
-              <a:t>A binary predictor </a:t>
-            </a:r>
-            <a:r>
-              <a:rPr b="1"/>
-              <a:t>shifts the intercept</a:t>
-            </a:r>
-            <a:r>
-              <a:rPr/>
-              <a:t>, it doesn’t tilt the line</a:t>
-            </a:r>
-          </a:p>
-        </p:txBody>
-      </p:sp>
-    </p:spTree>
-  </p:cSld>
-</p:sld>
-</file>
-
-<file path=ppt/slides/slide13.xml><?xml version="1.0" encoding="utf-8"?>
-<p:sld xmlns:a="http://schemas.openxmlformats.org/drawingml/2006/main" xmlns:r="http://schemas.openxmlformats.org/officeDocument/2006/relationships" xmlns:p="http://schemas.openxmlformats.org/presentationml/2006/main">
-  <p:cSld>
-    <p:spTree>
-      <p:nvGrpSpPr>
-        <p:cNvPr id="1" name=""/>
-        <p:cNvGrpSpPr/>
-        <p:nvPr/>
-      </p:nvGrpSpPr>
-      <p:grpSpPr>
-        <a:xfrm>
-          <a:off x="0" y="0"/>
-          <a:ext cx="0" cy="0"/>
-          <a:chOff x="0" y="0"/>
-          <a:chExt cx="0" cy="0"/>
-        </a:xfrm>
-      </p:grpSpPr>
-      <p:sp>
-        <p:nvSpPr>
-          <p:cNvPr id="2" name="Title 1"/>
-          <p:cNvSpPr>
-            <a:spLocks noGrp="1"/>
-          </p:cNvSpPr>
-          <p:nvPr>
-            <p:ph type="title"/>
-          </p:nvPr>
-        </p:nvSpPr>
-        <p:spPr bwMode="blackWhite">
-          <a:xfrm>
-            <a:off x="1097280" y="2386744"/>
-            <a:ext cx="9997440" cy="1645920"/>
-          </a:xfrm>
-          <a:solidFill>
-            <a:srgbClr val="FFFFFF"/>
-          </a:solidFill>
-          <a:ln w="38100">
-            <a:solidFill>
-              <a:srgbClr val="404040"/>
-            </a:solidFill>
-          </a:ln>
-        </p:spPr>
-        <p:txBody>
-          <a:bodyPr/>
-          <a:lstStyle/>
-          <a:p>
-            <a:pPr lvl="0" indent="0" marL="0">
-              <a:buNone/>
-            </a:pPr>
-            <a:r>
-              <a:rPr/>
-              <a:t>Reading the Output</a:t>
-            </a:r>
-          </a:p>
-        </p:txBody>
-      </p:sp>
-    </p:spTree>
-  </p:cSld>
-</p:sld>
-</file>
-
-<file path=ppt/slides/slide14.xml><?xml version="1.0" encoding="utf-8"?>
-<p:sld xmlns:a="http://schemas.openxmlformats.org/drawingml/2006/main" xmlns:r="http://schemas.openxmlformats.org/officeDocument/2006/relationships" xmlns:p="http://schemas.openxmlformats.org/presentationml/2006/main">
-  <p:cSld>
-    <p:spTree>
-      <p:nvGrpSpPr>
-        <p:cNvPr id="1" name=""/>
-        <p:cNvGrpSpPr/>
-        <p:nvPr/>
-      </p:nvGrpSpPr>
-      <p:grpSpPr>
-        <a:xfrm>
-          <a:off x="0" y="0"/>
-          <a:ext cx="0" cy="0"/>
-          <a:chOff x="0" y="0"/>
-          <a:chExt cx="0" cy="0"/>
-        </a:xfrm>
-      </p:grpSpPr>
-      <p:sp>
-        <p:nvSpPr>
-          <p:cNvPr id="2" name="Title 1"/>
-          <p:cNvSpPr>
-            <a:spLocks noGrp="1"/>
-          </p:cNvSpPr>
-          <p:nvPr>
-            <p:ph type="title"/>
-          </p:nvPr>
-        </p:nvSpPr>
-        <p:spPr>
-          <a:xfrm>
-            <a:off x="1097280" y="964692"/>
-            <a:ext cx="9997440" cy="1188720"/>
-          </a:xfrm>
-        </p:spPr>
-        <p:txBody>
-          <a:bodyPr/>
-          <a:lstStyle/>
-          <a:p>
-            <a:pPr lvl="0" indent="0" marL="0">
-              <a:buNone/>
-            </a:pPr>
-            <a:r>
-              <a:rPr/>
-              <a:t>Level 1: Does the Model Work?</a:t>
-            </a:r>
-          </a:p>
-        </p:txBody>
-      </p:sp>
-      <p:sp>
-        <p:nvSpPr>
-          <p:cNvPr id="1031" name="prose" descr=""/>
-          <p:cNvSpPr/>
-          <p:nvPr/>
-        </p:nvSpPr>
-        <p:spPr>
-          <a:xfrm>
-            <a:off x="1097280" y="2633472"/>
-            <a:ext cx="9994392" cy="182880"/>
-          </a:xfrm>
-          <a:prstGeom prst="roundRect">
-            <a:avLst>
-              <a:gd name="adj" fmla="val 6000"/>
-            </a:avLst>
-          </a:prstGeom>
-          <a:noFill/>
-          <a:ln>
-            <a:noFill/>
-          </a:ln>
-        </p:spPr>
-        <p:txBody>
-          <a:bodyPr lIns="91440" tIns="68580" rIns="91440" bIns="68580" anchor="t" wrap="square">
-            <a:normAutofit/>
-          </a:bodyPr>
-          <a:lstStyle/>
-          <a:p>
-            <a:pPr algn="l"/>
-            <a:r>
-              <a:rPr lang="en-US" sz="1200" b="0" dirty="0">
-                <a:solidFill>
-                  <a:srgbClr val="010B13"/>
-                </a:solidFill>
-              </a:rPr>
-              <a:t>The Model Summary + ANOVA tables:</a:t>
-            </a:r>
-          </a:p>
-        </p:txBody>
-      </p:sp>
-      <p:sp>
-        <p:nvSpPr>
-          <p:cNvPr id="1032" name="prose" descr=""/>
-          <p:cNvSpPr/>
-          <p:nvPr/>
-        </p:nvSpPr>
-        <p:spPr>
-          <a:xfrm>
-            <a:off x="1097280" y="2907792"/>
-            <a:ext cx="9994392" cy="548640"/>
-          </a:xfrm>
-          <a:prstGeom prst="roundRect">
-            <a:avLst>
-              <a:gd name="adj" fmla="val 6000"/>
-            </a:avLst>
-          </a:prstGeom>
-          <a:noFill/>
-          <a:ln>
-            <a:noFill/>
-          </a:ln>
-        </p:spPr>
-        <p:txBody>
-          <a:bodyPr lIns="91440" tIns="68580" rIns="91440" bIns="68580" anchor="t" wrap="square">
-            <a:normAutofit/>
-          </a:bodyPr>
-          <a:lstStyle/>
-          <a:p>
-            <a:pPr algn="l"/>
-            <a:r>
-              <a:rPr lang="en-US" sz="1200" b="0" dirty="0">
-                <a:solidFill>
-                  <a:srgbClr val="010B13"/>
-                </a:solidFill>
-              </a:rPr>
-              <a:t>R² — proportion of criterion variance the whole model explainsAdjusted R² — R² with a penalty for extra predictors (use this one when comparing models)Model F — is R² significantly greater than zero? F(k, n − k − 1), with k predictors</a:t>
-            </a:r>
-          </a:p>
-        </p:txBody>
-      </p:sp>
-      <p:sp>
-        <p:nvSpPr>
-          <p:cNvPr id="1033" name="callout-tip" descr="tip callout: Tip. Start here. If the model F isn’t significant, the individual predictor tests below it are a house built on sand."/>
-          <p:cNvSpPr/>
-          <p:nvPr/>
-        </p:nvSpPr>
-        <p:spPr>
-          <a:xfrm>
-            <a:off x="1097280" y="3547872"/>
-            <a:ext cx="9994392" cy="1082040"/>
-          </a:xfrm>
-          <a:prstGeom prst="roundRect">
-            <a:avLst>
-              <a:gd name="adj" fmla="val 6000"/>
-            </a:avLst>
-          </a:prstGeom>
-          <a:solidFill>
-            <a:srgbClr val="FEFDFA"/>
-          </a:solidFill>
-          <a:ln w="19050">
-            <a:solidFill>
-              <a:srgbClr val="009955"/>
-            </a:solidFill>
-          </a:ln>
-        </p:spPr>
-        <p:txBody>
-          <a:bodyPr lIns="91440" tIns="68580" rIns="91440" bIns="68580" anchor="t" wrap="square">
-            <a:normAutofit/>
-          </a:bodyPr>
-          <a:lstStyle/>
-          <a:p/>
-        </p:txBody>
-      </p:sp>
-      <p:sp>
-        <p:nvSpPr>
-          <p:cNvPr id="1034" name="callout-title" descr=""/>
-          <p:cNvSpPr/>
-          <p:nvPr/>
-        </p:nvSpPr>
-        <p:spPr>
-          <a:xfrm>
-            <a:off x="1097280" y="3547872"/>
-            <a:ext cx="9994392" cy="320040"/>
-          </a:xfrm>
-          <a:prstGeom prst="roundRect">
-            <a:avLst>
-              <a:gd name="adj" fmla="val 6000"/>
-            </a:avLst>
-          </a:prstGeom>
-          <a:solidFill>
-            <a:srgbClr val="009955"/>
-          </a:solidFill>
-          <a:ln>
-            <a:noFill/>
-          </a:ln>
-        </p:spPr>
-        <p:txBody>
-          <a:bodyPr lIns="91440" tIns="68580" rIns="91440" bIns="68580" anchor="t" wrap="square">
-            <a:normAutofit/>
-          </a:bodyPr>
-          <a:lstStyle/>
-          <a:p>
-            <a:pPr algn="l"/>
-            <a:r>
-              <a:rPr lang="en-US" sz="1400" b="1" dirty="0">
-                <a:solidFill>
-                  <a:srgbClr val="FEFDFA"/>
-                </a:solidFill>
-              </a:rPr>
-              <a:t>Tip</a:t>
-            </a:r>
-          </a:p>
-        </p:txBody>
-      </p:sp>
-      <p:sp>
-        <p:nvSpPr>
-          <p:cNvPr id="1035" name="callout-body" descr=""/>
-          <p:cNvSpPr/>
-          <p:nvPr/>
-        </p:nvSpPr>
-        <p:spPr>
-          <a:xfrm>
-            <a:off x="1097280" y="3867912"/>
-            <a:ext cx="9994392" cy="762000"/>
-          </a:xfrm>
-          <a:prstGeom prst="roundRect">
-            <a:avLst>
-              <a:gd name="adj" fmla="val 6000"/>
-            </a:avLst>
-          </a:prstGeom>
-          <a:solidFill>
-            <a:srgbClr val="FEFDFA"/>
-          </a:solidFill>
-          <a:ln>
-            <a:noFill/>
-          </a:ln>
-        </p:spPr>
-        <p:txBody>
-          <a:bodyPr lIns="91440" tIns="68580" rIns="91440" bIns="68580" anchor="t" wrap="square">
-            <a:normAutofit/>
-          </a:bodyPr>
-          <a:lstStyle/>
-          <a:p>
-            <a:pPr algn="l"/>
-            <a:r>
-              <a:rPr lang="en-US" sz="1200" b="0" dirty="0">
-                <a:solidFill>
-                  <a:srgbClr val="010B13"/>
-                </a:solidFill>
-              </a:rPr>
-              <a:t>Start here. If the model F isn’t significant, the individual predictor tests below it are a house built on sand.</a:t>
-            </a:r>
-          </a:p>
-        </p:txBody>
-      </p:sp>
-    </p:spTree>
-  </p:cSld>
-</p:sld>
-</file>
-
-<file path=ppt/slides/slide15.xml><?xml version="1.0" encoding="utf-8"?>
-<p:sld xmlns:a="http://schemas.openxmlformats.org/drawingml/2006/main" xmlns:r="http://schemas.openxmlformats.org/officeDocument/2006/relationships" xmlns:p="http://schemas.openxmlformats.org/presentationml/2006/main">
-  <p:cSld>
-    <p:spTree>
-      <p:nvGrpSpPr>
-        <p:cNvPr id="1" name=""/>
-        <p:cNvGrpSpPr/>
-        <p:nvPr/>
-      </p:nvGrpSpPr>
-      <p:grpSpPr>
-        <a:xfrm>
-          <a:off x="0" y="0"/>
-          <a:ext cx="0" cy="0"/>
-          <a:chOff x="0" y="0"/>
-          <a:chExt cx="0" cy="0"/>
-        </a:xfrm>
-      </p:grpSpPr>
-      <p:sp>
-        <p:nvSpPr>
-          <p:cNvPr id="2" name="Title 1"/>
-          <p:cNvSpPr>
-            <a:spLocks noGrp="1"/>
-          </p:cNvSpPr>
-          <p:nvPr>
-            <p:ph type="title"/>
-          </p:nvPr>
-        </p:nvSpPr>
-        <p:spPr>
-          <a:xfrm>
-            <a:off x="1097280" y="964692"/>
-            <a:ext cx="9997440" cy="1188720"/>
-          </a:xfrm>
-        </p:spPr>
-        <p:txBody>
-          <a:bodyPr/>
-          <a:lstStyle/>
-          <a:p>
-            <a:pPr lvl="0" indent="0" marL="0">
-              <a:buNone/>
-            </a:pPr>
-            <a:r>
-              <a:rPr/>
-              <a:t>Level 2: Which Predictors Matter?</a:t>
-            </a:r>
-          </a:p>
-        </p:txBody>
-      </p:sp>
-      <p:sp>
-        <p:nvSpPr>
-          <p:cNvPr id="3" name="Content Placeholder 2"/>
-          <p:cNvSpPr>
-            <a:spLocks noGrp="1"/>
-          </p:cNvSpPr>
-          <p:nvPr>
-            <p:ph idx="1"/>
-          </p:nvPr>
-        </p:nvSpPr>
-        <p:spPr/>
-        <p:txBody>
-          <a:bodyPr/>
-          <a:lstStyle/>
-          <a:p>
-            <a:pPr lvl="0" indent="0" marL="0">
-              <a:buNone/>
-            </a:pPr>
-            <a:r>
-              <a:rPr/>
-              <a:t>The </a:t>
-            </a:r>
-            <a:r>
-              <a:rPr b="1"/>
-              <a:t>Coefficients</a:t>
-            </a:r>
-            <a:r>
-              <a:rPr/>
-              <a:t> table — one row per predictor:</a:t>
-            </a:r>
-          </a:p>
-        </p:txBody>
-      </p:sp>
-    </p:spTree>
-  </p:cSld>
-</p:sld>
-</file>
-
-<file path=ppt/slides/slide16.xml><?xml version="1.0" encoding="utf-8"?>
-<p:sld xmlns:a="http://schemas.openxmlformats.org/drawingml/2006/main" xmlns:r="http://schemas.openxmlformats.org/officeDocument/2006/relationships" xmlns:p="http://schemas.openxmlformats.org/presentationml/2006/main">
-  <p:cSld>
-    <p:spTree>
-      <p:nvGrpSpPr>
-        <p:cNvPr id="1" name=""/>
-        <p:cNvGrpSpPr/>
-        <p:nvPr/>
-      </p:nvGrpSpPr>
-      <p:grpSpPr>
-        <a:xfrm>
-          <a:off x="0" y="0"/>
-          <a:ext cx="0" cy="0"/>
-          <a:chOff x="0" y="0"/>
-          <a:chExt cx="0" cy="0"/>
-        </a:xfrm>
-      </p:grpSpPr>
-      <p:sp>
-        <p:nvSpPr>
-          <p:cNvPr id="2" name="Title 1"/>
-          <p:cNvSpPr>
-            <a:spLocks noGrp="1"/>
-          </p:cNvSpPr>
-          <p:nvPr>
-            <p:ph type="title"/>
-          </p:nvPr>
-        </p:nvSpPr>
-        <p:spPr>
-          <a:xfrm>
-            <a:off x="1097280" y="964692"/>
-            <a:ext cx="9997440" cy="1188720"/>
-          </a:xfrm>
-        </p:spPr>
-        <p:txBody>
-          <a:bodyPr/>
-          <a:lstStyle/>
-          <a:p>
-            <a:pPr lvl="0" indent="0" marL="0">
-              <a:buNone/>
-            </a:pPr>
-            <a:r>
-              <a:rPr/>
-              <a:t>Level 2: Which Predictors Matter? (continued)</a:t>
+              <a:t>10 Compare r with b</a:t>
             </a:r>
           </a:p>
         </p:txBody>
@@ -4333,7 +5067,7 @@
                       </a:pPr>
                       <a:r>
                         <a:rPr/>
-                        <a:t>Column</a:t>
+                        <a:t>Pattern</a:t>
                       </a:r>
                     </a:p>
                   </a:txBody>
@@ -4349,11 +5083,119 @@
                       </a:pPr>
                       <a:r>
                         <a:rPr/>
-                        <a:t>Meaning</a:t>
+                        <a:t>Worksheet category</a:t>
                       </a:r>
                     </a:p>
                   </a:txBody>
                   <a:tcPr/>
+                </a:tc>
+              </a:tr>
+              <a:tr h="0">
+                <a:tc>
+                  <a:txBody>
+                    <a:bodyPr/>
+                    <a:lstStyle/>
+                    <a:p>
+                      <a:pPr lvl="0" indent="0" marL="0">
+                        <a:buNone/>
+                      </a:pPr>
+                      <a:r>
+                        <a:rPr/>
+                        <a:t>Neither significant</a:t>
+                      </a:r>
+                    </a:p>
+                  </a:txBody>
+                </a:tc>
+                <a:tc>
+                  <a:txBody>
+                    <a:bodyPr/>
+                    <a:lstStyle/>
+                    <a:p>
+                      <a:pPr lvl="0" indent="0" marL="0">
+                        <a:buNone/>
+                      </a:pPr>
+                      <a:r>
+                        <a:rPr/>
+                        <a:t>Neither</a:t>
+                      </a:r>
+                    </a:p>
+                  </a:txBody>
+                </a:tc>
+              </a:tr>
+              <a:tr h="0">
+                <a:tc>
+                  <a:txBody>
+                    <a:bodyPr/>
+                    <a:lstStyle/>
+                    <a:p>
+                      <a:pPr lvl="0" indent="0" marL="0">
+                        <a:buNone/>
+                      </a:pPr>
+                      <a:r>
+                        <a:rPr/>
+                        <a:t>Both significant, same sign</a:t>
+                      </a:r>
+                    </a:p>
+                  </a:txBody>
+                </a:tc>
+                <a:tc>
+                  <a:txBody>
+                    <a:bodyPr/>
+                    <a:lstStyle/>
+                    <a:p>
+                      <a:pPr lvl="0" indent="0" marL="0">
+                        <a:buNone/>
+                      </a:pPr>
+                      <a:r>
+                        <a:rPr/>
+                        <a:t>Stable relationship</a:t>
+                      </a:r>
+                    </a:p>
+                  </a:txBody>
+                </a:tc>
+              </a:tr>
+              <a:tr h="0">
+                <a:tc>
+                  <a:txBody>
+                    <a:bodyPr/>
+                    <a:lstStyle/>
+                    <a:p>
+                      <a:pPr lvl="0" indent="0" marL="0">
+                        <a:buNone/>
+                      </a:pPr>
+                      <a:r>
+                        <a:rPr i="1"/>
+                        <a:t>r</a:t>
+                      </a:r>
+                      <a:r>
+                        <a:rPr/>
+                        <a:t> significant, </a:t>
+                      </a:r>
+                      <a:r>
+                        <a:rPr i="1"/>
+                        <a:t>b</a:t>
+                      </a:r>
+                      <a:r>
+                        <a:rPr/>
+                        <a:t> not</a:t>
+                      </a:r>
+                    </a:p>
+                  </a:txBody>
+                </a:tc>
+                <a:tc>
+                  <a:txBody>
+                    <a:bodyPr/>
+                    <a:lstStyle/>
+                    <a:p>
+                      <a:pPr lvl="0" indent="0" marL="0">
+                        <a:buNone/>
+                      </a:pPr>
+                      <a:r>
+                        <a:rPr/>
+                        <a:t>Shared prediction</a:t>
+                      </a:r>
+                    </a:p>
+                  </a:txBody>
                 </a:tc>
               </a:tr>
               <a:tr h="0">
@@ -4371,7 +5213,7 @@
                       </a:r>
                       <a:r>
                         <a:rPr/>
-                        <a:t> (unstandardized)</a:t>
+                        <a:t> emerges or reverses</a:t>
                       </a:r>
                     </a:p>
                   </a:txBody>
@@ -4386,95 +5228,7 @@
                       </a:pPr>
                       <a:r>
                         <a:rPr/>
-                        <a:t>slope in </a:t>
-                      </a:r>
-                      <a:r>
-                        <a:rPr b="1"/>
-                        <a:t>original units</a:t>
-                      </a:r>
-                      <a:r>
-                        <a:rPr/>
-                        <a:t> (yards → points)</a:t>
-                      </a:r>
-                    </a:p>
-                  </a:txBody>
-                </a:tc>
-              </a:tr>
-              <a:tr h="0">
-                <a:tc>
-                  <a:txBody>
-                    <a:bodyPr/>
-                    <a:lstStyle/>
-                    <a:p>
-                      <a:pPr lvl="0" indent="0" marL="0">
-                        <a:buNone/>
-                      </a:pPr>
-                      <a:r>
-                        <a:rPr/>
-                        <a:t>β (standardized)</a:t>
-                      </a:r>
-                    </a:p>
-                  </a:txBody>
-                </a:tc>
-                <a:tc>
-                  <a:txBody>
-                    <a:bodyPr/>
-                    <a:lstStyle/>
-                    <a:p>
-                      <a:pPr lvl="0" indent="0" marL="0">
-                        <a:buNone/>
-                      </a:pPr>
-                      <a:r>
-                        <a:rPr/>
-                        <a:t>slope in </a:t>
-                      </a:r>
-                      <a:r>
-                        <a:rPr b="1"/>
-                        <a:t>SD units</a:t>
-                      </a:r>
-                      <a:r>
-                        <a:rPr/>
-                        <a:t> — compare across predictors</a:t>
-                      </a:r>
-                    </a:p>
-                  </a:txBody>
-                </a:tc>
-              </a:tr>
-              <a:tr h="0">
-                <a:tc>
-                  <a:txBody>
-                    <a:bodyPr/>
-                    <a:lstStyle/>
-                    <a:p>
-                      <a:pPr lvl="0" indent="0" marL="0">
-                        <a:buNone/>
-                      </a:pPr>
-                      <a:r>
-                        <a:rPr i="1"/>
-                        <a:t>t</a:t>
-                      </a:r>
-                      <a:r>
-                        <a:rPr/>
-                        <a:t>, </a:t>
-                      </a:r>
-                      <a:r>
-                        <a:rPr i="1"/>
-                        <a:t>p</a:t>
-                      </a:r>
-                    </a:p>
-                  </a:txBody>
-                </a:tc>
-                <a:tc>
-                  <a:txBody>
-                    <a:bodyPr/>
-                    <a:lstStyle/>
-                    <a:p>
-                      <a:pPr lvl="0" indent="0" marL="0">
-                        <a:buNone/>
-                      </a:pPr>
-                      <a:r>
-                        <a:rPr/>
-                        <a:t>is this contribution ≠ 0, holding others constant?</a:t>
+                        <a:t>Possible suppression</a:t>
                       </a:r>
                     </a:p>
                   </a:txBody>
@@ -4489,7 +5243,7 @@
 </p:sld>
 </file>
 
-<file path=ppt/slides/slide17.xml><?xml version="1.0" encoding="utf-8"?>
+<file path=ppt/slides/slide13.xml><?xml version="1.0" encoding="utf-8"?>
 <p:sld xmlns:a="http://schemas.openxmlformats.org/drawingml/2006/main" xmlns:r="http://schemas.openxmlformats.org/officeDocument/2006/relationships" xmlns:p="http://schemas.openxmlformats.org/presentationml/2006/main">
   <p:cSld>
     <p:spTree>
@@ -4531,122 +5285,70 @@
             </a:pPr>
             <a:r>
               <a:rPr/>
-              <a:t>Level 2: Which Predictors Matter? (continued)</a:t>
-            </a:r>
-          </a:p>
-        </p:txBody>
-      </p:sp>
-      <p:sp>
-        <p:nvSpPr>
-          <p:cNvPr id="1036" name="callout-caution" descr="caution callout: Caution. Comparing importance across predictors? Use β, not b — “yards” and “degrees Fahrenheit” aren’t on the same scale."/>
-          <p:cNvSpPr/>
-          <p:nvPr/>
-        </p:nvSpPr>
-        <p:spPr>
-          <a:xfrm>
-            <a:off x="1097280" y="2633472"/>
-            <a:ext cx="9994392" cy="1082040"/>
-          </a:xfrm>
-          <a:prstGeom prst="roundRect">
-            <a:avLst>
-              <a:gd name="adj" fmla="val 6000"/>
-            </a:avLst>
-          </a:prstGeom>
-          <a:solidFill>
-            <a:srgbClr val="FEFDFA"/>
-          </a:solidFill>
-          <a:ln w="19050">
-            <a:solidFill>
-              <a:srgbClr val="B38F00"/>
-            </a:solidFill>
-          </a:ln>
-        </p:spPr>
-        <p:txBody>
-          <a:bodyPr lIns="91440" tIns="68580" rIns="91440" bIns="68580" anchor="t" wrap="square">
-            <a:normAutofit/>
-          </a:bodyPr>
-          <a:lstStyle/>
-          <a:p/>
-        </p:txBody>
-      </p:sp>
-      <p:sp>
-        <p:nvSpPr>
-          <p:cNvPr id="1037" name="callout-title" descr=""/>
-          <p:cNvSpPr/>
-          <p:nvPr/>
-        </p:nvSpPr>
-        <p:spPr>
-          <a:xfrm>
-            <a:off x="1097280" y="2633472"/>
-            <a:ext cx="9994392" cy="320040"/>
-          </a:xfrm>
-          <a:prstGeom prst="roundRect">
-            <a:avLst>
-              <a:gd name="adj" fmla="val 6000"/>
-            </a:avLst>
-          </a:prstGeom>
-          <a:solidFill>
-            <a:srgbClr val="B38F00"/>
-          </a:solidFill>
-          <a:ln>
-            <a:noFill/>
-          </a:ln>
-        </p:spPr>
-        <p:txBody>
-          <a:bodyPr lIns="91440" tIns="68580" rIns="91440" bIns="68580" anchor="t" wrap="square">
-            <a:normAutofit/>
-          </a:bodyPr>
-          <a:lstStyle/>
-          <a:p>
-            <a:pPr algn="l"/>
-            <a:r>
-              <a:rPr lang="en-US" sz="1400" b="1" dirty="0">
-                <a:solidFill>
-                  <a:srgbClr val="FEFDFA"/>
-                </a:solidFill>
-              </a:rPr>
-              <a:t>Caution</a:t>
-            </a:r>
-          </a:p>
-        </p:txBody>
-      </p:sp>
-      <p:sp>
-        <p:nvSpPr>
-          <p:cNvPr id="1038" name="callout-body" descr=""/>
-          <p:cNvSpPr/>
-          <p:nvPr/>
-        </p:nvSpPr>
-        <p:spPr>
-          <a:xfrm>
-            <a:off x="1097280" y="2953512"/>
-            <a:ext cx="9994392" cy="762000"/>
-          </a:xfrm>
-          <a:prstGeom prst="roundRect">
-            <a:avLst>
-              <a:gd name="adj" fmla="val 6000"/>
-            </a:avLst>
-          </a:prstGeom>
-          <a:solidFill>
-            <a:srgbClr val="FEFDFA"/>
-          </a:solidFill>
-          <a:ln>
-            <a:noFill/>
-          </a:ln>
-        </p:spPr>
-        <p:txBody>
-          <a:bodyPr lIns="91440" tIns="68580" rIns="91440" bIns="68580" anchor="t" wrap="square">
-            <a:normAutofit/>
-          </a:bodyPr>
-          <a:lstStyle/>
-          <a:p>
-            <a:pPr algn="l"/>
-            <a:r>
-              <a:rPr lang="en-US" sz="1200" b="0" dirty="0">
-                <a:solidFill>
-                  <a:srgbClr val="010B13"/>
-                </a:solidFill>
-              </a:rPr>
-              <a:t>Comparing importance across predictors? Use β, not b — “yards” and “degrees Fahrenheit” aren’t on the same scale.</a:t>
+              <a:t>11 Complete the second model</a:t>
+            </a:r>
+          </a:p>
+        </p:txBody>
+      </p:sp>
+      <p:sp>
+        <p:nvSpPr>
+          <p:cNvPr id="3" name="Content Placeholder 2"/>
+          <p:cNvSpPr>
+            <a:spLocks noGrp="1"/>
+          </p:cNvSpPr>
+          <p:nvPr>
+            <p:ph idx="1"/>
+          </p:nvPr>
+        </p:nvSpPr>
+        <p:spPr/>
+        <p:txBody>
+          <a:bodyPr/>
+          <a:lstStyle/>
+          <a:p>
+            <a:pPr lvl="0" indent="0" marL="0">
+              <a:buNone/>
+            </a:pPr>
+            <a:r>
+              <a:rPr/>
+              <a:t>Predict opponent total score from:</a:t>
+            </a:r>
+          </a:p>
+          <a:p>
+            <a:pPr lvl="0"/>
+            <a:r>
+              <a:rPr/>
+              <a:t>opponent rushing and passing yards</a:t>
+            </a:r>
+          </a:p>
+          <a:p>
+            <a:pPr lvl="0"/>
+            <a:r>
+              <a:rPr/>
+              <a:t>Nebraska penalty yards and temperature</a:t>
+            </a:r>
+          </a:p>
+          <a:p>
+            <a:pPr lvl="0"/>
+            <a:r>
+              <a:rPr/>
+              <a:t>Nebraska win and home game</a:t>
+            </a:r>
+          </a:p>
+          <a:p>
+            <a:pPr lvl="0" indent="0" marL="0">
+              <a:buNone/>
+            </a:pPr>
+            <a:r>
+              <a:rPr/>
+              <a:t>Repeat </a:t>
+            </a:r>
+            <a:r>
+              <a:rPr b="1"/>
+              <a:t>univariate → bivariate → multivariate</a:t>
+            </a:r>
+            <a:r>
+              <a:rPr/>
+              <a:t> with the same filter.</a:t>
             </a:r>
           </a:p>
         </p:txBody>
@@ -4656,7 +5358,7 @@
 </p:sld>
 </file>
 
-<file path=ppt/slides/slide18.xml><?xml version="1.0" encoding="utf-8"?>
+<file path=ppt/slides/slide14.xml><?xml version="1.0" encoding="utf-8"?>
 <p:sld xmlns:a="http://schemas.openxmlformats.org/drawingml/2006/main" xmlns:r="http://schemas.openxmlformats.org/officeDocument/2006/relationships" xmlns:p="http://schemas.openxmlformats.org/presentationml/2006/main">
   <p:cSld>
     <p:spTree>
@@ -4698,210 +5400,47 @@
             </a:pPr>
             <a:r>
               <a:rPr/>
-              <a:t>Saying It In English</a:t>
-            </a:r>
-          </a:p>
-        </p:txBody>
-      </p:sp>
-      <p:sp>
-        <p:nvSpPr>
-          <p:cNvPr id="1039" name="prose" descr=""/>
-          <p:cNvSpPr/>
+              <a:t>12 Make the APA regression table</a:t>
+            </a:r>
+          </a:p>
+        </p:txBody>
+      </p:sp>
+      <p:pic>
+        <p:nvPicPr>
+          <p:cNvPr descr="APA-style multiple regression table with unstandardized and standardized coefficients for rushing yards, passing yards, temperature, conference game, and home game predicting Nebraska total score" id="0" name="Picture 1"/>
+          <p:cNvPicPr>
+            <a:picLocks noGrp="1" noChangeAspect="1"/>
+          </p:cNvPicPr>
           <p:nvPr/>
-        </p:nvSpPr>
-        <p:spPr>
+        </p:nvPicPr>
+        <p:blipFill>
+          <a:blip r:embed="rId3"/>
+          <a:stretch>
+            <a:fillRect/>
+          </a:stretch>
+        </p:blipFill>
+        <p:spPr bwMode="auto">
           <a:xfrm>
-            <a:off x="1097280" y="2633472"/>
-            <a:ext cx="9994392" cy="182880"/>
+            <a:off x="1828800" y="2628900"/>
+            <a:ext cx="8521700" cy="3098800"/>
           </a:xfrm>
-          <a:prstGeom prst="roundRect">
-            <a:avLst>
-              <a:gd name="adj" fmla="val 6000"/>
-            </a:avLst>
+          <a:prstGeom prst="rect">
+            <a:avLst/>
           </a:prstGeom>
           <a:noFill/>
-          <a:ln>
+          <a:ln w="9525">
             <a:noFill/>
+            <a:headEnd/>
+            <a:tailEnd/>
           </a:ln>
         </p:spPr>
-        <p:txBody>
-          <a:bodyPr lIns="91440" tIns="68580" rIns="91440" bIns="68580" anchor="t" wrap="square">
-            <a:normAutofit/>
-          </a:bodyPr>
-          <a:lstStyle/>
-          <a:p>
-            <a:pPr algn="l"/>
-            <a:r>
-              <a:rPr lang="en-US" sz="1200" b="0" dirty="0">
-                <a:solidFill>
-                  <a:srgbClr val="010B13"/>
-                </a:solidFill>
-              </a:rPr>
-              <a:t>Template for each significant predictor:</a:t>
-            </a:r>
-          </a:p>
-        </p:txBody>
-      </p:sp>
-      <p:sp>
-        <p:nvSpPr>
-          <p:cNvPr id="1040" name="prose" descr=""/>
-          <p:cNvSpPr/>
-          <p:nvPr/>
-        </p:nvSpPr>
-        <p:spPr>
-          <a:xfrm>
-            <a:off x="1097280" y="2907792"/>
-            <a:ext cx="9994392" cy="365760"/>
-          </a:xfrm>
-          <a:prstGeom prst="roundRect">
-            <a:avLst>
-              <a:gd name="adj" fmla="val 6000"/>
-            </a:avLst>
-          </a:prstGeom>
-          <a:noFill/>
-          <a:ln>
-            <a:noFill/>
-          </a:ln>
-        </p:spPr>
-        <p:txBody>
-          <a:bodyPr lIns="91440" tIns="68580" rIns="91440" bIns="68580" anchor="t" wrap="square">
-            <a:normAutofit/>
-          </a:bodyPr>
-          <a:lstStyle/>
-          <a:p>
-            <a:pPr algn="l"/>
-            <a:r>
-              <a:rPr lang="en-US" sz="1200" b="0" dirty="0">
-                <a:solidFill>
-                  <a:srgbClr val="010B13"/>
-                </a:solidFill>
-              </a:rPr>
-              <a:t>“Each additional rushing yard was associated with a b-point increase in score, holding passing yards, temperature, conference, and home-field constant, t(df) = X.XX, p = .XXX.”</a:t>
-            </a:r>
-          </a:p>
-        </p:txBody>
-      </p:sp>
-      <p:sp>
-        <p:nvSpPr>
-          <p:cNvPr id="1041" name="callout-warning" descr="warning callout: Warning. Not “rushing caused points.” These are game-level associations — no random assignment here."/>
-          <p:cNvSpPr/>
-          <p:nvPr/>
-        </p:nvSpPr>
-        <p:spPr>
-          <a:xfrm>
-            <a:off x="1097280" y="3364992"/>
-            <a:ext cx="9994392" cy="899160"/>
-          </a:xfrm>
-          <a:prstGeom prst="roundRect">
-            <a:avLst>
-              <a:gd name="adj" fmla="val 6000"/>
-            </a:avLst>
-          </a:prstGeom>
-          <a:solidFill>
-            <a:srgbClr val="FEFDFA"/>
-          </a:solidFill>
-          <a:ln w="19050">
-            <a:solidFill>
-              <a:srgbClr val="CC6600"/>
-            </a:solidFill>
-          </a:ln>
-        </p:spPr>
-        <p:txBody>
-          <a:bodyPr lIns="91440" tIns="68580" rIns="91440" bIns="68580" anchor="t" wrap="square">
-            <a:normAutofit/>
-          </a:bodyPr>
-          <a:lstStyle/>
-          <a:p/>
-        </p:txBody>
-      </p:sp>
-      <p:sp>
-        <p:nvSpPr>
-          <p:cNvPr id="1042" name="callout-title" descr=""/>
-          <p:cNvSpPr/>
-          <p:nvPr/>
-        </p:nvSpPr>
-        <p:spPr>
-          <a:xfrm>
-            <a:off x="1097280" y="3364992"/>
-            <a:ext cx="9994392" cy="320040"/>
-          </a:xfrm>
-          <a:prstGeom prst="roundRect">
-            <a:avLst>
-              <a:gd name="adj" fmla="val 6000"/>
-            </a:avLst>
-          </a:prstGeom>
-          <a:solidFill>
-            <a:srgbClr val="CC6600"/>
-          </a:solidFill>
-          <a:ln>
-            <a:noFill/>
-          </a:ln>
-        </p:spPr>
-        <p:txBody>
-          <a:bodyPr lIns="91440" tIns="68580" rIns="91440" bIns="68580" anchor="t" wrap="square">
-            <a:normAutofit/>
-          </a:bodyPr>
-          <a:lstStyle/>
-          <a:p>
-            <a:pPr algn="l"/>
-            <a:r>
-              <a:rPr lang="en-US" sz="1400" b="1" dirty="0">
-                <a:solidFill>
-                  <a:srgbClr val="FEFDFA"/>
-                </a:solidFill>
-              </a:rPr>
-              <a:t>Warning</a:t>
-            </a:r>
-          </a:p>
-        </p:txBody>
-      </p:sp>
-      <p:sp>
-        <p:nvSpPr>
-          <p:cNvPr id="1043" name="callout-body" descr=""/>
-          <p:cNvSpPr/>
-          <p:nvPr/>
-        </p:nvSpPr>
-        <p:spPr>
-          <a:xfrm>
-            <a:off x="1097280" y="3685032"/>
-            <a:ext cx="9994392" cy="579120"/>
-          </a:xfrm>
-          <a:prstGeom prst="roundRect">
-            <a:avLst>
-              <a:gd name="adj" fmla="val 6000"/>
-            </a:avLst>
-          </a:prstGeom>
-          <a:solidFill>
-            <a:srgbClr val="FEFDFA"/>
-          </a:solidFill>
-          <a:ln>
-            <a:noFill/>
-          </a:ln>
-        </p:spPr>
-        <p:txBody>
-          <a:bodyPr lIns="91440" tIns="68580" rIns="91440" bIns="68580" anchor="t" wrap="square">
-            <a:normAutofit/>
-          </a:bodyPr>
-          <a:lstStyle/>
-          <a:p>
-            <a:pPr algn="l"/>
-            <a:r>
-              <a:rPr lang="en-US" sz="1200" b="0" dirty="0">
-                <a:solidFill>
-                  <a:srgbClr val="010B13"/>
-                </a:solidFill>
-              </a:rPr>
-              <a:t>Not “rushing caused points.” These are game-level associations — no random assignment here.</a:t>
-            </a:r>
-          </a:p>
-        </p:txBody>
-      </p:sp>
+      </p:pic>
     </p:spTree>
   </p:cSld>
 </p:sld>
 </file>
 
-<file path=ppt/slides/slide19.xml><?xml version="1.0" encoding="utf-8"?>
+<file path=ppt/slides/slide15.xml><?xml version="1.0" encoding="utf-8"?>
 <p:sld xmlns:a="http://schemas.openxmlformats.org/drawingml/2006/main" xmlns:r="http://schemas.openxmlformats.org/officeDocument/2006/relationships" xmlns:p="http://schemas.openxmlformats.org/presentationml/2006/main">
   <p:cSld>
     <p:spTree>
@@ -4928,19 +5467,11 @@
             <p:ph type="title"/>
           </p:nvPr>
         </p:nvSpPr>
-        <p:spPr bwMode="blackWhite">
+        <p:spPr>
           <a:xfrm>
-            <a:off x="1097280" y="2386744"/>
-            <a:ext cx="9997440" cy="1645920"/>
+            <a:off x="1097280" y="964692"/>
+            <a:ext cx="9997440" cy="1188720"/>
           </a:xfrm>
-          <a:solidFill>
-            <a:srgbClr val="FFFFFF"/>
-          </a:solidFill>
-          <a:ln w="38100">
-            <a:solidFill>
-              <a:srgbClr val="404040"/>
-            </a:solidFill>
-          </a:ln>
         </p:spPr>
         <p:txBody>
           <a:bodyPr/>
@@ -4951,7 +5482,116 @@
             </a:pPr>
             <a:r>
               <a:rPr/>
-              <a:t>Running the Analysis</a:t>
+              <a:t>13 Write model, then predictors</a:t>
+            </a:r>
+          </a:p>
+        </p:txBody>
+      </p:sp>
+      <p:sp>
+        <p:nvSpPr>
+          <p:cNvPr id="3" name="Content Placeholder 2"/>
+          <p:cNvSpPr>
+            <a:spLocks noGrp="1"/>
+          </p:cNvSpPr>
+          <p:nvPr>
+            <p:ph idx="1"/>
+          </p:nvPr>
+        </p:nvSpPr>
+        <p:spPr/>
+        <p:txBody>
+          <a:bodyPr/>
+          <a:lstStyle/>
+          <a:p>
+            <a:pPr lvl="0" indent="-457200" marL="457200">
+              <a:buAutoNum type="arabicPeriod"/>
+            </a:pPr>
+            <a:r>
+              <a:rPr/>
+              <a:t>State the sample, criterion, and predictor set.</a:t>
+            </a:r>
+          </a:p>
+          <a:p>
+            <a:pPr lvl="0" indent="-457200" marL="457200">
+              <a:buAutoNum type="arabicPeriod"/>
+            </a:pPr>
+            <a:r>
+              <a:rPr/>
+              <a:t>Report </a:t>
+            </a:r>
+            <a:r>
+              <a:rPr i="1"/>
+              <a:t>F</a:t>
+            </a:r>
+            <a:r>
+              <a:rPr/>
+              <a:t>, both </a:t>
+            </a:r>
+            <a:r>
+              <a:rPr i="1"/>
+              <a:t>df</a:t>
+            </a:r>
+            <a:r>
+              <a:rPr/>
+              <a:t>, </a:t>
+            </a:r>
+            <a:r>
+              <a:rPr i="1"/>
+              <a:t>p</a:t>
+            </a:r>
+            <a:r>
+              <a:rPr/>
+              <a:t>, and R².</a:t>
+            </a:r>
+          </a:p>
+          <a:p>
+            <a:pPr lvl="0" indent="-457200" marL="457200">
+              <a:buAutoNum type="arabicPeriod"/>
+            </a:pPr>
+            <a:r>
+              <a:rPr/>
+              <a:t>Interpret each planned </a:t>
+            </a:r>
+            <a:r>
+              <a:rPr i="1"/>
+              <a:t>b</a:t>
+            </a:r>
+            <a:r>
+              <a:rPr/>
+              <a:t> in its units.</a:t>
+            </a:r>
+          </a:p>
+          <a:p>
+            <a:pPr lvl="0" indent="-457200" marL="457200">
+              <a:buAutoNum type="arabicPeriod"/>
+            </a:pPr>
+            <a:r>
+              <a:rPr/>
+              <a:t>Compare each </a:t>
+            </a:r>
+            <a:r>
+              <a:rPr i="1"/>
+              <a:t>r</a:t>
+            </a:r>
+            <a:r>
+              <a:rPr/>
+              <a:t> with its adjusted </a:t>
+            </a:r>
+            <a:r>
+              <a:rPr i="1"/>
+              <a:t>b</a:t>
+            </a:r>
+            <a:r>
+              <a:rPr/>
+              <a:t>.</a:t>
+            </a:r>
+          </a:p>
+          <a:p>
+            <a:pPr lvl="0" indent="-457200" marL="457200">
+              <a:buAutoNum type="arabicPeriod"/>
+            </a:pPr>
+            <a:r>
+              <a:rPr/>
+              <a:t>Add the all-green checker screenshots.</a:t>
             </a:r>
           </a:p>
         </p:txBody>
@@ -5003,194 +5643,21 @@
             </a:pPr>
             <a:r>
               <a:rPr/>
-              <a:t>Today’s Tasks</a:t>
-            </a:r>
-          </a:p>
-        </p:txBody>
-      </p:sp>
-      <p:sp>
-        <p:nvSpPr>
-          <p:cNvPr id="1001" name="box-post-it" descr="box: . From one predictor to many: the multiple regression modelTwo kinds of predictors: quantitative &amp; binary (0/1)Reading the output: model fit (R², F) + individual predictors (b, β, t)Multiple regression in SPSS + APA write-upLab 13 worksheet walk-through (Huskers data!)"/>
+              <a:t>1 Download the Lab 13 files</a:t>
+            </a:r>
+          </a:p>
+        </p:txBody>
+      </p:sp>
+      <p:sp>
+        <p:nvSpPr>
+          <p:cNvPr id="1001" name="card-steel" descr="card: Worksheet. Download worksheet"/>
           <p:cNvSpPr/>
           <p:nvPr/>
         </p:nvSpPr>
         <p:spPr>
           <a:xfrm>
             <a:off x="1097280" y="2633472"/>
-            <a:ext cx="9994392" cy="731520"/>
-          </a:xfrm>
-          <a:prstGeom prst="roundRect">
-            <a:avLst>
-              <a:gd name="adj" fmla="val 6000"/>
-            </a:avLst>
-          </a:prstGeom>
-          <a:solidFill>
-            <a:srgbClr val="FFF9C4"/>
-          </a:solidFill>
-          <a:ln w="19050">
-            <a:solidFill>
-              <a:srgbClr val="CCCCCC"/>
-            </a:solidFill>
-          </a:ln>
-        </p:spPr>
-        <p:txBody>
-          <a:bodyPr lIns="91440" tIns="68580" rIns="91440" bIns="68580" anchor="t" wrap="square">
-            <a:normAutofit/>
-          </a:bodyPr>
-          <a:lstStyle/>
-          <a:p>
-            <a:pPr algn="l"/>
-            <a:r>
-              <a:rPr lang="en-US" sz="1200" b="0" dirty="0">
-                <a:solidFill>
-                  <a:srgbClr val="010B13"/>
-                </a:solidFill>
-              </a:rPr>
-              <a:t>From one predictor to many: the multiple regression modelTwo kinds of predictors: quantitative &amp; binary (0/1)Reading the output: model fit (R², F) + individual predictors (b, β, t)Multiple regression in SPSS + APA write-upLab 13 worksheet walk-through (Huskers data!)</a:t>
-            </a:r>
-          </a:p>
-        </p:txBody>
-      </p:sp>
-      <p:sp>
-        <p:nvSpPr>
-          <p:cNvPr id="1002" name="prose" descr=""/>
-          <p:cNvSpPr/>
-          <p:nvPr/>
-        </p:nvSpPr>
-        <p:spPr>
-          <a:xfrm>
-            <a:off x="1097280" y="3456432"/>
-            <a:ext cx="9994392" cy="365760"/>
-          </a:xfrm>
-          <a:prstGeom prst="roundRect">
-            <a:avLst>
-              <a:gd name="adj" fmla="val 6000"/>
-            </a:avLst>
-          </a:prstGeom>
-          <a:noFill/>
-          <a:ln>
-            <a:noFill/>
-          </a:ln>
-        </p:spPr>
-        <p:txBody>
-          <a:bodyPr lIns="91440" tIns="68580" rIns="91440" bIns="68580" anchor="t" wrap="square">
-            <a:normAutofit/>
-          </a:bodyPr>
-          <a:lstStyle/>
-          <a:p>
-            <a:pPr algn="l"/>
-            <a:r>
-              <a:rPr lang="en-US" sz="1200" b="0" dirty="0">
-                <a:solidFill>
-                  <a:srgbClr val="010B13"/>
-                </a:solidFill>
-              </a:rPr>
-              <a:t>Last new analysis of the semester. Frame it as the culmination: correlation (Lab 07) grew up — several predictors at once, each controlled for the others.</a:t>
-            </a:r>
-          </a:p>
-        </p:txBody>
-      </p:sp>
-    </p:spTree>
-  </p:cSld>
-</p:sld>
-</file>
-
-<file path=ppt/slides/slide20.xml><?xml version="1.0" encoding="utf-8"?>
-<p:sld xmlns:a="http://schemas.openxmlformats.org/drawingml/2006/main" xmlns:r="http://schemas.openxmlformats.org/officeDocument/2006/relationships" xmlns:p="http://schemas.openxmlformats.org/presentationml/2006/main">
-  <p:cSld>
-    <p:spTree>
-      <p:nvGrpSpPr>
-        <p:cNvPr id="1" name=""/>
-        <p:cNvGrpSpPr/>
-        <p:nvPr/>
-      </p:nvGrpSpPr>
-      <p:grpSpPr>
-        <a:xfrm>
-          <a:off x="0" y="0"/>
-          <a:ext cx="0" cy="0"/>
-          <a:chOff x="0" y="0"/>
-          <a:chExt cx="0" cy="0"/>
-        </a:xfrm>
-      </p:grpSpPr>
-      <p:sp>
-        <p:nvSpPr>
-          <p:cNvPr id="2" name="Title 1"/>
-          <p:cNvSpPr>
-            <a:spLocks noGrp="1"/>
-          </p:cNvSpPr>
-          <p:nvPr>
-            <p:ph type="title"/>
-          </p:nvPr>
-        </p:nvSpPr>
-        <p:spPr>
-          <a:xfrm>
-            <a:off x="1097280" y="964692"/>
-            <a:ext cx="9997440" cy="1188720"/>
-          </a:xfrm>
-        </p:spPr>
-        <p:txBody>
-          <a:bodyPr/>
-          <a:lstStyle/>
-          <a:p>
-            <a:pPr lvl="0" indent="0" marL="0">
-              <a:buNone/>
-            </a:pPr>
-            <a:r>
-              <a:rPr/>
-              <a:t>SPSS: Linear Regression</a:t>
-            </a:r>
-          </a:p>
-        </p:txBody>
-      </p:sp>
-      <p:sp>
-        <p:nvSpPr>
-          <p:cNvPr id="1044" name="prose" descr=""/>
-          <p:cNvSpPr/>
-          <p:nvPr/>
-        </p:nvSpPr>
-        <p:spPr>
-          <a:xfrm>
-            <a:off x="1097280" y="2633472"/>
-            <a:ext cx="9994392" cy="365760"/>
-          </a:xfrm>
-          <a:prstGeom prst="roundRect">
-            <a:avLst>
-              <a:gd name="adj" fmla="val 6000"/>
-            </a:avLst>
-          </a:prstGeom>
-          <a:noFill/>
-          <a:ln>
-            <a:noFill/>
-          </a:ln>
-        </p:spPr>
-        <p:txBody>
-          <a:bodyPr lIns="91440" tIns="68580" rIns="91440" bIns="68580" anchor="t" wrap="square">
-            <a:normAutofit/>
-          </a:bodyPr>
-          <a:lstStyle/>
-          <a:p>
-            <a:pPr algn="l"/>
-            <a:r>
-              <a:rPr lang="en-US" sz="1200" b="0" dirty="0">
-                <a:solidFill>
-                  <a:srgbClr val="010B13"/>
-                </a:solidFill>
-              </a:rPr>
-              <a:t>Analyze → Regression → LinearCriterion → Dependent; all predictors → Independent(s)Method: Enter (all predictors at once — that’s today)Statistics… → Estimates, Model fit, (optionally) Collinearity</a:t>
-            </a:r>
-          </a:p>
-        </p:txBody>
-      </p:sp>
-      <p:sp>
-        <p:nvSpPr>
-          <p:cNvPr id="1045" name="callout-tip" descr="tip callout: Tip. You get three tables back: Model Summary (R²), ANOVA (model F), Coefficients (b, β, t). Read them in that order."/>
-          <p:cNvSpPr/>
-          <p:nvPr/>
-        </p:nvSpPr>
-        <p:spPr>
-          <a:xfrm>
-            <a:off x="1097280" y="3090672"/>
-            <a:ext cx="9994392" cy="1082040"/>
+            <a:ext cx="4924044" cy="1005840"/>
           </a:xfrm>
           <a:prstGeom prst="roundRect">
             <a:avLst>
@@ -5202,381 +5669,81 @@
           </a:solidFill>
           <a:ln w="19050">
             <a:solidFill>
-              <a:srgbClr val="009955"/>
+              <a:srgbClr val="CCCCCC"/>
             </a:solidFill>
           </a:ln>
         </p:spPr>
         <p:txBody>
-          <a:bodyPr lIns="91440" tIns="68580" rIns="91440" bIns="68580" anchor="t" wrap="square">
+          <a:bodyPr lIns="182880" tIns="182880" rIns="182880" bIns="182880" anchor="t" wrap="square">
             <a:normAutofit/>
           </a:bodyPr>
           <a:lstStyle/>
-          <a:p/>
-        </p:txBody>
-      </p:sp>
-      <p:sp>
-        <p:nvSpPr>
-          <p:cNvPr id="1046" name="callout-title" descr=""/>
+          <a:p>
+            <a:pPr algn="l"/>
+            <a:r>
+              <a:rPr lang="en-US" sz="2200" b="1" dirty="0">
+                <a:solidFill>
+                  <a:srgbClr val="010B13"/>
+                </a:solidFill>
+              </a:rPr>
+              <a:t>Worksheet</a:t>
+            </a:r>
+          </a:p>
+          <a:p>
+            <a:pPr algn="l"/>
+            <a:r>
+              <a:rPr lang="en-US" sz="2000" b="0" dirty="0">
+                <a:solidFill>
+                  <a:srgbClr val="010B13"/>
+                </a:solidFill>
+                <a:hlinkClick r:id="rId3"/>
+              </a:rPr>
+              <a:t>Download worksheet</a:t>
+            </a:r>
+          </a:p>
+        </p:txBody>
+      </p:sp>
+      <p:sp>
+        <p:nvSpPr>
+          <p:cNvPr id="1002" name="card-rail" descr=""/>
           <p:cNvSpPr/>
           <p:nvPr/>
         </p:nvSpPr>
         <p:spPr>
           <a:xfrm>
-            <a:off x="1097280" y="3090672"/>
-            <a:ext cx="9994392" cy="320040"/>
+            <a:off x="1097280" y="2633472"/>
+            <a:ext cx="54864" cy="1005840"/>
           </a:xfrm>
           <a:prstGeom prst="roundRect">
             <a:avLst>
-              <a:gd name="adj" fmla="val 6000"/>
+              <a:gd name="adj" fmla="val 20000"/>
             </a:avLst>
           </a:prstGeom>
           <a:solidFill>
-            <a:srgbClr val="009955"/>
+            <a:srgbClr val="010B13"/>
           </a:solidFill>
           <a:ln>
             <a:noFill/>
           </a:ln>
         </p:spPr>
         <p:txBody>
-          <a:bodyPr lIns="91440" tIns="68580" rIns="91440" bIns="68580" anchor="t" wrap="square">
+          <a:bodyPr lIns="182880" tIns="182880" rIns="182880" bIns="182880" anchor="t" wrap="square">
             <a:normAutofit/>
           </a:bodyPr>
           <a:lstStyle/>
-          <a:p>
-            <a:pPr algn="l"/>
-            <a:r>
-              <a:rPr lang="en-US" sz="1400" b="1" dirty="0">
-                <a:solidFill>
-                  <a:srgbClr val="FEFDFA"/>
-                </a:solidFill>
-              </a:rPr>
-              <a:t>Tip</a:t>
-            </a:r>
-          </a:p>
-        </p:txBody>
-      </p:sp>
-      <p:sp>
-        <p:nvSpPr>
-          <p:cNvPr id="1047" name="callout-body" descr=""/>
+          <a:p/>
+        </p:txBody>
+      </p:sp>
+      <p:sp>
+        <p:nvSpPr>
+          <p:cNvPr id="1003" name="card-steel" descr="card: Dataset. Download Husker data"/>
           <p:cNvSpPr/>
           <p:nvPr/>
         </p:nvSpPr>
         <p:spPr>
           <a:xfrm>
-            <a:off x="1097280" y="3410712"/>
-            <a:ext cx="9994392" cy="762000"/>
-          </a:xfrm>
-          <a:prstGeom prst="roundRect">
-            <a:avLst>
-              <a:gd name="adj" fmla="val 6000"/>
-            </a:avLst>
-          </a:prstGeom>
-          <a:solidFill>
-            <a:srgbClr val="FEFDFA"/>
-          </a:solidFill>
-          <a:ln>
-            <a:noFill/>
-          </a:ln>
-        </p:spPr>
-        <p:txBody>
-          <a:bodyPr lIns="91440" tIns="68580" rIns="91440" bIns="68580" anchor="t" wrap="square">
-            <a:normAutofit/>
-          </a:bodyPr>
-          <a:lstStyle/>
-          <a:p>
-            <a:pPr algn="l"/>
-            <a:r>
-              <a:rPr lang="en-US" sz="1200" b="0" dirty="0">
-                <a:solidFill>
-                  <a:srgbClr val="010B13"/>
-                </a:solidFill>
-              </a:rPr>
-              <a:t>You get three tables back: Model Summary (R²), ANOVA (model F), Coefficients (b, β, t). Read them in that order.</a:t>
-            </a:r>
-          </a:p>
-        </p:txBody>
-      </p:sp>
-    </p:spTree>
-  </p:cSld>
-</p:sld>
-</file>
-
-<file path=ppt/slides/slide21.xml><?xml version="1.0" encoding="utf-8"?>
-<p:sld xmlns:a="http://schemas.openxmlformats.org/drawingml/2006/main" xmlns:r="http://schemas.openxmlformats.org/officeDocument/2006/relationships" xmlns:p="http://schemas.openxmlformats.org/presentationml/2006/main">
-  <p:cSld>
-    <p:spTree>
-      <p:nvGrpSpPr>
-        <p:cNvPr id="1" name=""/>
-        <p:cNvGrpSpPr/>
-        <p:nvPr/>
-      </p:nvGrpSpPr>
-      <p:grpSpPr>
-        <a:xfrm>
-          <a:off x="0" y="0"/>
-          <a:ext cx="0" cy="0"/>
-          <a:chOff x="0" y="0"/>
-          <a:chExt cx="0" cy="0"/>
-        </a:xfrm>
-      </p:grpSpPr>
-      <p:sp>
-        <p:nvSpPr>
-          <p:cNvPr id="2" name="Title 1"/>
-          <p:cNvSpPr>
-            <a:spLocks noGrp="1"/>
-          </p:cNvSpPr>
-          <p:nvPr>
-            <p:ph type="title"/>
-          </p:nvPr>
-        </p:nvSpPr>
-        <p:spPr>
-          <a:xfrm>
-            <a:off x="1097280" y="964692"/>
-            <a:ext cx="9997440" cy="1188720"/>
-          </a:xfrm>
-        </p:spPr>
-        <p:txBody>
-          <a:bodyPr/>
-          <a:lstStyle/>
-          <a:p>
-            <a:pPr lvl="0" indent="0" marL="0">
-              <a:buNone/>
-            </a:pPr>
-            <a:r>
-              <a:rPr/>
-              <a:t>Sanity Checks</a:t>
-            </a:r>
-          </a:p>
-        </p:txBody>
-      </p:sp>
-      <p:sp>
-        <p:nvSpPr>
-          <p:cNvPr id="3" name="Content Placeholder 2"/>
-          <p:cNvSpPr>
-            <a:spLocks noGrp="1"/>
-          </p:cNvSpPr>
-          <p:nvPr>
-            <p:ph idx="1"/>
-          </p:nvPr>
-        </p:nvSpPr>
-        <p:spPr/>
-        <p:txBody>
-          <a:bodyPr/>
-          <a:lstStyle/>
-          <a:p>
-            <a:pPr lvl="0"/>
-            <a:r>
-              <a:rPr b="1"/>
-              <a:t>Signs make sense?</a:t>
-            </a:r>
-            <a:r>
-              <a:rPr/>
-              <a:t> Rushing yards </a:t>
-            </a:r>
-            <a:r>
-              <a:rPr i="1"/>
-              <a:t>negative</a:t>
-            </a:r>
-            <a:r>
-              <a:rPr/>
-              <a:t> would raise an eyebrow</a:t>
-            </a:r>
-          </a:p>
-          <a:p>
-            <a:pPr lvl="0"/>
-            <a:r>
-              <a:rPr b="1"/>
-              <a:t>β sizes</a:t>
-            </a:r>
-            <a:r>
-              <a:rPr/>
-              <a:t> — which predictor dominates? Is that plausible?</a:t>
-            </a:r>
-          </a:p>
-          <a:p>
-            <a:pPr lvl="0"/>
-            <a:r>
-              <a:rPr b="1"/>
-              <a:t>Adjusted vs. raw R²</a:t>
-            </a:r>
-            <a:r>
-              <a:rPr/>
-              <a:t> — a big gap means some predictors are dead weight</a:t>
-            </a:r>
-          </a:p>
-          <a:p>
-            <a:pPr lvl="0"/>
-            <a:r>
-              <a:rPr b="1"/>
-              <a:t>n per predictor</a:t>
-            </a:r>
-            <a:r>
-              <a:rPr/>
-              <a:t> — models get shaky when predictors pile up relative to sample size</a:t>
-            </a:r>
-          </a:p>
-        </p:txBody>
-      </p:sp>
-    </p:spTree>
-  </p:cSld>
-</p:sld>
-</file>
-
-<file path=ppt/slides/slide22.xml><?xml version="1.0" encoding="utf-8"?>
-<p:sld xmlns:a="http://schemas.openxmlformats.org/drawingml/2006/main" xmlns:r="http://schemas.openxmlformats.org/officeDocument/2006/relationships" xmlns:p="http://schemas.openxmlformats.org/presentationml/2006/main">
-  <p:cSld>
-    <p:spTree>
-      <p:nvGrpSpPr>
-        <p:cNvPr id="1" name=""/>
-        <p:cNvGrpSpPr/>
-        <p:nvPr/>
-      </p:nvGrpSpPr>
-      <p:grpSpPr>
-        <a:xfrm>
-          <a:off x="0" y="0"/>
-          <a:ext cx="0" cy="0"/>
-          <a:chOff x="0" y="0"/>
-          <a:chExt cx="0" cy="0"/>
-        </a:xfrm>
-      </p:grpSpPr>
-      <p:sp>
-        <p:nvSpPr>
-          <p:cNvPr id="2" name="Title 1"/>
-          <p:cNvSpPr>
-            <a:spLocks noGrp="1"/>
-          </p:cNvSpPr>
-          <p:nvPr>
-            <p:ph type="title"/>
-          </p:nvPr>
-        </p:nvSpPr>
-        <p:spPr bwMode="blackWhite">
-          <a:xfrm>
-            <a:off x="1097280" y="2386744"/>
-            <a:ext cx="9997440" cy="1645920"/>
-          </a:xfrm>
-          <a:solidFill>
-            <a:srgbClr val="FFFFFF"/>
-          </a:solidFill>
-          <a:ln w="38100">
-            <a:solidFill>
-              <a:srgbClr val="404040"/>
-            </a:solidFill>
-          </a:ln>
-        </p:spPr>
-        <p:txBody>
-          <a:bodyPr/>
-          <a:lstStyle/>
-          <a:p>
-            <a:pPr lvl="0" indent="0" marL="0">
-              <a:buNone/>
-            </a:pPr>
-            <a:r>
-              <a:rPr/>
-              <a:t>APA Write-Up</a:t>
-            </a:r>
-          </a:p>
-        </p:txBody>
-      </p:sp>
-    </p:spTree>
-  </p:cSld>
-</p:sld>
-</file>
-
-<file path=ppt/slides/slide23.xml><?xml version="1.0" encoding="utf-8"?>
-<p:sld xmlns:a="http://schemas.openxmlformats.org/drawingml/2006/main" xmlns:r="http://schemas.openxmlformats.org/officeDocument/2006/relationships" xmlns:p="http://schemas.openxmlformats.org/presentationml/2006/main">
-  <p:cSld>
-    <p:spTree>
-      <p:nvGrpSpPr>
-        <p:cNvPr id="1" name=""/>
-        <p:cNvGrpSpPr/>
-        <p:nvPr/>
-      </p:nvGrpSpPr>
-      <p:grpSpPr>
-        <a:xfrm>
-          <a:off x="0" y="0"/>
-          <a:ext cx="0" cy="0"/>
-          <a:chOff x="0" y="0"/>
-          <a:chExt cx="0" cy="0"/>
-        </a:xfrm>
-      </p:grpSpPr>
-      <p:sp>
-        <p:nvSpPr>
-          <p:cNvPr id="2" name="Title 1"/>
-          <p:cNvSpPr>
-            <a:spLocks noGrp="1"/>
-          </p:cNvSpPr>
-          <p:nvPr>
-            <p:ph type="title"/>
-          </p:nvPr>
-        </p:nvSpPr>
-        <p:spPr>
-          <a:xfrm>
-            <a:off x="1097280" y="964692"/>
-            <a:ext cx="9997440" cy="1188720"/>
-          </a:xfrm>
-        </p:spPr>
-        <p:txBody>
-          <a:bodyPr/>
-          <a:lstStyle/>
-          <a:p>
-            <a:pPr lvl="0" indent="0" marL="0">
-              <a:buNone/>
-            </a:pPr>
-            <a:r>
-              <a:rPr/>
-              <a:t>The Model Sentence + Predictor Sentences</a:t>
-            </a:r>
-          </a:p>
-        </p:txBody>
-      </p:sp>
-      <p:sp>
-        <p:nvSpPr>
-          <p:cNvPr id="1048" name="prose" descr=""/>
-          <p:cNvSpPr/>
-          <p:nvPr/>
-        </p:nvSpPr>
-        <p:spPr>
-          <a:xfrm>
-            <a:off x="1097280" y="2633472"/>
-            <a:ext cx="9994392" cy="548640"/>
-          </a:xfrm>
-          <a:prstGeom prst="roundRect">
-            <a:avLst>
-              <a:gd name="adj" fmla="val 6000"/>
-            </a:avLst>
-          </a:prstGeom>
-          <a:noFill/>
-          <a:ln>
-            <a:noFill/>
-          </a:ln>
-        </p:spPr>
-        <p:txBody>
-          <a:bodyPr lIns="91440" tIns="68580" rIns="91440" bIns="68580" anchor="t" wrap="square">
-            <a:normAutofit/>
-          </a:bodyPr>
-          <a:lstStyle/>
-          <a:p>
-            <a:pPr algn="l"/>
-            <a:r>
-              <a:rPr lang="en-US" sz="1200" b="0" dirty="0">
-                <a:solidFill>
-                  <a:srgbClr val="010B13"/>
-                </a:solidFill>
-              </a:rPr>
-              <a:t>Model first: “The model predicted Nebraska’s score, F(5, 171) = XX.XX, p &lt; .001, explaining XX% of the variance (adjusted R² = .XX).”Then each significant predictor: “b = X.XX, β = .XX, t(171) = X.XX, p = .XXX,” in plain EnglishName the non-significant ones too — an expected predictor that fell short is still a finding</a:t>
-            </a:r>
-          </a:p>
-        </p:txBody>
-      </p:sp>
-      <p:sp>
-        <p:nvSpPr>
-          <p:cNvPr id="1049" name="callout-tip" descr="tip callout: Tip. df1 = k (number of predictors); df2 = n − k − 1. Both are in the ANOVA table."/>
-          <p:cNvSpPr/>
-          <p:nvPr/>
-        </p:nvSpPr>
-        <p:spPr>
-          <a:xfrm>
-            <a:off x="1097280" y="3273552"/>
-            <a:ext cx="9994392" cy="899160"/>
+            <a:off x="6167628" y="2633472"/>
+            <a:ext cx="4924044" cy="1005840"/>
           </a:xfrm>
           <a:prstGeom prst="roundRect">
             <a:avLst>
@@ -5588,300 +5755,81 @@
           </a:solidFill>
           <a:ln w="19050">
             <a:solidFill>
-              <a:srgbClr val="009955"/>
+              <a:srgbClr val="CCCCCC"/>
             </a:solidFill>
           </a:ln>
         </p:spPr>
         <p:txBody>
-          <a:bodyPr lIns="91440" tIns="68580" rIns="91440" bIns="68580" anchor="t" wrap="square">
+          <a:bodyPr lIns="182880" tIns="182880" rIns="182880" bIns="182880" anchor="t" wrap="square">
             <a:normAutofit/>
           </a:bodyPr>
           <a:lstStyle/>
-          <a:p/>
-        </p:txBody>
-      </p:sp>
-      <p:sp>
-        <p:nvSpPr>
-          <p:cNvPr id="1050" name="callout-title" descr=""/>
+          <a:p>
+            <a:pPr algn="l"/>
+            <a:r>
+              <a:rPr lang="en-US" sz="2200" b="1" dirty="0">
+                <a:solidFill>
+                  <a:srgbClr val="010B13"/>
+                </a:solidFill>
+              </a:rPr>
+              <a:t>Dataset</a:t>
+            </a:r>
+          </a:p>
+          <a:p>
+            <a:pPr algn="l"/>
+            <a:r>
+              <a:rPr lang="en-US" sz="2000" b="0" dirty="0">
+                <a:solidFill>
+                  <a:srgbClr val="010B13"/>
+                </a:solidFill>
+                <a:hlinkClick r:id="rId4"/>
+              </a:rPr>
+              <a:t>Download Husker data</a:t>
+            </a:r>
+          </a:p>
+        </p:txBody>
+      </p:sp>
+      <p:sp>
+        <p:nvSpPr>
+          <p:cNvPr id="1004" name="card-rail" descr=""/>
           <p:cNvSpPr/>
           <p:nvPr/>
         </p:nvSpPr>
         <p:spPr>
           <a:xfrm>
-            <a:off x="1097280" y="3273552"/>
-            <a:ext cx="9994392" cy="320040"/>
+            <a:off x="6167628" y="2633472"/>
+            <a:ext cx="54864" cy="1005840"/>
           </a:xfrm>
           <a:prstGeom prst="roundRect">
             <a:avLst>
-              <a:gd name="adj" fmla="val 6000"/>
+              <a:gd name="adj" fmla="val 20000"/>
             </a:avLst>
           </a:prstGeom>
           <a:solidFill>
-            <a:srgbClr val="009955"/>
+            <a:srgbClr val="010B13"/>
           </a:solidFill>
           <a:ln>
             <a:noFill/>
           </a:ln>
         </p:spPr>
         <p:txBody>
-          <a:bodyPr lIns="91440" tIns="68580" rIns="91440" bIns="68580" anchor="t" wrap="square">
+          <a:bodyPr lIns="182880" tIns="182880" rIns="182880" bIns="182880" anchor="t" wrap="square">
             <a:normAutofit/>
           </a:bodyPr>
           <a:lstStyle/>
-          <a:p>
-            <a:pPr algn="l"/>
-            <a:r>
-              <a:rPr lang="en-US" sz="1400" b="1" dirty="0">
-                <a:solidFill>
-                  <a:srgbClr val="FEFDFA"/>
-                </a:solidFill>
-              </a:rPr>
-              <a:t>Tip</a:t>
-            </a:r>
-          </a:p>
-        </p:txBody>
-      </p:sp>
-      <p:sp>
-        <p:nvSpPr>
-          <p:cNvPr id="1051" name="callout-body" descr=""/>
+          <a:p/>
+        </p:txBody>
+      </p:sp>
+      <p:sp>
+        <p:nvSpPr>
+          <p:cNvPr id="1005" name="card-steel" descr="card: Regression guide. Open the SPSS handout"/>
           <p:cNvSpPr/>
           <p:nvPr/>
         </p:nvSpPr>
         <p:spPr>
           <a:xfrm>
-            <a:off x="1097280" y="3593592"/>
-            <a:ext cx="9994392" cy="579120"/>
-          </a:xfrm>
-          <a:prstGeom prst="roundRect">
-            <a:avLst>
-              <a:gd name="adj" fmla="val 6000"/>
-            </a:avLst>
-          </a:prstGeom>
-          <a:solidFill>
-            <a:srgbClr val="FEFDFA"/>
-          </a:solidFill>
-          <a:ln>
-            <a:noFill/>
-          </a:ln>
-        </p:spPr>
-        <p:txBody>
-          <a:bodyPr lIns="91440" tIns="68580" rIns="91440" bIns="68580" anchor="t" wrap="square">
-            <a:normAutofit/>
-          </a:bodyPr>
-          <a:lstStyle/>
-          <a:p>
-            <a:pPr algn="l"/>
-            <a:r>
-              <a:rPr lang="en-US" sz="1200" b="0" dirty="0">
-                <a:solidFill>
-                  <a:srgbClr val="010B13"/>
-                </a:solidFill>
-              </a:rPr>
-              <a:t>df1 = k (number of predictors); df2 = n − k − 1. Both are in the ANOVA table.</a:t>
-            </a:r>
-          </a:p>
-        </p:txBody>
-      </p:sp>
-    </p:spTree>
-  </p:cSld>
-</p:sld>
-</file>
-
-<file path=ppt/slides/slide24.xml><?xml version="1.0" encoding="utf-8"?>
-<p:sld xmlns:a="http://schemas.openxmlformats.org/drawingml/2006/main" xmlns:r="http://schemas.openxmlformats.org/officeDocument/2006/relationships" xmlns:p="http://schemas.openxmlformats.org/presentationml/2006/main">
-  <p:cSld>
-    <p:spTree>
-      <p:nvGrpSpPr>
-        <p:cNvPr id="1" name=""/>
-        <p:cNvGrpSpPr/>
-        <p:nvPr/>
-      </p:nvGrpSpPr>
-      <p:grpSpPr>
-        <a:xfrm>
-          <a:off x="0" y="0"/>
-          <a:ext cx="0" cy="0"/>
-          <a:chOff x="0" y="0"/>
-          <a:chExt cx="0" cy="0"/>
-        </a:xfrm>
-      </p:grpSpPr>
-      <p:sp>
-        <p:nvSpPr>
-          <p:cNvPr id="2" name="Title 1"/>
-          <p:cNvSpPr>
-            <a:spLocks noGrp="1"/>
-          </p:cNvSpPr>
-          <p:nvPr>
-            <p:ph type="title"/>
-          </p:nvPr>
-        </p:nvSpPr>
-        <p:spPr bwMode="blackWhite">
-          <a:xfrm>
-            <a:off x="1097280" y="2386744"/>
-            <a:ext cx="9997440" cy="1645920"/>
-          </a:xfrm>
-          <a:solidFill>
-            <a:srgbClr val="FFFFFF"/>
-          </a:solidFill>
-          <a:ln w="38100">
-            <a:solidFill>
-              <a:srgbClr val="404040"/>
-            </a:solidFill>
-          </a:ln>
-        </p:spPr>
-        <p:txBody>
-          <a:bodyPr/>
-          <a:lstStyle/>
-          <a:p>
-            <a:pPr lvl="0" indent="0" marL="0">
-              <a:buNone/>
-            </a:pPr>
-            <a:r>
-              <a:rPr/>
-              <a:t>Worksheet Walk-Through</a:t>
-            </a:r>
-          </a:p>
-        </p:txBody>
-      </p:sp>
-    </p:spTree>
-  </p:cSld>
-</p:sld>
-</file>
-
-<file path=ppt/slides/slide25.xml><?xml version="1.0" encoding="utf-8"?>
-<p:sld xmlns:a="http://schemas.openxmlformats.org/drawingml/2006/main" xmlns:r="http://schemas.openxmlformats.org/officeDocument/2006/relationships" xmlns:p="http://schemas.openxmlformats.org/presentationml/2006/main">
-  <p:cSld>
-    <p:spTree>
-      <p:nvGrpSpPr>
-        <p:cNvPr id="1" name=""/>
-        <p:cNvGrpSpPr/>
-        <p:nvPr/>
-      </p:nvGrpSpPr>
-      <p:grpSpPr>
-        <a:xfrm>
-          <a:off x="0" y="0"/>
-          <a:ext cx="0" cy="0"/>
-          <a:chOff x="0" y="0"/>
-          <a:chExt cx="0" cy="0"/>
-        </a:xfrm>
-      </p:grpSpPr>
-      <p:sp>
-        <p:nvSpPr>
-          <p:cNvPr id="2" name="Title 1"/>
-          <p:cNvSpPr>
-            <a:spLocks noGrp="1"/>
-          </p:cNvSpPr>
-          <p:nvPr>
-            <p:ph type="title"/>
-          </p:nvPr>
-        </p:nvSpPr>
-        <p:spPr>
-          <a:xfrm>
-            <a:off x="1097280" y="964692"/>
-            <a:ext cx="9997440" cy="1188720"/>
-          </a:xfrm>
-        </p:spPr>
-        <p:txBody>
-          <a:bodyPr/>
-          <a:lstStyle/>
-          <a:p>
-            <a:pPr lvl="0" indent="0" marL="0">
-              <a:buNone/>
-            </a:pPr>
-            <a:r>
-              <a:rPr/>
-              <a:t>Today’s Analyses: Husker Football</a:t>
-            </a:r>
-          </a:p>
-        </p:txBody>
-      </p:sp>
-      <p:sp>
-        <p:nvSpPr>
-          <p:cNvPr id="1052" name="prose" descr=""/>
-          <p:cNvSpPr/>
-          <p:nvPr/>
-        </p:nvSpPr>
-        <p:spPr>
-          <a:xfrm>
-            <a:off x="1097280" y="2633472"/>
-            <a:ext cx="9994392" cy="182880"/>
-          </a:xfrm>
-          <a:prstGeom prst="roundRect">
-            <a:avLst>
-              <a:gd name="adj" fmla="val 6000"/>
-            </a:avLst>
-          </a:prstGeom>
-          <a:noFill/>
-          <a:ln>
-            <a:noFill/>
-          </a:ln>
-        </p:spPr>
-        <p:txBody>
-          <a:bodyPr lIns="91440" tIns="68580" rIns="91440" bIns="68580" anchor="t" wrap="square">
-            <a:normAutofit/>
-          </a:bodyPr>
-          <a:lstStyle/>
-          <a:p>
-            <a:pPr algn="l"/>
-            <a:r>
-              <a:rPr lang="en-US" sz="1200" b="0" dirty="0">
-                <a:solidFill>
-                  <a:srgbClr val="010B13"/>
-                </a:solidFill>
-              </a:rPr>
-              <a:t>All games after 1997 (post-championship era):</a:t>
-            </a:r>
-          </a:p>
-        </p:txBody>
-      </p:sp>
-      <p:sp>
-        <p:nvSpPr>
-          <p:cNvPr id="1053" name="prose" descr=""/>
-          <p:cNvSpPr/>
-          <p:nvPr/>
-        </p:nvSpPr>
-        <p:spPr>
-          <a:xfrm>
-            <a:off x="1097280" y="2907792"/>
-            <a:ext cx="9994392" cy="548640"/>
-          </a:xfrm>
-          <a:prstGeom prst="roundRect">
-            <a:avLst>
-              <a:gd name="adj" fmla="val 6000"/>
-            </a:avLst>
-          </a:prstGeom>
-          <a:noFill/>
-          <a:ln>
-            <a:noFill/>
-          </a:ln>
-        </p:spPr>
-        <p:txBody>
-          <a:bodyPr lIns="91440" tIns="68580" rIns="91440" bIns="68580" anchor="t" wrap="square">
-            <a:normAutofit/>
-          </a:bodyPr>
-          <a:lstStyle/>
-          <a:p>
-            <a:pPr algn="l"/>
-            <a:r>
-              <a:rPr lang="en-US" sz="1200" b="0" dirty="0">
-                <a:solidFill>
-                  <a:srgbClr val="010B13"/>
-                </a:solidFill>
-              </a:rPr>
-              <a:t>RH1 (walkthrough together): Nebraska’s score ← rushing, passing, temperature + conference game? + home game?RH2 (your turn): Opponent’s score ← opponent rushing &amp; passing, Nebraska penalty yards, temperature + Nebraska won? + home game?</a:t>
-            </a:r>
-          </a:p>
-        </p:txBody>
-      </p:sp>
-      <p:sp>
-        <p:nvSpPr>
-          <p:cNvPr id="1054" name="callout-tip" descr="tip callout: Tip. For each RH: run the regression → record the Model Summary → record each predictor row → interpret → check your numbers in the Homework Checker."/>
-          <p:cNvSpPr/>
-          <p:nvPr/>
-        </p:nvSpPr>
-        <p:spPr>
-          <a:xfrm>
-            <a:off x="1097280" y="3547872"/>
-            <a:ext cx="9994392" cy="1082040"/>
+            <a:off x="1097280" y="3785616"/>
+            <a:ext cx="4924044" cy="1005840"/>
           </a:xfrm>
           <a:prstGeom prst="roundRect">
             <a:avLst>
@@ -5893,400 +5841,81 @@
           </a:solidFill>
           <a:ln w="19050">
             <a:solidFill>
-              <a:srgbClr val="009955"/>
+              <a:srgbClr val="CCCCCC"/>
             </a:solidFill>
           </a:ln>
         </p:spPr>
         <p:txBody>
-          <a:bodyPr lIns="91440" tIns="68580" rIns="91440" bIns="68580" anchor="t" wrap="square">
+          <a:bodyPr lIns="182880" tIns="182880" rIns="182880" bIns="182880" anchor="t" wrap="square">
             <a:normAutofit/>
           </a:bodyPr>
           <a:lstStyle/>
-          <a:p/>
-        </p:txBody>
-      </p:sp>
-      <p:sp>
-        <p:nvSpPr>
-          <p:cNvPr id="1055" name="callout-title" descr=""/>
+          <a:p>
+            <a:pPr algn="l"/>
+            <a:r>
+              <a:rPr lang="en-US" sz="2200" b="1" dirty="0">
+                <a:solidFill>
+                  <a:srgbClr val="010B13"/>
+                </a:solidFill>
+              </a:rPr>
+              <a:t>Regression guide</a:t>
+            </a:r>
+          </a:p>
+          <a:p>
+            <a:pPr algn="l"/>
+            <a:r>
+              <a:rPr lang="en-US" sz="2000" b="0" dirty="0">
+                <a:solidFill>
+                  <a:srgbClr val="010B13"/>
+                </a:solidFill>
+                <a:hlinkClick r:id="rId5"/>
+              </a:rPr>
+              <a:t>Open the SPSS handout</a:t>
+            </a:r>
+          </a:p>
+        </p:txBody>
+      </p:sp>
+      <p:sp>
+        <p:nvSpPr>
+          <p:cNvPr id="1006" name="card-rail" descr=""/>
           <p:cNvSpPr/>
           <p:nvPr/>
         </p:nvSpPr>
         <p:spPr>
           <a:xfrm>
-            <a:off x="1097280" y="3547872"/>
-            <a:ext cx="9994392" cy="320040"/>
+            <a:off x="1097280" y="3785616"/>
+            <a:ext cx="54864" cy="1005840"/>
           </a:xfrm>
           <a:prstGeom prst="roundRect">
             <a:avLst>
-              <a:gd name="adj" fmla="val 6000"/>
+              <a:gd name="adj" fmla="val 20000"/>
             </a:avLst>
           </a:prstGeom>
           <a:solidFill>
-            <a:srgbClr val="009955"/>
+            <a:srgbClr val="010B13"/>
           </a:solidFill>
           <a:ln>
             <a:noFill/>
           </a:ln>
         </p:spPr>
         <p:txBody>
-          <a:bodyPr lIns="91440" tIns="68580" rIns="91440" bIns="68580" anchor="t" wrap="square">
+          <a:bodyPr lIns="182880" tIns="182880" rIns="182880" bIns="182880" anchor="t" wrap="square">
             <a:normAutofit/>
           </a:bodyPr>
           <a:lstStyle/>
-          <a:p>
-            <a:pPr algn="l"/>
-            <a:r>
-              <a:rPr lang="en-US" sz="1400" b="1" dirty="0">
-                <a:solidFill>
-                  <a:srgbClr val="FEFDFA"/>
-                </a:solidFill>
-              </a:rPr>
-              <a:t>Tip</a:t>
-            </a:r>
-          </a:p>
-        </p:txBody>
-      </p:sp>
-      <p:sp>
-        <p:nvSpPr>
-          <p:cNvPr id="1056" name="callout-body" descr=""/>
+          <a:p/>
+        </p:txBody>
+      </p:sp>
+      <p:sp>
+        <p:nvSpPr>
+          <p:cNvPr id="1007" name="card-steel" descr="card: Worked example. Open the full example"/>
           <p:cNvSpPr/>
           <p:nvPr/>
         </p:nvSpPr>
         <p:spPr>
           <a:xfrm>
-            <a:off x="1097280" y="3867912"/>
-            <a:ext cx="9994392" cy="762000"/>
-          </a:xfrm>
-          <a:prstGeom prst="roundRect">
-            <a:avLst>
-              <a:gd name="adj" fmla="val 6000"/>
-            </a:avLst>
-          </a:prstGeom>
-          <a:solidFill>
-            <a:srgbClr val="FEFDFA"/>
-          </a:solidFill>
-          <a:ln>
-            <a:noFill/>
-          </a:ln>
-        </p:spPr>
-        <p:txBody>
-          <a:bodyPr lIns="91440" tIns="68580" rIns="91440" bIns="68580" anchor="t" wrap="square">
-            <a:normAutofit/>
-          </a:bodyPr>
-          <a:lstStyle/>
-          <a:p>
-            <a:pPr algn="l"/>
-            <a:r>
-              <a:rPr lang="en-US" sz="1200" b="0" dirty="0">
-                <a:solidFill>
-                  <a:srgbClr val="010B13"/>
-                </a:solidFill>
-              </a:rPr>
-              <a:t>For each RH: run the regression → record the Model Summary → record each predictor row → interpret → check your numbers in the Homework Checker.</a:t>
-            </a:r>
-          </a:p>
-        </p:txBody>
-      </p:sp>
-    </p:spTree>
-  </p:cSld>
-</p:sld>
-</file>
-
-<file path=ppt/slides/slide26.xml><?xml version="1.0" encoding="utf-8"?>
-<p:sld xmlns:a="http://schemas.openxmlformats.org/drawingml/2006/main" xmlns:r="http://schemas.openxmlformats.org/officeDocument/2006/relationships" xmlns:p="http://schemas.openxmlformats.org/presentationml/2006/main">
-  <p:cSld>
-    <p:spTree>
-      <p:nvGrpSpPr>
-        <p:cNvPr id="1" name=""/>
-        <p:cNvGrpSpPr/>
-        <p:nvPr/>
-      </p:nvGrpSpPr>
-      <p:grpSpPr>
-        <a:xfrm>
-          <a:off x="0" y="0"/>
-          <a:ext cx="0" cy="0"/>
-          <a:chOff x="0" y="0"/>
-          <a:chExt cx="0" cy="0"/>
-        </a:xfrm>
-      </p:grpSpPr>
-      <p:sp>
-        <p:nvSpPr>
-          <p:cNvPr id="2" name="Title 1"/>
-          <p:cNvSpPr>
-            <a:spLocks noGrp="1"/>
-          </p:cNvSpPr>
-          <p:nvPr>
-            <p:ph type="title"/>
-          </p:nvPr>
-        </p:nvSpPr>
-        <p:spPr>
-          <a:xfrm>
-            <a:off x="1097280" y="964692"/>
-            <a:ext cx="9997440" cy="1188720"/>
-          </a:xfrm>
-        </p:spPr>
-        <p:txBody>
-          <a:bodyPr/>
-          <a:lstStyle/>
-          <a:p>
-            <a:pPr lvl="0" indent="0" marL="0">
-              <a:buNone/>
-            </a:pPr>
-            <a:r>
-              <a:rPr/>
-              <a:t>Common Traps</a:t>
-            </a:r>
-          </a:p>
-        </p:txBody>
-      </p:sp>
-      <p:sp>
-        <p:nvSpPr>
-          <p:cNvPr id="3" name="Content Placeholder 2"/>
-          <p:cNvSpPr>
-            <a:spLocks noGrp="1"/>
-          </p:cNvSpPr>
-          <p:nvPr>
-            <p:ph idx="1"/>
-          </p:nvPr>
-        </p:nvSpPr>
-        <p:spPr/>
-        <p:txBody>
-          <a:bodyPr/>
-          <a:lstStyle/>
-          <a:p>
-            <a:pPr lvl="0"/>
-            <a:r>
-              <a:rPr/>
-              <a:t>❌ Reading </a:t>
-            </a:r>
-            <a:r>
-              <a:rPr i="1"/>
-              <a:t>b</a:t>
-            </a:r>
-            <a:r>
-              <a:rPr/>
-              <a:t> as “importance” across predictors — use </a:t>
-            </a:r>
-            <a:r>
-              <a:rPr b="1"/>
-              <a:t>β</a:t>
-            </a:r>
-          </a:p>
-          <a:p>
-            <a:pPr lvl="0"/>
-            <a:r>
-              <a:rPr/>
-              <a:t>❌ Forgetting “holding constant” when interpreting a coefficient</a:t>
-            </a:r>
-          </a:p>
-          <a:p>
-            <a:pPr lvl="0"/>
-            <a:r>
-              <a:rPr/>
-              <a:t>❌ Treating a binary predictor’s </a:t>
-            </a:r>
-            <a:r>
-              <a:rPr i="1"/>
-              <a:t>b</a:t>
-            </a:r>
-            <a:r>
-              <a:rPr/>
-              <a:t> as a slope (it’s a </a:t>
-            </a:r>
-            <a:r>
-              <a:rPr b="1"/>
-              <a:t>shift</a:t>
-            </a:r>
-            <a:r>
-              <a:rPr/>
-              <a:t>)</a:t>
-            </a:r>
-          </a:p>
-          <a:p>
-            <a:pPr lvl="0"/>
-            <a:r>
-              <a:rPr/>
-              <a:t>❌ Cherry-picking significant predictors without reporting the </a:t>
-            </a:r>
-            <a:r>
-              <a:rPr b="1"/>
-              <a:t>model</a:t>
-            </a:r>
-            <a:r>
-              <a:rPr/>
-              <a:t> first</a:t>
-            </a:r>
-          </a:p>
-          <a:p>
-            <a:pPr lvl="0"/>
-            <a:r>
-              <a:rPr/>
-              <a:t>❌ “Predicts” ≠ “causes” — no random assignment in game data</a:t>
-            </a:r>
-          </a:p>
-        </p:txBody>
-      </p:sp>
-    </p:spTree>
-  </p:cSld>
-</p:sld>
-</file>
-
-<file path=ppt/slides/slide27.xml><?xml version="1.0" encoding="utf-8"?>
-<p:sld xmlns:a="http://schemas.openxmlformats.org/drawingml/2006/main" xmlns:r="http://schemas.openxmlformats.org/officeDocument/2006/relationships" xmlns:p="http://schemas.openxmlformats.org/presentationml/2006/main">
-  <p:cSld>
-    <p:spTree>
-      <p:nvGrpSpPr>
-        <p:cNvPr id="1" name=""/>
-        <p:cNvGrpSpPr/>
-        <p:nvPr/>
-      </p:nvGrpSpPr>
-      <p:grpSpPr>
-        <a:xfrm>
-          <a:off x="0" y="0"/>
-          <a:ext cx="0" cy="0"/>
-          <a:chOff x="0" y="0"/>
-          <a:chExt cx="0" cy="0"/>
-        </a:xfrm>
-      </p:grpSpPr>
-      <p:sp>
-        <p:nvSpPr>
-          <p:cNvPr id="2" name="Title 1"/>
-          <p:cNvSpPr>
-            <a:spLocks noGrp="1"/>
-          </p:cNvSpPr>
-          <p:nvPr>
-            <p:ph type="title"/>
-          </p:nvPr>
-        </p:nvSpPr>
-        <p:spPr bwMode="blackWhite">
-          <a:xfrm>
-            <a:off x="1097280" y="2386744"/>
-            <a:ext cx="9997440" cy="1645920"/>
-          </a:xfrm>
-          <a:solidFill>
-            <a:srgbClr val="FFFFFF"/>
-          </a:solidFill>
-          <a:ln w="38100">
-            <a:solidFill>
-              <a:srgbClr val="404040"/>
-            </a:solidFill>
-          </a:ln>
-        </p:spPr>
-        <p:txBody>
-          <a:bodyPr/>
-          <a:lstStyle/>
-          <a:p>
-            <a:pPr lvl="0" indent="0" marL="0">
-              <a:buNone/>
-            </a:pPr>
-            <a:r>
-              <a:rPr/>
-              <a:t>The Semester in Review</a:t>
-            </a:r>
-          </a:p>
-        </p:txBody>
-      </p:sp>
-    </p:spTree>
-  </p:cSld>
-</p:sld>
-</file>
-
-<file path=ppt/slides/slide28.xml><?xml version="1.0" encoding="utf-8"?>
-<p:sld xmlns:a="http://schemas.openxmlformats.org/drawingml/2006/main" xmlns:r="http://schemas.openxmlformats.org/officeDocument/2006/relationships" xmlns:p="http://schemas.openxmlformats.org/presentationml/2006/main">
-  <p:cSld>
-    <p:spTree>
-      <p:nvGrpSpPr>
-        <p:cNvPr id="1" name=""/>
-        <p:cNvGrpSpPr/>
-        <p:nvPr/>
-      </p:nvGrpSpPr>
-      <p:grpSpPr>
-        <a:xfrm>
-          <a:off x="0" y="0"/>
-          <a:ext cx="0" cy="0"/>
-          <a:chOff x="0" y="0"/>
-          <a:chExt cx="0" cy="0"/>
-        </a:xfrm>
-      </p:grpSpPr>
-      <p:sp>
-        <p:nvSpPr>
-          <p:cNvPr id="2" name="Title 1"/>
-          <p:cNvSpPr>
-            <a:spLocks noGrp="1"/>
-          </p:cNvSpPr>
-          <p:nvPr>
-            <p:ph type="title"/>
-          </p:nvPr>
-        </p:nvSpPr>
-        <p:spPr>
-          <a:xfrm>
-            <a:off x="1097280" y="964692"/>
-            <a:ext cx="9997440" cy="1188720"/>
-          </a:xfrm>
-        </p:spPr>
-        <p:txBody>
-          <a:bodyPr/>
-          <a:lstStyle/>
-          <a:p>
-            <a:pPr lvl="0" indent="0" marL="0">
-              <a:buNone/>
-            </a:pPr>
-            <a:r>
-              <a:rPr/>
-              <a:t>You Now Own the Whole Toolkit</a:t>
-            </a:r>
-          </a:p>
-        </p:txBody>
-      </p:sp>
-      <p:sp>
-        <p:nvSpPr>
-          <p:cNvPr id="1057" name="prose" descr=""/>
-          <p:cNvSpPr/>
-          <p:nvPr/>
-        </p:nvSpPr>
-        <p:spPr>
-          <a:xfrm>
-            <a:off x="1097280" y="2633472"/>
-            <a:ext cx="9994392" cy="365760"/>
-          </a:xfrm>
-          <a:prstGeom prst="roundRect">
-            <a:avLst>
-              <a:gd name="adj" fmla="val 6000"/>
-            </a:avLst>
-          </a:prstGeom>
-          <a:noFill/>
-          <a:ln>
-            <a:noFill/>
-          </a:ln>
-        </p:spPr>
-        <p:txBody>
-          <a:bodyPr lIns="91440" tIns="68580" rIns="91440" bIns="68580" anchor="t" wrap="square">
-            <a:normAutofit/>
-          </a:bodyPr>
-          <a:lstStyle/>
-          <a:p>
-            <a:pPr algn="l"/>
-            <a:r>
-              <a:rPr lang="en-US" sz="1200" b="0" dirty="0">
-                <a:solidFill>
-                  <a:srgbClr val="010B13"/>
-                </a:solidFill>
-              </a:rPr>
-              <a:t>Lab 06 · univariates Lab 07 · r &amp; X² Lab 08 · one-way ANOVA Lab 11 · k-groups Lab 12 · factorial ANOVA Lab 13 · multiple regression</a:t>
-            </a:r>
-          </a:p>
-        </p:txBody>
-      </p:sp>
-      <p:sp>
-        <p:nvSpPr>
-          <p:cNvPr id="1058" name="callout-tip" descr="tip callout: Tip. Every one of these answers the same core question differently: does the effect survive when you account for the other variables? That question is empirical psychology."/>
-          <p:cNvSpPr/>
-          <p:nvPr/>
-        </p:nvSpPr>
-        <p:spPr>
-          <a:xfrm>
-            <a:off x="1097280" y="3090672"/>
-            <a:ext cx="9994392" cy="1082040"/>
+            <a:off x="6167628" y="3785616"/>
+            <a:ext cx="4924044" cy="1005840"/>
           </a:xfrm>
           <a:prstGeom prst="roundRect">
             <a:avLst>
@@ -6298,158 +5927,69 @@
           </a:solidFill>
           <a:ln w="19050">
             <a:solidFill>
-              <a:srgbClr val="009955"/>
+              <a:srgbClr val="CCCCCC"/>
             </a:solidFill>
           </a:ln>
         </p:spPr>
         <p:txBody>
-          <a:bodyPr lIns="91440" tIns="68580" rIns="91440" bIns="68580" anchor="t" wrap="square">
+          <a:bodyPr lIns="182880" tIns="182880" rIns="182880" bIns="182880" anchor="t" wrap="square">
             <a:normAutofit/>
           </a:bodyPr>
           <a:lstStyle/>
-          <a:p/>
-        </p:txBody>
-      </p:sp>
-      <p:sp>
-        <p:nvSpPr>
-          <p:cNvPr id="1059" name="callout-title" descr=""/>
+          <a:p>
+            <a:pPr algn="l"/>
+            <a:r>
+              <a:rPr lang="en-US" sz="2200" b="1" dirty="0">
+                <a:solidFill>
+                  <a:srgbClr val="010B13"/>
+                </a:solidFill>
+              </a:rPr>
+              <a:t>Worked example</a:t>
+            </a:r>
+          </a:p>
+          <a:p>
+            <a:pPr algn="l"/>
+            <a:r>
+              <a:rPr lang="en-US" sz="2000" b="0" dirty="0">
+                <a:solidFill>
+                  <a:srgbClr val="010B13"/>
+                </a:solidFill>
+                <a:hlinkClick r:id="rId6"/>
+              </a:rPr>
+              <a:t>Open the full example</a:t>
+            </a:r>
+          </a:p>
+        </p:txBody>
+      </p:sp>
+      <p:sp>
+        <p:nvSpPr>
+          <p:cNvPr id="1008" name="card-rail" descr=""/>
           <p:cNvSpPr/>
           <p:nvPr/>
         </p:nvSpPr>
         <p:spPr>
           <a:xfrm>
-            <a:off x="1097280" y="3090672"/>
-            <a:ext cx="9994392" cy="320040"/>
+            <a:off x="6167628" y="3785616"/>
+            <a:ext cx="54864" cy="1005840"/>
           </a:xfrm>
           <a:prstGeom prst="roundRect">
             <a:avLst>
-              <a:gd name="adj" fmla="val 6000"/>
+              <a:gd name="adj" fmla="val 20000"/>
             </a:avLst>
           </a:prstGeom>
           <a:solidFill>
-            <a:srgbClr val="009955"/>
+            <a:srgbClr val="010B13"/>
           </a:solidFill>
           <a:ln>
             <a:noFill/>
           </a:ln>
         </p:spPr>
         <p:txBody>
-          <a:bodyPr lIns="91440" tIns="68580" rIns="91440" bIns="68580" anchor="t" wrap="square">
+          <a:bodyPr lIns="182880" tIns="182880" rIns="182880" bIns="182880" anchor="t" wrap="square">
             <a:normAutofit/>
           </a:bodyPr>
           <a:lstStyle/>
-          <a:p>
-            <a:pPr algn="l"/>
-            <a:r>
-              <a:rPr lang="en-US" sz="1400" b="1" dirty="0">
-                <a:solidFill>
-                  <a:srgbClr val="FEFDFA"/>
-                </a:solidFill>
-              </a:rPr>
-              <a:t>Tip</a:t>
-            </a:r>
-          </a:p>
-        </p:txBody>
-      </p:sp>
-      <p:sp>
-        <p:nvSpPr>
-          <p:cNvPr id="1060" name="callout-body" descr=""/>
-          <p:cNvSpPr/>
-          <p:nvPr/>
-        </p:nvSpPr>
-        <p:spPr>
-          <a:xfrm>
-            <a:off x="1097280" y="3410712"/>
-            <a:ext cx="9994392" cy="762000"/>
-          </a:xfrm>
-          <a:prstGeom prst="roundRect">
-            <a:avLst>
-              <a:gd name="adj" fmla="val 6000"/>
-            </a:avLst>
-          </a:prstGeom>
-          <a:solidFill>
-            <a:srgbClr val="FEFDFA"/>
-          </a:solidFill>
-          <a:ln>
-            <a:noFill/>
-          </a:ln>
-        </p:spPr>
-        <p:txBody>
-          <a:bodyPr lIns="91440" tIns="68580" rIns="91440" bIns="68580" anchor="t" wrap="square">
-            <a:normAutofit/>
-          </a:bodyPr>
-          <a:lstStyle/>
-          <a:p>
-            <a:pPr algn="l"/>
-            <a:r>
-              <a:rPr lang="en-US" sz="1200" b="0" dirty="0">
-                <a:solidFill>
-                  <a:srgbClr val="010B13"/>
-                </a:solidFill>
-              </a:rPr>
-              <a:t>Every one of these answers the same core question differently: does the effect survive when you account for the other variables? That question is empirical psychology.</a:t>
-            </a:r>
-          </a:p>
-        </p:txBody>
-      </p:sp>
-    </p:spTree>
-  </p:cSld>
-</p:sld>
-</file>
-
-<file path=ppt/slides/slide29.xml><?xml version="1.0" encoding="utf-8"?>
-<p:sld xmlns:a="http://schemas.openxmlformats.org/drawingml/2006/main" xmlns:r="http://schemas.openxmlformats.org/officeDocument/2006/relationships" xmlns:p="http://schemas.openxmlformats.org/presentationml/2006/main">
-  <p:cSld>
-    <p:spTree>
-      <p:nvGrpSpPr>
-        <p:cNvPr id="1" name=""/>
-        <p:cNvGrpSpPr/>
-        <p:nvPr/>
-      </p:nvGrpSpPr>
-      <p:grpSpPr>
-        <a:xfrm>
-          <a:off x="0" y="0"/>
-          <a:ext cx="0" cy="0"/>
-          <a:chOff x="0" y="0"/>
-          <a:chExt cx="0" cy="0"/>
-        </a:xfrm>
-      </p:grpSpPr>
-      <p:sp>
-        <p:nvSpPr>
-          <p:cNvPr id="2" name="Title 1"/>
-          <p:cNvSpPr>
-            <a:spLocks noGrp="1"/>
-          </p:cNvSpPr>
-          <p:nvPr>
-            <p:ph type="title"/>
-          </p:nvPr>
-        </p:nvSpPr>
-        <p:spPr bwMode="blackWhite">
-          <a:xfrm>
-            <a:off x="1097280" y="2386744"/>
-            <a:ext cx="9997440" cy="1645920"/>
-          </a:xfrm>
-          <a:solidFill>
-            <a:srgbClr val="FFFFFF"/>
-          </a:solidFill>
-          <a:ln w="38100">
-            <a:solidFill>
-              <a:srgbClr val="404040"/>
-            </a:solidFill>
-          </a:ln>
-        </p:spPr>
-        <p:txBody>
-          <a:bodyPr/>
-          <a:lstStyle/>
-          <a:p>
-            <a:pPr lvl="0" indent="0" marL="0">
-              <a:buNone/>
-            </a:pPr>
-            <a:r>
-              <a:rPr/>
-              <a:t>Questions?</a:t>
-            </a:r>
-          </a:p>
+          <a:p/>
         </p:txBody>
       </p:sp>
     </p:spTree>
@@ -6476,7 +6016,7 @@
       </p:grpSpPr>
       <p:sp>
         <p:nvSpPr>
-          <p:cNvPr id="2" name="Title 1"/>
+          <p:cNvPr id="10" name="Title 9"/>
           <p:cNvSpPr>
             <a:spLocks noGrp="1"/>
           </p:cNvSpPr>
@@ -6484,12 +6024,87 @@
             <p:ph type="title"/>
           </p:nvPr>
         </p:nvSpPr>
-        <p:spPr>
+        <p:spPr/>
+        <p:txBody>
+          <a:bodyPr/>
+          <a:lstStyle/>
+          <a:p>
+            <a:pPr lvl="0" indent="0" marL="0">
+              <a:buNone/>
+            </a:pPr>
+            <a:r>
+              <a:rPr/>
+              <a:t>2 Keep Data and Syntax Editors open</a:t>
+            </a:r>
+          </a:p>
+        </p:txBody>
+      </p:sp>
+      <p:sp>
+        <p:nvSpPr>
+          <p:cNvPr id="3" name="Text Placeholder 2"/>
+          <p:cNvSpPr>
+            <a:spLocks noGrp="1"/>
+          </p:cNvSpPr>
+          <p:nvPr>
+            <p:ph idx="1" type="body"/>
+          </p:nvPr>
+        </p:nvSpPr>
+        <p:spPr/>
+        <p:txBody>
+          <a:bodyPr/>
+          <a:lstStyle/>
+          <a:p>
+            <a:pPr lvl="0" indent="0" marL="0">
+              <a:buNone/>
+            </a:pPr>
+            <a:r>
+              <a:rPr b="1"/>
+              <a:t>Data Editor</a:t>
+            </a:r>
+          </a:p>
+        </p:txBody>
+      </p:sp>
+      <p:pic>
+        <p:nvPicPr>
+          <p:cNvPr descr="Focused SPSS Data Editor image showing spreadsheet columns and the Data View and Variable View tabs" id="0" name="Picture 1"/>
+          <p:cNvPicPr>
+            <a:picLocks noGrp="1" noChangeAspect="1"/>
+          </p:cNvPicPr>
+          <p:nvPr/>
+        </p:nvPicPr>
+        <p:blipFill>
+          <a:blip r:embed="rId3"/>
+          <a:stretch>
+            <a:fillRect/>
+          </a:stretch>
+        </p:blipFill>
+        <p:spPr bwMode="auto">
           <a:xfrm>
-            <a:off x="1097280" y="964692"/>
-            <a:ext cx="9997440" cy="1188720"/>
+            <a:off x="1574800" y="3416300"/>
+            <a:ext cx="4267200" cy="2032000"/>
           </a:xfrm>
+          <a:prstGeom prst="rect">
+            <a:avLst/>
+          </a:prstGeom>
+          <a:noFill/>
+          <a:ln w="9525">
+            <a:noFill/>
+            <a:headEnd/>
+            <a:tailEnd/>
+          </a:ln>
         </p:spPr>
+      </p:pic>
+      <p:sp>
+        <p:nvSpPr>
+          <p:cNvPr id="4" name="Content Placeholder 3"/>
+          <p:cNvSpPr>
+            <a:spLocks noGrp="1"/>
+          </p:cNvSpPr>
+          <p:nvPr>
+            <p:ph idx="2" sz="half"/>
+          </p:nvPr>
+        </p:nvSpPr>
+        <p:spPr/>
         <p:txBody>
           <a:bodyPr/>
           <a:lstStyle/>
@@ -6498,20 +6113,20 @@
               <a:buNone/>
             </a:pPr>
             <a:r>
-              <a:rPr/>
-              <a:t>What You Need Today</a:t>
-            </a:r>
-          </a:p>
-        </p:txBody>
-      </p:sp>
-      <p:sp>
-        <p:nvSpPr>
-          <p:cNvPr id="3" name="Content Placeholder 2"/>
-          <p:cNvSpPr>
-            <a:spLocks noGrp="1"/>
-          </p:cNvSpPr>
-          <p:nvPr>
-            <p:ph idx="1"/>
+              <a:rPr b="1"/>
+              <a:t>Inspect outcomes and predictors</a:t>
+            </a:r>
+          </a:p>
+        </p:txBody>
+      </p:sp>
+      <p:sp>
+        <p:nvSpPr>
+          <p:cNvPr id="11" name="Text Placeholder 4"/>
+          <p:cNvSpPr>
+            <a:spLocks noGrp="1"/>
+          </p:cNvSpPr>
+          <p:nvPr>
+            <p:ph idx="13" sz="quarter" type="body"/>
           </p:nvPr>
         </p:nvSpPr>
         <p:spPr/>
@@ -6523,156 +6138,63 @@
               <a:buNone/>
             </a:pPr>
             <a:r>
-              <a:rPr/>
-              <a:t>Everything for this week is linked on the next slides – and always on the lab page under </a:t>
-            </a:r>
-            <a:r>
               <a:rPr b="1"/>
-              <a:t>Handouts &amp; References</a:t>
-            </a:r>
-            <a:r>
-              <a:rPr/>
-              <a:t>.</a:t>
-            </a:r>
-          </a:p>
+              <a:t>Syntax Editor</a:t>
+            </a:r>
+          </a:p>
+        </p:txBody>
+      </p:sp>
+      <p:pic>
+        <p:nvPicPr>
+          <p:cNvPr descr="Focused SPSS Syntax Editor image showing the command area and an annotation pointing to the green Run button" id="0" name="Picture 1"/>
+          <p:cNvPicPr>
+            <a:picLocks noGrp="1" noChangeAspect="1"/>
+          </p:cNvPicPr>
+          <p:nvPr/>
+        </p:nvPicPr>
+        <p:blipFill>
+          <a:blip r:embed="rId4"/>
+          <a:stretch>
+            <a:fillRect/>
+          </a:stretch>
+        </p:blipFill>
+        <p:spPr bwMode="auto">
+          <a:xfrm>
+            <a:off x="6337300" y="3429000"/>
+            <a:ext cx="4241800" cy="2006600"/>
+          </a:xfrm>
+          <a:prstGeom prst="rect">
+            <a:avLst/>
+          </a:prstGeom>
+          <a:noFill/>
+          <a:ln w="9525">
+            <a:noFill/>
+            <a:headEnd/>
+            <a:tailEnd/>
+          </a:ln>
+        </p:spPr>
+      </p:pic>
+      <p:sp>
+        <p:nvSpPr>
+          <p:cNvPr id="6" name="Content Placeholder 5"/>
+          <p:cNvSpPr>
+            <a:spLocks noGrp="1"/>
+          </p:cNvSpPr>
+          <p:nvPr>
+            <p:ph idx="4" sz="quarter"/>
+          </p:nvPr>
+        </p:nvSpPr>
+        <p:spPr/>
+        <p:txBody>
+          <a:bodyPr/>
+          <a:lstStyle/>
           <a:p>
             <a:pPr lvl="0" indent="0" marL="0">
               <a:buNone/>
             </a:pPr>
             <a:r>
-              <a:rPr/>
-              <a:t>Open these </a:t>
-            </a:r>
-            <a:r>
               <a:rPr b="1"/>
-              <a:t>before we start</a:t>
-            </a:r>
-            <a:r>
-              <a:rPr/>
-              <a:t> so you can follow along.</a:t>
-            </a:r>
-          </a:p>
-        </p:txBody>
-      </p:sp>
-    </p:spTree>
-  </p:cSld>
-</p:sld>
-</file>
-
-<file path=ppt/slides/slide30.xml><?xml version="1.0" encoding="utf-8"?>
-<p:sld xmlns:a="http://schemas.openxmlformats.org/drawingml/2006/main" xmlns:r="http://schemas.openxmlformats.org/officeDocument/2006/relationships" xmlns:p="http://schemas.openxmlformats.org/presentationml/2006/main">
-  <p:cSld>
-    <p:spTree>
-      <p:nvGrpSpPr>
-        <p:cNvPr id="1" name=""/>
-        <p:cNvGrpSpPr/>
-        <p:nvPr/>
-      </p:nvGrpSpPr>
-      <p:grpSpPr>
-        <a:xfrm>
-          <a:off x="0" y="0"/>
-          <a:ext cx="0" cy="0"/>
-          <a:chOff x="0" y="0"/>
-          <a:chExt cx="0" cy="0"/>
-        </a:xfrm>
-      </p:grpSpPr>
-      <p:sp>
-        <p:nvSpPr>
-          <p:cNvPr id="2" name="Title 1"/>
-          <p:cNvSpPr>
-            <a:spLocks noGrp="1"/>
-          </p:cNvSpPr>
-          <p:nvPr>
-            <p:ph type="title"/>
-          </p:nvPr>
-        </p:nvSpPr>
-        <p:spPr>
-          <a:xfrm>
-            <a:off x="1097280" y="964692"/>
-            <a:ext cx="9997440" cy="1188720"/>
-          </a:xfrm>
-        </p:spPr>
-        <p:txBody>
-          <a:bodyPr/>
-          <a:lstStyle/>
-          <a:p>
-            <a:pPr lvl="0" indent="0" marL="0">
-              <a:buNone/>
-            </a:pPr>
-            <a:r>
-              <a:rPr/>
-              <a:t>Assignments &amp; Reminders</a:t>
-            </a:r>
-          </a:p>
-        </p:txBody>
-      </p:sp>
-      <p:sp>
-        <p:nvSpPr>
-          <p:cNvPr id="3" name="Content Placeholder 2"/>
-          <p:cNvSpPr>
-            <a:spLocks noGrp="1"/>
-          </p:cNvSpPr>
-          <p:nvPr>
-            <p:ph idx="1"/>
-          </p:nvPr>
-        </p:nvSpPr>
-        <p:spPr/>
-        <p:txBody>
-          <a:bodyPr/>
-          <a:lstStyle/>
-          <a:p>
-            <a:pPr lvl="0" indent="0" marL="0">
-              <a:buNone/>
-            </a:pPr>
-            <a:r>
-              <a:rPr b="1"/>
-              <a:t>Given this week:</a:t>
-            </a:r>
-          </a:p>
-          <a:p>
-            <a:pPr lvl="0"/>
-            <a:r>
-              <a:rPr/>
-              <a:t>Graded Research Project Reports will be returned</a:t>
-            </a:r>
-          </a:p>
-          <a:p>
-            <a:pPr lvl="0" indent="0" marL="0">
-              <a:buNone/>
-            </a:pPr>
-            <a:r>
-              <a:rPr b="1"/>
-              <a:t>Due this week:</a:t>
-            </a:r>
-          </a:p>
-          <a:p>
-            <a:pPr lvl="0"/>
-            <a:r>
-              <a:rPr/>
-              <a:t>Lab 12: Factorial Worksheet</a:t>
-            </a:r>
-          </a:p>
-          <a:p>
-            <a:pPr lvl="0"/>
-            <a:r>
-              <a:rPr/>
-              <a:t>Lab 13: Multiple Regression Worksheet</a:t>
-            </a:r>
-          </a:p>
-          <a:p>
-            <a:pPr lvl="0"/>
-            <a:r>
-              <a:rPr/>
-              <a:t>Rewrites of Research Project Reports due</a:t>
-            </a:r>
-          </a:p>
-          <a:p>
-            <a:pPr lvl="0" indent="0" marL="0">
-              <a:buNone/>
-            </a:pPr>
-            <a:r>
-              <a:rPr/>
-              <a:t>Submit to your lab section in Canvas by 11:59pm the day before your lab meets.</a:t>
+              <a:t>Save and rerun commands</a:t>
             </a:r>
           </a:p>
         </p:txBody>
@@ -6724,288 +6246,41 @@
             </a:pPr>
             <a:r>
               <a:rPr/>
-              <a:t>Multiple Linear Regression</a:t>
-            </a:r>
-          </a:p>
-        </p:txBody>
-      </p:sp>
-      <p:sp>
-        <p:nvSpPr>
-          <p:cNvPr id="1003" name="card-blue" descr="card: [book icon]. SPSS Handouts"/>
-          <p:cNvSpPr/>
+              <a:t>3 Read results in Output Viewer</a:t>
+            </a:r>
+          </a:p>
+        </p:txBody>
+      </p:sp>
+      <p:pic>
+        <p:nvPicPr>
+          <p:cNvPr descr="SPSS-style regression coefficients output predicting Nebraska total score after 1997; the displayed standardized Beta column is blank, so students use the package-generated APA table later in the deck for beta values" id="0" name="Picture 1"/>
+          <p:cNvPicPr>
+            <a:picLocks noGrp="1" noChangeAspect="1"/>
+          </p:cNvPicPr>
           <p:nvPr/>
-        </p:nvSpPr>
-        <p:spPr>
+        </p:nvPicPr>
+        <p:blipFill>
+          <a:blip r:embed="rId3"/>
+          <a:stretch>
+            <a:fillRect/>
+          </a:stretch>
+        </p:blipFill>
+        <p:spPr bwMode="auto">
           <a:xfrm>
-            <a:off x="1097280" y="2633472"/>
-            <a:ext cx="3270504" cy="579120"/>
+            <a:off x="1092200" y="2692400"/>
+            <a:ext cx="9994900" cy="2984500"/>
           </a:xfrm>
-          <a:prstGeom prst="roundRect">
-            <a:avLst>
-              <a:gd name="adj" fmla="val 6000"/>
-            </a:avLst>
+          <a:prstGeom prst="rect">
+            <a:avLst/>
           </a:prstGeom>
-          <a:solidFill>
-            <a:srgbClr val="FEFDFA"/>
-          </a:solidFill>
-          <a:ln w="19050">
-            <a:solidFill>
-              <a:srgbClr val="CCCCCC"/>
-            </a:solidFill>
+          <a:noFill/>
+          <a:ln w="9525">
+            <a:noFill/>
+            <a:headEnd/>
+            <a:tailEnd/>
           </a:ln>
         </p:spPr>
-        <p:txBody>
-          <a:bodyPr lIns="91440" tIns="68580" rIns="91440" bIns="68580" anchor="t" wrap="square">
-            <a:normAutofit/>
-          </a:bodyPr>
-          <a:lstStyle/>
-          <a:p>
-            <a:pPr algn="l"/>
-            <a:r>
-              <a:rPr lang="en-US" sz="1400" b="1" dirty="0">
-                <a:solidFill>
-                  <a:srgbClr val="005D84"/>
-                </a:solidFill>
-              </a:rPr>
-              <a:t>[book icon]</a:t>
-            </a:r>
-          </a:p>
-          <a:p>
-            <a:pPr algn="l"/>
-            <a:r>
-              <a:rPr lang="en-US" sz="1200" b="0" dirty="0">
-                <a:solidFill>
-                  <a:srgbClr val="010B13"/>
-                </a:solidFill>
-              </a:rPr>
-              <a:t>SPSS Handouts</a:t>
-            </a:r>
-          </a:p>
-        </p:txBody>
-      </p:sp>
-      <p:sp>
-        <p:nvSpPr>
-          <p:cNvPr id="1004" name="card-rail" descr=""/>
-          <p:cNvSpPr/>
-          <p:nvPr/>
-        </p:nvSpPr>
-        <p:spPr>
-          <a:xfrm>
-            <a:off x="1097280" y="2633472"/>
-            <a:ext cx="54864" cy="579120"/>
-          </a:xfrm>
-          <a:prstGeom prst="roundRect">
-            <a:avLst>
-              <a:gd name="adj" fmla="val 20000"/>
-            </a:avLst>
-          </a:prstGeom>
-          <a:solidFill>
-            <a:srgbClr val="005D84"/>
-          </a:solidFill>
-          <a:ln>
-            <a:noFill/>
-          </a:ln>
-        </p:spPr>
-        <p:txBody>
-          <a:bodyPr lIns="91440" tIns="68580" rIns="91440" bIns="68580" anchor="t" wrap="square">
-            <a:normAutofit/>
-          </a:bodyPr>
-          <a:lstStyle/>
-          <a:p/>
-        </p:txBody>
-      </p:sp>
-      <p:sp>
-        <p:nvSpPr>
-          <p:cNvPr id="1005" name="card-red" descr="card: [note icon]. Multiple Regression Example [PDF]"/>
-          <p:cNvSpPr/>
-          <p:nvPr/>
-        </p:nvSpPr>
-        <p:spPr>
-          <a:xfrm>
-            <a:off x="4459224" y="2633472"/>
-            <a:ext cx="3270504" cy="762000"/>
-          </a:xfrm>
-          <a:prstGeom prst="roundRect">
-            <a:avLst>
-              <a:gd name="adj" fmla="val 6000"/>
-            </a:avLst>
-          </a:prstGeom>
-          <a:solidFill>
-            <a:srgbClr val="FEFDFA"/>
-          </a:solidFill>
-          <a:ln w="19050">
-            <a:solidFill>
-              <a:srgbClr val="CCCCCC"/>
-            </a:solidFill>
-          </a:ln>
-        </p:spPr>
-        <p:txBody>
-          <a:bodyPr lIns="91440" tIns="68580" rIns="91440" bIns="68580" anchor="t" wrap="square">
-            <a:normAutofit/>
-          </a:bodyPr>
-          <a:lstStyle/>
-          <a:p>
-            <a:pPr algn="l"/>
-            <a:r>
-              <a:rPr lang="en-US" sz="1400" b="1" dirty="0">
-                <a:solidFill>
-                  <a:srgbClr val="D00000"/>
-                </a:solidFill>
-              </a:rPr>
-              <a:t>[note icon]</a:t>
-            </a:r>
-          </a:p>
-          <a:p>
-            <a:pPr algn="l"/>
-            <a:r>
-              <a:rPr lang="en-US" sz="1200" b="0" dirty="0">
-                <a:solidFill>
-                  <a:srgbClr val="010B13"/>
-                </a:solidFill>
-              </a:rPr>
-              <a:t>Multiple Regression Example</a:t>
-            </a:r>
-          </a:p>
-          <a:p>
-            <a:pPr algn="l"/>
-            <a:r>
-              <a:rPr lang="en-US" sz="1200" b="0" dirty="0">
-                <a:solidFill>
-                  <a:srgbClr val="010B13"/>
-                </a:solidFill>
-              </a:rPr>
-              <a:t>[PDF]</a:t>
-            </a:r>
-          </a:p>
-        </p:txBody>
-      </p:sp>
-      <p:sp>
-        <p:nvSpPr>
-          <p:cNvPr id="1006" name="card-rail" descr=""/>
-          <p:cNvSpPr/>
-          <p:nvPr/>
-        </p:nvSpPr>
-        <p:spPr>
-          <a:xfrm>
-            <a:off x="4459224" y="2633472"/>
-            <a:ext cx="54864" cy="762000"/>
-          </a:xfrm>
-          <a:prstGeom prst="roundRect">
-            <a:avLst>
-              <a:gd name="adj" fmla="val 20000"/>
-            </a:avLst>
-          </a:prstGeom>
-          <a:solidFill>
-            <a:srgbClr val="D00000"/>
-          </a:solidFill>
-          <a:ln>
-            <a:noFill/>
-          </a:ln>
-        </p:spPr>
-        <p:txBody>
-          <a:bodyPr lIns="91440" tIns="68580" rIns="91440" bIns="68580" anchor="t" wrap="square">
-            <a:normAutofit/>
-          </a:bodyPr>
-          <a:lstStyle/>
-          <a:p/>
-        </p:txBody>
-      </p:sp>
-      <p:sp>
-        <p:nvSpPr>
-          <p:cNvPr id="1007" name="card-red" descr="card: [note icon]. Another Multiple Regression Example [PDF]"/>
-          <p:cNvSpPr/>
-          <p:nvPr/>
-        </p:nvSpPr>
-        <p:spPr>
-          <a:xfrm>
-            <a:off x="7821168" y="2633472"/>
-            <a:ext cx="3270504" cy="762000"/>
-          </a:xfrm>
-          <a:prstGeom prst="roundRect">
-            <a:avLst>
-              <a:gd name="adj" fmla="val 6000"/>
-            </a:avLst>
-          </a:prstGeom>
-          <a:solidFill>
-            <a:srgbClr val="FEFDFA"/>
-          </a:solidFill>
-          <a:ln w="19050">
-            <a:solidFill>
-              <a:srgbClr val="CCCCCC"/>
-            </a:solidFill>
-          </a:ln>
-        </p:spPr>
-        <p:txBody>
-          <a:bodyPr lIns="91440" tIns="68580" rIns="91440" bIns="68580" anchor="t" wrap="square">
-            <a:normAutofit/>
-          </a:bodyPr>
-          <a:lstStyle/>
-          <a:p>
-            <a:pPr algn="l"/>
-            <a:r>
-              <a:rPr lang="en-US" sz="1400" b="1" dirty="0">
-                <a:solidFill>
-                  <a:srgbClr val="D00000"/>
-                </a:solidFill>
-              </a:rPr>
-              <a:t>[note icon]</a:t>
-            </a:r>
-          </a:p>
-          <a:p>
-            <a:pPr algn="l"/>
-            <a:r>
-              <a:rPr lang="en-US" sz="1200" b="0" dirty="0">
-                <a:solidFill>
-                  <a:srgbClr val="010B13"/>
-                </a:solidFill>
-              </a:rPr>
-              <a:t>Another Multiple Regression Example</a:t>
-            </a:r>
-          </a:p>
-          <a:p>
-            <a:pPr algn="l"/>
-            <a:r>
-              <a:rPr lang="en-US" sz="1200" b="0" dirty="0">
-                <a:solidFill>
-                  <a:srgbClr val="010B13"/>
-                </a:solidFill>
-              </a:rPr>
-              <a:t>[PDF]</a:t>
-            </a:r>
-          </a:p>
-        </p:txBody>
-      </p:sp>
-      <p:sp>
-        <p:nvSpPr>
-          <p:cNvPr id="1008" name="card-rail" descr=""/>
-          <p:cNvSpPr/>
-          <p:nvPr/>
-        </p:nvSpPr>
-        <p:spPr>
-          <a:xfrm>
-            <a:off x="7821168" y="2633472"/>
-            <a:ext cx="54864" cy="762000"/>
-          </a:xfrm>
-          <a:prstGeom prst="roundRect">
-            <a:avLst>
-              <a:gd name="adj" fmla="val 20000"/>
-            </a:avLst>
-          </a:prstGeom>
-          <a:solidFill>
-            <a:srgbClr val="D00000"/>
-          </a:solidFill>
-          <a:ln>
-            <a:noFill/>
-          </a:ln>
-        </p:spPr>
-        <p:txBody>
-          <a:bodyPr lIns="91440" tIns="68580" rIns="91440" bIns="68580" anchor="t" wrap="square">
-            <a:normAutofit/>
-          </a:bodyPr>
-          <a:lstStyle/>
-          <a:p/>
-        </p:txBody>
-      </p:sp>
+      </p:pic>
     </p:spTree>
   </p:cSld>
 </p:sld>
@@ -7053,297 +6328,51 @@
             </a:pPr>
             <a:r>
               <a:rPr/>
-              <a:t>Weekly Lab Assignment</a:t>
-            </a:r>
-          </a:p>
-        </p:txBody>
-      </p:sp>
-      <p:sp>
-        <p:nvSpPr>
-          <p:cNvPr id="1009" name="card-steel" descr="card: [chart icon]. huskers_data.sav [SPSS data file]"/>
-          <p:cNvSpPr/>
-          <p:nvPr/>
-        </p:nvSpPr>
-        <p:spPr>
-          <a:xfrm>
-            <a:off x="1097280" y="2633472"/>
-            <a:ext cx="3270504" cy="762000"/>
-          </a:xfrm>
-          <a:prstGeom prst="roundRect">
-            <a:avLst>
-              <a:gd name="adj" fmla="val 6000"/>
-            </a:avLst>
-          </a:prstGeom>
-          <a:solidFill>
-            <a:srgbClr val="FEFDFA"/>
-          </a:solidFill>
-          <a:ln w="19050">
-            <a:solidFill>
-              <a:srgbClr val="CCCCCC"/>
-            </a:solidFill>
-          </a:ln>
-        </p:spPr>
-        <p:txBody>
-          <a:bodyPr lIns="91440" tIns="68580" rIns="91440" bIns="68580" anchor="t" wrap="square">
-            <a:normAutofit/>
-          </a:bodyPr>
-          <a:lstStyle/>
-          <a:p>
-            <a:pPr algn="l"/>
-            <a:r>
-              <a:rPr lang="en-US" sz="1400" b="1" dirty="0">
-                <a:solidFill>
-                  <a:srgbClr val="010B13"/>
-                </a:solidFill>
-              </a:rPr>
-              <a:t>[chart icon]</a:t>
-            </a:r>
-          </a:p>
-          <a:p>
-            <a:pPr algn="l"/>
-            <a:r>
-              <a:rPr lang="en-US" sz="1200" b="0" dirty="0">
-                <a:solidFill>
-                  <a:srgbClr val="010B13"/>
-                </a:solidFill>
-              </a:rPr>
-              <a:t>huskers_data.sav</a:t>
-            </a:r>
-          </a:p>
-          <a:p>
-            <a:pPr algn="l"/>
-            <a:r>
-              <a:rPr lang="en-US" sz="1200" b="0" dirty="0">
-                <a:solidFill>
-                  <a:srgbClr val="010B13"/>
-                </a:solidFill>
-              </a:rPr>
-              <a:t>[SPSS data file]</a:t>
-            </a:r>
-          </a:p>
-        </p:txBody>
-      </p:sp>
-      <p:sp>
-        <p:nvSpPr>
-          <p:cNvPr id="1010" name="card-rail" descr=""/>
-          <p:cNvSpPr/>
-          <p:nvPr/>
-        </p:nvSpPr>
-        <p:spPr>
-          <a:xfrm>
-            <a:off x="1097280" y="2633472"/>
-            <a:ext cx="54864" cy="762000"/>
-          </a:xfrm>
-          <a:prstGeom prst="roundRect">
-            <a:avLst>
-              <a:gd name="adj" fmla="val 20000"/>
-            </a:avLst>
-          </a:prstGeom>
-          <a:solidFill>
-            <a:srgbClr val="010B13"/>
-          </a:solidFill>
-          <a:ln>
-            <a:noFill/>
-          </a:ln>
-        </p:spPr>
-        <p:txBody>
-          <a:bodyPr lIns="91440" tIns="68580" rIns="91440" bIns="68580" anchor="t" wrap="square">
-            <a:normAutofit/>
-          </a:bodyPr>
-          <a:lstStyle/>
-          <a:p/>
-        </p:txBody>
-      </p:sp>
-      <p:sp>
-        <p:nvSpPr>
-          <p:cNvPr id="1011" name="card-blue" descr="card: [book icon]. Multiple Linear Regression Worksheet [Word document]"/>
-          <p:cNvSpPr/>
-          <p:nvPr/>
-        </p:nvSpPr>
-        <p:spPr>
-          <a:xfrm>
-            <a:off x="4459224" y="2633472"/>
-            <a:ext cx="3270504" cy="944880"/>
-          </a:xfrm>
-          <a:prstGeom prst="roundRect">
-            <a:avLst>
-              <a:gd name="adj" fmla="val 6000"/>
-            </a:avLst>
-          </a:prstGeom>
-          <a:solidFill>
-            <a:srgbClr val="FEFDFA"/>
-          </a:solidFill>
-          <a:ln w="19050">
-            <a:solidFill>
-              <a:srgbClr val="CCCCCC"/>
-            </a:solidFill>
-          </a:ln>
-        </p:spPr>
-        <p:txBody>
-          <a:bodyPr lIns="91440" tIns="68580" rIns="91440" bIns="68580" anchor="t" wrap="square">
-            <a:normAutofit/>
-          </a:bodyPr>
-          <a:lstStyle/>
-          <a:p>
-            <a:pPr algn="l"/>
-            <a:r>
-              <a:rPr lang="en-US" sz="1400" b="1" dirty="0">
-                <a:solidFill>
-                  <a:srgbClr val="005D84"/>
-                </a:solidFill>
-              </a:rPr>
-              <a:t>[book icon]</a:t>
-            </a:r>
-          </a:p>
-          <a:p>
-            <a:pPr algn="l"/>
-            <a:r>
-              <a:rPr lang="en-US" sz="1200" b="0" dirty="0">
-                <a:solidFill>
-                  <a:srgbClr val="010B13"/>
-                </a:solidFill>
-              </a:rPr>
-              <a:t>Multiple Linear Regression Worksheet</a:t>
-            </a:r>
-          </a:p>
-          <a:p>
-            <a:pPr algn="l"/>
-            <a:r>
-              <a:rPr lang="en-US" sz="1200" b="0" dirty="0">
-                <a:solidFill>
-                  <a:srgbClr val="010B13"/>
-                </a:solidFill>
-              </a:rPr>
-              <a:t>[Word document]</a:t>
-            </a:r>
-          </a:p>
-        </p:txBody>
-      </p:sp>
-      <p:sp>
-        <p:nvSpPr>
-          <p:cNvPr id="1012" name="card-rail" descr=""/>
-          <p:cNvSpPr/>
-          <p:nvPr/>
-        </p:nvSpPr>
-        <p:spPr>
-          <a:xfrm>
-            <a:off x="4459224" y="2633472"/>
-            <a:ext cx="54864" cy="944880"/>
-          </a:xfrm>
-          <a:prstGeom prst="roundRect">
-            <a:avLst>
-              <a:gd name="adj" fmla="val 20000"/>
-            </a:avLst>
-          </a:prstGeom>
-          <a:solidFill>
-            <a:srgbClr val="005D84"/>
-          </a:solidFill>
-          <a:ln>
-            <a:noFill/>
-          </a:ln>
-        </p:spPr>
-        <p:txBody>
-          <a:bodyPr lIns="91440" tIns="68580" rIns="91440" bIns="68580" anchor="t" wrap="square">
-            <a:normAutofit/>
-          </a:bodyPr>
-          <a:lstStyle/>
-          <a:p/>
-        </p:txBody>
-      </p:sp>
-      <p:sp>
-        <p:nvSpPr>
-          <p:cNvPr id="1013" name="card-blue" descr="card: [arrow icon]. Multiple Regression hw checker [Web page]"/>
-          <p:cNvSpPr/>
-          <p:nvPr/>
-        </p:nvSpPr>
-        <p:spPr>
-          <a:xfrm>
-            <a:off x="7821168" y="2633472"/>
-            <a:ext cx="3270504" cy="762000"/>
-          </a:xfrm>
-          <a:prstGeom prst="roundRect">
-            <a:avLst>
-              <a:gd name="adj" fmla="val 6000"/>
-            </a:avLst>
-          </a:prstGeom>
-          <a:solidFill>
-            <a:srgbClr val="FEFDFA"/>
-          </a:solidFill>
-          <a:ln w="19050">
-            <a:solidFill>
-              <a:srgbClr val="CCCCCC"/>
-            </a:solidFill>
-          </a:ln>
-        </p:spPr>
-        <p:txBody>
-          <a:bodyPr lIns="91440" tIns="68580" rIns="91440" bIns="68580" anchor="t" wrap="square">
-            <a:normAutofit/>
-          </a:bodyPr>
-          <a:lstStyle/>
-          <a:p>
-            <a:pPr algn="l"/>
-            <a:r>
-              <a:rPr lang="en-US" sz="1400" b="1" dirty="0">
-                <a:solidFill>
-                  <a:srgbClr val="005D84"/>
-                </a:solidFill>
-              </a:rPr>
-              <a:t>[arrow icon]</a:t>
-            </a:r>
-          </a:p>
-          <a:p>
-            <a:pPr algn="l"/>
-            <a:r>
-              <a:rPr lang="en-US" sz="1200" b="0" dirty="0">
-                <a:solidFill>
-                  <a:srgbClr val="010B13"/>
-                </a:solidFill>
-              </a:rPr>
-              <a:t>Multiple Regression hw checker</a:t>
-            </a:r>
-          </a:p>
-          <a:p>
-            <a:pPr algn="l"/>
-            <a:r>
-              <a:rPr lang="en-US" sz="1200" b="0" dirty="0">
-                <a:solidFill>
-                  <a:srgbClr val="010B13"/>
-                </a:solidFill>
-              </a:rPr>
-              <a:t>[Web page]</a:t>
-            </a:r>
-          </a:p>
-        </p:txBody>
-      </p:sp>
-      <p:sp>
-        <p:nvSpPr>
-          <p:cNvPr id="1014" name="card-rail" descr=""/>
-          <p:cNvSpPr/>
-          <p:nvPr/>
-        </p:nvSpPr>
-        <p:spPr>
-          <a:xfrm>
-            <a:off x="7821168" y="2633472"/>
-            <a:ext cx="54864" cy="762000"/>
-          </a:xfrm>
-          <a:prstGeom prst="roundRect">
-            <a:avLst>
-              <a:gd name="adj" fmla="val 20000"/>
-            </a:avLst>
-          </a:prstGeom>
-          <a:solidFill>
-            <a:srgbClr val="005D84"/>
-          </a:solidFill>
-          <a:ln>
-            <a:noFill/>
-          </a:ln>
-        </p:spPr>
-        <p:txBody>
-          <a:bodyPr lIns="91440" tIns="68580" rIns="91440" bIns="68580" anchor="t" wrap="square">
-            <a:normAutofit/>
-          </a:bodyPr>
-          <a:lstStyle/>
-          <a:p/>
+              <a:t>4 Regression adds adjustment</a:t>
+            </a:r>
+          </a:p>
+        </p:txBody>
+      </p:sp>
+      <p:sp>
+        <p:nvSpPr>
+          <p:cNvPr id="3" name="Content Placeholder 2"/>
+          <p:cNvSpPr>
+            <a:spLocks noGrp="1"/>
+          </p:cNvSpPr>
+          <p:nvPr>
+            <p:ph idx="1"/>
+          </p:nvPr>
+        </p:nvSpPr>
+        <p:spPr/>
+        <p:txBody>
+          <a:bodyPr/>
+          <a:lstStyle/>
+          <a:p>
+            <a:pPr lvl="0" indent="0" marL="0">
+              <a:buNone/>
+            </a:pPr>
+            <a:r>
+              <a:rPr b="1"/>
+              <a:t>Correlation:</a:t>
+            </a:r>
+            <a:r>
+              <a:rPr/>
+              <a:t> How are X and Y related?</a:t>
+            </a:r>
+          </a:p>
+          <a:p>
+            <a:pPr lvl="0" indent="0" marL="0">
+              <a:buNone/>
+            </a:pPr>
+            <a:r>
+              <a:rPr b="1"/>
+              <a:t>Regression:</a:t>
+            </a:r>
+            <a:r>
+              <a:rPr/>
+              <a:t> How is X related to Y while the other predictors are held constant?</a:t>
+            </a:r>
+          </a:p>
         </p:txBody>
       </p:sp>
     </p:spTree>
@@ -7378,19 +6407,11 @@
             <p:ph type="title"/>
           </p:nvPr>
         </p:nvSpPr>
-        <p:spPr bwMode="blackWhite">
+        <p:spPr>
           <a:xfrm>
-            <a:off x="1097280" y="2386744"/>
-            <a:ext cx="9997440" cy="1645920"/>
+            <a:off x="1097280" y="964692"/>
+            <a:ext cx="9997440" cy="1188720"/>
           </a:xfrm>
-          <a:solidFill>
-            <a:srgbClr val="FFFFFF"/>
-          </a:solidFill>
-          <a:ln w="38100">
-            <a:solidFill>
-              <a:srgbClr val="404040"/>
-            </a:solidFill>
-          </a:ln>
         </p:spPr>
         <p:txBody>
           <a:bodyPr/>
@@ -7401,7 +6422,62 @@
             </a:pPr>
             <a:r>
               <a:rPr/>
-              <a:t>From One Predictor to Many</a:t>
+              <a:t>5 Follow three analysis stages</a:t>
+            </a:r>
+          </a:p>
+        </p:txBody>
+      </p:sp>
+      <p:sp>
+        <p:nvSpPr>
+          <p:cNvPr id="3" name="Content Placeholder 2"/>
+          <p:cNvSpPr>
+            <a:spLocks noGrp="1"/>
+          </p:cNvSpPr>
+          <p:nvPr>
+            <p:ph idx="1"/>
+          </p:nvPr>
+        </p:nvSpPr>
+        <p:spPr/>
+        <p:txBody>
+          <a:bodyPr/>
+          <a:lstStyle/>
+          <a:p>
+            <a:pPr lvl="0" indent="-457200" marL="457200">
+              <a:buAutoNum type="arabicPeriod"/>
+            </a:pPr>
+            <a:r>
+              <a:rPr b="1"/>
+              <a:t>Univariate:</a:t>
+            </a:r>
+            <a:r>
+              <a:rPr/>
+              <a:t> classify and summarize each variable.</a:t>
+            </a:r>
+          </a:p>
+          <a:p>
+            <a:pPr lvl="0" indent="-457200" marL="457200">
+              <a:buAutoNum type="arabicPeriod"/>
+            </a:pPr>
+            <a:r>
+              <a:rPr b="1"/>
+              <a:t>Bivariate:</a:t>
+            </a:r>
+            <a:r>
+              <a:rPr/>
+              <a:t> correlate each predictor with the criterion.</a:t>
+            </a:r>
+          </a:p>
+          <a:p>
+            <a:pPr lvl="0" indent="-457200" marL="457200">
+              <a:buAutoNum type="arabicPeriod"/>
+            </a:pPr>
+            <a:r>
+              <a:rPr b="1"/>
+              <a:t>Multivariate:</a:t>
+            </a:r>
+            <a:r>
+              <a:rPr/>
+              <a:t> enter all predictors together.</a:t>
             </a:r>
           </a:p>
         </p:txBody>
@@ -7453,187 +6529,59 @@
             </a:pPr>
             <a:r>
               <a:rPr/>
-              <a:t>Review: One Predictor</a:t>
-            </a:r>
-          </a:p>
-        </p:txBody>
-      </p:sp>
-      <mc:AlternateContent xmlns:mc="http://schemas.openxmlformats.org/markup-compatibility/2006">
-        <mc:Choice xmlns:a14="http://schemas.microsoft.com/office/drawing/2010/main" Requires="a14">
-          <p:sp>
-            <p:nvSpPr>
-              <p:cNvPr id="3" name="Content Placeholder 2"/>
-              <p:cNvSpPr>
-                <a:spLocks noGrp="1"/>
-              </p:cNvSpPr>
-              <p:nvPr>
-                <p:ph idx="1"/>
-              </p:nvPr>
-            </p:nvSpPr>
-            <p:spPr/>
-            <p:txBody>
-              <a:bodyPr/>
-              <a:lstStyle/>
-              <a:p>
-                <a:pPr lvl="0"/>
-                <a:r>
-                  <a:rPr/>
-                  <a:t>Lab 07: Pearson’s </a:t>
-                </a:r>
-                <a:r>
-                  <a:rPr i="1"/>
-                  <a:t>r</a:t>
-                </a:r>
-                <a:r>
-                  <a:rPr/>
-                  <a:t> — how strongly are two </a:t>
-                </a:r>
-                <a:r>
-                  <a:rPr b="1"/>
-                  <a:t>quantitative</a:t>
-                </a:r>
-                <a:r>
-                  <a:rPr/>
-                  <a:t> variables related?</a:t>
-                </a:r>
-              </a:p>
-              <a:p>
-                <a:pPr lvl="0"/>
-                <a:r>
-                  <a:rPr/>
-                  <a:t>Regression with one predictor turns that into a </a:t>
-                </a:r>
-                <a:r>
-                  <a:rPr b="1"/>
-                  <a:t>prediction line</a:t>
-                </a:r>
-                <a:r>
-                  <a:rPr/>
-                  <a:t>:</a:t>
-                </a:r>
-              </a:p>
-              <a:p>
-                <a:pPr lvl="0" indent="0" marL="0">
-                  <a:buNone/>
-                </a:pPr>
-                <a14:m>
-                  <m:oMathPara xmlns:m="http://schemas.openxmlformats.org/officeDocument/2006/math">
-                    <m:oMathParaPr>
-                      <m:jc m:val="center"/>
-                    </m:oMathParaPr>
-                    <m:oMath>
-                      <m:acc>
-                        <m:accPr>
-                          <m:chr m:val="̂"/>
-                        </m:accPr>
-                        <m:e>
-                          <m:r>
-                            <m:t>Y</m:t>
-                          </m:r>
-                        </m:e>
-                      </m:acc>
-                      <m:r>
-                        <m:rPr>
-                          <m:sty m:val="p"/>
-                        </m:rPr>
-                        <m:t>=</m:t>
-                      </m:r>
-                      <m:sSub>
-                        <m:e>
-                          <m:r>
-                            <m:t>b</m:t>
-                          </m:r>
-                        </m:e>
-                        <m:sub>
-                          <m:r>
-                            <m:t>0</m:t>
-                          </m:r>
-                        </m:sub>
-                      </m:sSub>
-                      <m:r>
-                        <m:rPr>
-                          <m:sty m:val="p"/>
-                        </m:rPr>
-                        <m:t>+</m:t>
-                      </m:r>
-                      <m:sSub>
-                        <m:e>
-                          <m:r>
-                            <m:t>b</m:t>
-                          </m:r>
-                        </m:e>
-                        <m:sub>
-                          <m:r>
-                            <m:t>1</m:t>
-                          </m:r>
-                        </m:sub>
-                      </m:sSub>
-                      <m:sSub>
-                        <m:e>
-                          <m:r>
-                            <m:t>X</m:t>
-                          </m:r>
-                        </m:e>
-                        <m:sub>
-                          <m:r>
-                            <m:t>1</m:t>
-                          </m:r>
-                        </m:sub>
-                      </m:sSub>
-                    </m:oMath>
-                  </m:oMathPara>
-                </a14:m>
-              </a:p>
-              <a:p>
-                <a:pPr lvl="0"/>
-                <a:r>
-                  <a:rPr i="1"/>
-                  <a:t>b</a:t>
-                </a:r>
-                <a:r>
-                  <a:rPr baseline="-25000"/>
-                  <a:t>1</a:t>
-                </a:r>
-                <a:r>
-                  <a:rPr/>
-                  <a:t> = slope: how much </a:t>
-                </a:r>
-                <a:r>
-                  <a:rPr i="1"/>
-                  <a:t>Y</a:t>
-                </a:r>
-                <a:r>
-                  <a:rPr/>
-                  <a:t> changes per unit of </a:t>
-                </a:r>
-                <a:r>
-                  <a:rPr i="1"/>
-                  <a:t>X</a:t>
-                </a:r>
-              </a:p>
-              <a:p>
-                <a:pPr lvl="0"/>
-                <a:r>
-                  <a:rPr i="1"/>
-                  <a:t>r</a:t>
-                </a:r>
-                <a:r>
-                  <a:rPr/>
-                  <a:t>² = proportion of variance in </a:t>
-                </a:r>
-                <a:r>
-                  <a:rPr i="1"/>
-                  <a:t>Y</a:t>
-                </a:r>
-                <a:r>
-                  <a:rPr/>
-                  <a:t> the line explains</a:t>
-                </a:r>
-              </a:p>
-            </p:txBody>
-          </p:sp>
-        </mc:Choice>
-      </mc:AlternateContent>
+              <a:t>6 Select the walkthrough games</a:t>
+            </a:r>
+          </a:p>
+        </p:txBody>
+      </p:sp>
+      <p:sp>
+        <p:nvSpPr>
+          <p:cNvPr id="3" name="Content Placeholder 2"/>
+          <p:cNvSpPr>
+            <a:spLocks noGrp="1"/>
+          </p:cNvSpPr>
+          <p:nvPr>
+            <p:ph idx="1"/>
+          </p:nvPr>
+        </p:nvSpPr>
+        <p:spPr/>
+        <p:txBody>
+          <a:bodyPr/>
+          <a:lstStyle/>
+          <a:p>
+            <a:pPr lvl="0" indent="0">
+              <a:buNone/>
+            </a:pPr>
+            <a:r>
+              <a:rPr>
+                <a:latin typeface="Courier"/>
+              </a:rPr>
+              <a:t>USE ALL.
+COMPUTE filter_$ = (season &gt; 1997).
+FILTER BY filter_$.
+EXECUTE.
+FREQUENCIES VARIABLES=season.</a:t>
+            </a:r>
+          </a:p>
+          <a:p>
+            <a:pPr lvl="0" indent="0" marL="0">
+              <a:buNone/>
+            </a:pPr>
+            <a:r>
+              <a:rPr/>
+              <a:t>Confirm </a:t>
+            </a:r>
+            <a:r>
+              <a:rPr b="1"/>
+              <a:t>N = 340</a:t>
+            </a:r>
+            <a:r>
+              <a:rPr/>
+              <a:t> before continuing.</a:t>
+            </a:r>
+          </a:p>
+        </p:txBody>
+      </p:sp>
     </p:spTree>
   </p:cSld>
 </p:sld>
@@ -7681,200 +6629,40 @@
             </a:pPr>
             <a:r>
               <a:rPr/>
-              <a:t>Why More Than One Predictor?</a:t>
-            </a:r>
-          </a:p>
-        </p:txBody>
-      </p:sp>
-      <p:sp>
-        <p:nvSpPr>
-          <p:cNvPr id="1015" name="prose" descr=""/>
-          <p:cNvSpPr/>
-          <p:nvPr/>
-        </p:nvSpPr>
-        <p:spPr>
-          <a:xfrm>
-            <a:off x="1097280" y="2633472"/>
-            <a:ext cx="9994392" cy="182880"/>
-          </a:xfrm>
-          <a:prstGeom prst="roundRect">
-            <a:avLst>
-              <a:gd name="adj" fmla="val 6000"/>
-            </a:avLst>
-          </a:prstGeom>
-          <a:noFill/>
-          <a:ln>
-            <a:noFill/>
-          </a:ln>
-        </p:spPr>
-        <p:txBody>
-          <a:bodyPr lIns="91440" tIns="68580" rIns="91440" bIns="68580" anchor="t" wrap="square">
-            <a:normAutofit/>
-          </a:bodyPr>
-          <a:lstStyle/>
-          <a:p>
-            <a:pPr algn="l"/>
-            <a:r>
-              <a:rPr lang="en-US" sz="1200" b="0" dirty="0">
-                <a:solidFill>
-                  <a:srgbClr val="010B13"/>
-                </a:solidFill>
+              <a:t>7 Run univariate and bivariate checks</a:t>
+            </a:r>
+          </a:p>
+        </p:txBody>
+      </p:sp>
+      <p:sp>
+        <p:nvSpPr>
+          <p:cNvPr id="3" name="Content Placeholder 2"/>
+          <p:cNvSpPr>
+            <a:spLocks noGrp="1"/>
+          </p:cNvSpPr>
+          <p:nvPr>
+            <p:ph idx="1"/>
+          </p:nvPr>
+        </p:nvSpPr>
+        <p:spPr/>
+        <p:txBody>
+          <a:bodyPr/>
+          <a:lstStyle/>
+          <a:p>
+            <a:pPr lvl="0" indent="0">
+              <a:buNone/>
+            </a:pPr>
+            <a:r>
+              <a:rPr>
+                <a:latin typeface="Courier"/>
               </a:rPr>
-              <a:t>Two reasons:</a:t>
-            </a:r>
-          </a:p>
-        </p:txBody>
-      </p:sp>
-      <p:sp>
-        <p:nvSpPr>
-          <p:cNvPr id="1016" name="prose" descr=""/>
-          <p:cNvSpPr/>
-          <p:nvPr/>
-        </p:nvSpPr>
-        <p:spPr>
-          <a:xfrm>
-            <a:off x="1097280" y="2907792"/>
-            <a:ext cx="9994392" cy="365760"/>
-          </a:xfrm>
-          <a:prstGeom prst="roundRect">
-            <a:avLst>
-              <a:gd name="adj" fmla="val 6000"/>
-            </a:avLst>
-          </a:prstGeom>
-          <a:noFill/>
-          <a:ln>
-            <a:noFill/>
-          </a:ln>
-        </p:spPr>
-        <p:txBody>
-          <a:bodyPr lIns="91440" tIns="68580" rIns="91440" bIns="68580" anchor="t" wrap="square">
-            <a:normAutofit/>
-          </a:bodyPr>
-          <a:lstStyle/>
-          <a:p>
-            <a:pPr algn="l"/>
-            <a:r>
-              <a:rPr lang="en-US" sz="1200" b="0" dirty="0">
-                <a:solidFill>
-                  <a:srgbClr val="010B13"/>
-                </a:solidFill>
-              </a:rPr>
-              <a:t>Better predictions — rushing yards alone won’t predict a football score; rushing + passing + home field mightControl — estimate each predictor’s unique contribution, holding the others constant</a:t>
-            </a:r>
-          </a:p>
-        </p:txBody>
-      </p:sp>
-      <p:sp>
-        <p:nvSpPr>
-          <p:cNvPr id="1017" name="callout-tip" descr="tip callout: Tip. “Holding constant” is the superpower: it’s how we ask whether passing yards matter beyond what rushing yards already explain."/>
-          <p:cNvSpPr/>
-          <p:nvPr/>
-        </p:nvSpPr>
-        <p:spPr>
-          <a:xfrm>
-            <a:off x="1097280" y="3364992"/>
-            <a:ext cx="9994392" cy="1082040"/>
-          </a:xfrm>
-          <a:prstGeom prst="roundRect">
-            <a:avLst>
-              <a:gd name="adj" fmla="val 6000"/>
-            </a:avLst>
-          </a:prstGeom>
-          <a:solidFill>
-            <a:srgbClr val="FEFDFA"/>
-          </a:solidFill>
-          <a:ln w="19050">
-            <a:solidFill>
-              <a:srgbClr val="009955"/>
-            </a:solidFill>
-          </a:ln>
-        </p:spPr>
-        <p:txBody>
-          <a:bodyPr lIns="91440" tIns="68580" rIns="91440" bIns="68580" anchor="t" wrap="square">
-            <a:normAutofit/>
-          </a:bodyPr>
-          <a:lstStyle/>
-          <a:p/>
-        </p:txBody>
-      </p:sp>
-      <p:sp>
-        <p:nvSpPr>
-          <p:cNvPr id="1018" name="callout-title" descr=""/>
-          <p:cNvSpPr/>
-          <p:nvPr/>
-        </p:nvSpPr>
-        <p:spPr>
-          <a:xfrm>
-            <a:off x="1097280" y="3364992"/>
-            <a:ext cx="9994392" cy="320040"/>
-          </a:xfrm>
-          <a:prstGeom prst="roundRect">
-            <a:avLst>
-              <a:gd name="adj" fmla="val 6000"/>
-            </a:avLst>
-          </a:prstGeom>
-          <a:solidFill>
-            <a:srgbClr val="009955"/>
-          </a:solidFill>
-          <a:ln>
-            <a:noFill/>
-          </a:ln>
-        </p:spPr>
-        <p:txBody>
-          <a:bodyPr lIns="91440" tIns="68580" rIns="91440" bIns="68580" anchor="t" wrap="square">
-            <a:normAutofit/>
-          </a:bodyPr>
-          <a:lstStyle/>
-          <a:p>
-            <a:pPr algn="l"/>
-            <a:r>
-              <a:rPr lang="en-US" sz="1400" b="1" dirty="0">
-                <a:solidFill>
-                  <a:srgbClr val="FEFDFA"/>
-                </a:solidFill>
-              </a:rPr>
-              <a:t>Tip</a:t>
-            </a:r>
-          </a:p>
-        </p:txBody>
-      </p:sp>
-      <p:sp>
-        <p:nvSpPr>
-          <p:cNvPr id="1019" name="callout-body" descr=""/>
-          <p:cNvSpPr/>
-          <p:nvPr/>
-        </p:nvSpPr>
-        <p:spPr>
-          <a:xfrm>
-            <a:off x="1097280" y="3685032"/>
-            <a:ext cx="9994392" cy="762000"/>
-          </a:xfrm>
-          <a:prstGeom prst="roundRect">
-            <a:avLst>
-              <a:gd name="adj" fmla="val 6000"/>
-            </a:avLst>
-          </a:prstGeom>
-          <a:solidFill>
-            <a:srgbClr val="FEFDFA"/>
-          </a:solidFill>
-          <a:ln>
-            <a:noFill/>
-          </a:ln>
-        </p:spPr>
-        <p:txBody>
-          <a:bodyPr lIns="91440" tIns="68580" rIns="91440" bIns="68580" anchor="t" wrap="square">
-            <a:normAutofit/>
-          </a:bodyPr>
-          <a:lstStyle/>
-          <a:p>
-            <a:pPr algn="l"/>
-            <a:r>
-              <a:rPr lang="en-US" sz="1200" b="0" dirty="0">
-                <a:solidFill>
-                  <a:srgbClr val="010B13"/>
-                </a:solidFill>
-              </a:rPr>
-              <a:t>“Holding constant” is the superpower: it’s how we ask whether passing yards matter beyond what rushing yards already explain.</a:t>
+              <a:t>FREQUENCIES VARIABLES=ne_score ne_rush_yards
+  ne_pass_yards temp conference home
+  /STATISTICS=MEAN STDDEV.
+CORRELATIONS
+  /VARIABLES=ne_score ne_rush_yards
+    ne_pass_yards temp conference home
+  /PRINT=TWOTAIL /MISSING=LISTWISE.</a:t>
             </a:r>
           </a:p>
         </p:txBody>
@@ -7926,200 +6714,41 @@
             </a:pPr>
             <a:r>
               <a:rPr/>
-              <a:t>The Multiple Regression Model</a:t>
-            </a:r>
-          </a:p>
-        </p:txBody>
-      </p:sp>
-      <p:sp>
-        <p:nvSpPr>
-          <p:cNvPr id="1020" name="prose" descr=""/>
-          <p:cNvSpPr/>
-          <p:nvPr/>
-        </p:nvSpPr>
-        <p:spPr>
-          <a:xfrm>
-            <a:off x="1097280" y="2633472"/>
-            <a:ext cx="9994392" cy="182880"/>
-          </a:xfrm>
-          <a:prstGeom prst="roundRect">
-            <a:avLst>
-              <a:gd name="adj" fmla="val 6000"/>
-            </a:avLst>
-          </a:prstGeom>
-          <a:noFill/>
-          <a:ln>
-            <a:noFill/>
-          </a:ln>
-        </p:spPr>
-        <p:txBody>
-          <a:bodyPr lIns="91440" tIns="68580" rIns="91440" bIns="68580" anchor="t" wrap="square">
-            <a:normAutofit/>
-          </a:bodyPr>
-          <a:lstStyle/>
-          <a:p>
-            <a:pPr algn="l"/>
-            <a:r>
-              <a:rPr lang="en-US" sz="1200" b="0" dirty="0">
-                <a:solidFill>
-                  <a:srgbClr val="010B13"/>
-                </a:solidFill>
+              <a:t>8 Run the RH1 regression</a:t>
+            </a:r>
+          </a:p>
+        </p:txBody>
+      </p:sp>
+      <p:sp>
+        <p:nvSpPr>
+          <p:cNvPr id="3" name="Content Placeholder 2"/>
+          <p:cNvSpPr>
+            <a:spLocks noGrp="1"/>
+          </p:cNvSpPr>
+          <p:nvPr>
+            <p:ph idx="1"/>
+          </p:nvPr>
+        </p:nvSpPr>
+        <p:spPr/>
+        <p:txBody>
+          <a:bodyPr/>
+          <a:lstStyle/>
+          <a:p>
+            <a:pPr lvl="0" indent="0">
+              <a:buNone/>
+            </a:pPr>
+            <a:r>
+              <a:rPr>
+                <a:latin typeface="Courier"/>
               </a:rPr>
-              <a:t>\hat{Y} = b_0 + b_1 X_1 + b_2 X_2 + \dots + b_k X_k</a:t>
-            </a:r>
-          </a:p>
-        </p:txBody>
-      </p:sp>
-      <p:sp>
-        <p:nvSpPr>
-          <p:cNvPr id="1021" name="prose" descr=""/>
-          <p:cNvSpPr/>
-          <p:nvPr/>
-        </p:nvSpPr>
-        <p:spPr>
-          <a:xfrm>
-            <a:off x="1097280" y="2907792"/>
-            <a:ext cx="9994392" cy="548640"/>
-          </a:xfrm>
-          <a:prstGeom prst="roundRect">
-            <a:avLst>
-              <a:gd name="adj" fmla="val 6000"/>
-            </a:avLst>
-          </a:prstGeom>
-          <a:noFill/>
-          <a:ln>
-            <a:noFill/>
-          </a:ln>
-        </p:spPr>
-        <p:txBody>
-          <a:bodyPr lIns="91440" tIns="68580" rIns="91440" bIns="68580" anchor="t" wrap="square">
-            <a:normAutofit/>
-          </a:bodyPr>
-          <a:lstStyle/>
-          <a:p>
-            <a:pPr algn="l"/>
-            <a:r>
-              <a:rPr lang="en-US" sz="1200" b="0" dirty="0">
-                <a:solidFill>
-                  <a:srgbClr val="010B13"/>
-                </a:solidFill>
-              </a:rPr>
-              <a:t>Criterion (Y): the quantitative outcome you’re predictingPredictors (X’s): the variables doing the predictingb-weights: each predictor’s slope controlling for all the othersResidual: the gap between each real Y and its prediction</a:t>
-            </a:r>
-          </a:p>
-        </p:txBody>
-      </p:sp>
-      <p:sp>
-        <p:nvSpPr>
-          <p:cNvPr id="1022" name="callout-warning" descr="warning callout: Warning. Same game as ANOVA’s “it depends”: predictors share variance, so a predictor’s b is usually smaller than its simple correlation."/>
-          <p:cNvSpPr/>
-          <p:nvPr/>
-        </p:nvSpPr>
-        <p:spPr>
-          <a:xfrm>
-            <a:off x="1097280" y="3547872"/>
-            <a:ext cx="9994392" cy="1082040"/>
-          </a:xfrm>
-          <a:prstGeom prst="roundRect">
-            <a:avLst>
-              <a:gd name="adj" fmla="val 6000"/>
-            </a:avLst>
-          </a:prstGeom>
-          <a:solidFill>
-            <a:srgbClr val="FEFDFA"/>
-          </a:solidFill>
-          <a:ln w="19050">
-            <a:solidFill>
-              <a:srgbClr val="CC6600"/>
-            </a:solidFill>
-          </a:ln>
-        </p:spPr>
-        <p:txBody>
-          <a:bodyPr lIns="91440" tIns="68580" rIns="91440" bIns="68580" anchor="t" wrap="square">
-            <a:normAutofit/>
-          </a:bodyPr>
-          <a:lstStyle/>
-          <a:p/>
-        </p:txBody>
-      </p:sp>
-      <p:sp>
-        <p:nvSpPr>
-          <p:cNvPr id="1023" name="callout-title" descr=""/>
-          <p:cNvSpPr/>
-          <p:nvPr/>
-        </p:nvSpPr>
-        <p:spPr>
-          <a:xfrm>
-            <a:off x="1097280" y="3547872"/>
-            <a:ext cx="9994392" cy="320040"/>
-          </a:xfrm>
-          <a:prstGeom prst="roundRect">
-            <a:avLst>
-              <a:gd name="adj" fmla="val 6000"/>
-            </a:avLst>
-          </a:prstGeom>
-          <a:solidFill>
-            <a:srgbClr val="CC6600"/>
-          </a:solidFill>
-          <a:ln>
-            <a:noFill/>
-          </a:ln>
-        </p:spPr>
-        <p:txBody>
-          <a:bodyPr lIns="91440" tIns="68580" rIns="91440" bIns="68580" anchor="t" wrap="square">
-            <a:normAutofit/>
-          </a:bodyPr>
-          <a:lstStyle/>
-          <a:p>
-            <a:pPr algn="l"/>
-            <a:r>
-              <a:rPr lang="en-US" sz="1400" b="1" dirty="0">
-                <a:solidFill>
-                  <a:srgbClr val="FEFDFA"/>
-                </a:solidFill>
-              </a:rPr>
-              <a:t>Warning</a:t>
-            </a:r>
-          </a:p>
-        </p:txBody>
-      </p:sp>
-      <p:sp>
-        <p:nvSpPr>
-          <p:cNvPr id="1024" name="callout-body" descr=""/>
-          <p:cNvSpPr/>
-          <p:nvPr/>
-        </p:nvSpPr>
-        <p:spPr>
-          <a:xfrm>
-            <a:off x="1097280" y="3867912"/>
-            <a:ext cx="9994392" cy="762000"/>
-          </a:xfrm>
-          <a:prstGeom prst="roundRect">
-            <a:avLst>
-              <a:gd name="adj" fmla="val 6000"/>
-            </a:avLst>
-          </a:prstGeom>
-          <a:solidFill>
-            <a:srgbClr val="FEFDFA"/>
-          </a:solidFill>
-          <a:ln>
-            <a:noFill/>
-          </a:ln>
-        </p:spPr>
-        <p:txBody>
-          <a:bodyPr lIns="91440" tIns="68580" rIns="91440" bIns="68580" anchor="t" wrap="square">
-            <a:normAutofit/>
-          </a:bodyPr>
-          <a:lstStyle/>
-          <a:p>
-            <a:pPr algn="l"/>
-            <a:r>
-              <a:rPr lang="en-US" sz="1200" b="0" dirty="0">
-                <a:solidFill>
-                  <a:srgbClr val="010B13"/>
-                </a:solidFill>
-              </a:rPr>
-              <a:t>Same game as ANOVA’s “it depends”: predictors share variance, so a predictor’s b is usually smaller than its simple correlation.</a:t>
+              <a:t>REGRESSION
+  /STATISTICS COEFF OUTS R ANOVA
+    DESCRIPTIVES CORR
+  /DEPENDENT ne_score
+  /METHOD=ENTER
+    ne_rush_yards
+    ne_pass_yards
+    temp conference home.</a:t>
             </a:r>
           </a:p>
         </p:txBody>
@@ -8146,7 +6775,7 @@
         <a:srgbClr val="E8E3CE"/>
       </a:lt2>
       <a:accent1>
-        <a:srgbClr val="F6A21D"/>
+        <a:srgbClr val="B65B00"/>
       </a:accent1>
       <a:accent2>
         <a:srgbClr val="5E5E5E"/>

--- a/labs/lab13/slides/slides.pptx
+++ b/labs/lab13/slides/slides.pptx
@@ -527,7 +527,7 @@
             </a:pPr>
             <a:r>
               <a:rPr/>
-              <a:t>Both worksheet analyses use the same Husker file and the same post-1997 selection.</a:t>
+              <a:t>Use the RH1 walkthrough in the Lab 13 worksheet. The guide demonstrates the procedure with other variables; use the Husker variables listed here. Keep the Data Editor, saved syntax, and Output Viewer open.</a:t>
             </a:r>
           </a:p>
         </p:txBody>
@@ -609,7 +609,7 @@
             </a:pPr>
             <a:r>
               <a:rPr/>
-              <a:t>The comparison describes what adjustment changed. It does not, by itself, identify a causal mechanism.</a:t>
+              <a:t>Express the predicted change or group difference in Nebraska score points. Name the predictor’s unit or both groups. Describe associations rather than causes, and distinguish the direction of an estimate from evidence that it differs from zero.</a:t>
             </a:r>
           </a:p>
         </p:txBody>
@@ -631,7 +631,7 @@
           <a:p>
             <a:fld id="{18BDFEC3-8487-43E8-A154-7C12CBC1FFF2}" type="slidenum">
               <a:rPr lang="en-US"/>
-              <a:t>12</a:t>
+              <a:t>13</a:t>
             </a:fld>
             <a:endParaRPr lang="en-US"/>
           </a:p>
@@ -691,7 +691,7 @@
             </a:pPr>
             <a:r>
               <a:rPr/>
-              <a:t>Check model N and predictor correlations before interpreting unusual coefficient changes. Win and home are binary predictors, so verify their 0/1 labels.</a:t>
+              <a:t>Use the worksheet’s a–d categories. It labels category d a suppressor effect. Compare significance and signs before choosing a category; a sign change alone does not put two nonsignificant results in d. The classification describes the statistical pattern, not a causal mechanism.</a:t>
             </a:r>
           </a:p>
         </p:txBody>
@@ -713,7 +713,7 @@
           <a:p>
             <a:fld id="{18BDFEC3-8487-43E8-A154-7C12CBC1FFF2}" type="slidenum">
               <a:rPr lang="en-US"/>
-              <a:t>13</a:t>
+              <a:t>14</a:t>
             </a:fld>
             <a:endParaRPr lang="en-US"/>
           </a:p>
@@ -773,103 +773,7 @@
             </a:pPr>
             <a:r>
               <a:rPr/>
-              <a:t>This output is generated with create_apa_regression_table(), following the final reporting section of the SPSS regression handout.</a:t>
-            </a:r>
-          </a:p>
-          <a:p>
-            <a:pPr lvl="0" indent="0" marL="0">
-              <a:buNone/>
-            </a:pPr>
-          </a:p>
-          <a:p>
-            <a:pPr lvl="0" indent="0" marL="0">
-              <a:buNone/>
-            </a:pPr>
-            <a:r>
-              <a:rPr/>
-              <a:t>For rushing yards, passing yards, temperature, conference game, and home game, the standardized coefficients are β = .73, .49, .00, −.11, and .07, respectively.</a:t>
-            </a:r>
-          </a:p>
-        </p:txBody>
-      </p:sp>
-      <p:sp>
-        <p:nvSpPr>
-          <p:cNvPr id="4" name="Slide Number Placeholder 3"/>
-          <p:cNvSpPr>
-            <a:spLocks noGrp="1"/>
-          </p:cNvSpPr>
-          <p:nvPr>
-            <p:ph type="sldNum" sz="quarter" idx="10"/>
-          </p:nvPr>
-        </p:nvSpPr>
-        <p:spPr/>
-        <p:txBody>
-          <a:bodyPr/>
-          <a:lstStyle/>
-          <a:p>
-            <a:fld id="{18BDFEC3-8487-43E8-A154-7C12CBC1FFF2}" type="slidenum">
-              <a:rPr lang="en-US"/>
-              <a:t>14</a:t>
-            </a:fld>
-            <a:endParaRPr lang="en-US"/>
-          </a:p>
-        </p:txBody>
-      </p:sp>
-    </p:spTree>
-  </p:cSld>
-</p:notes>
-</file>
-
-<file path=ppt/notesSlides/notesSlide13.xml><?xml version="1.0" encoding="utf-8"?>
-<p:notes xmlns:a="http://schemas.openxmlformats.org/drawingml/2006/main" xmlns:r="http://schemas.openxmlformats.org/officeDocument/2006/relationships" xmlns:p="http://schemas.openxmlformats.org/presentationml/2006/main">
-  <p:cSld>
-    <p:spTree>
-      <p:nvGrpSpPr>
-        <p:cNvPr id="1" name=""/>
-        <p:cNvGrpSpPr/>
-        <p:nvPr/>
-      </p:nvGrpSpPr>
-      <p:grpSpPr>
-        <a:xfrm>
-          <a:off x="0" y="0"/>
-          <a:ext cx="0" cy="0"/>
-          <a:chOff x="0" y="0"/>
-          <a:chExt cx="0" cy="0"/>
-        </a:xfrm>
-      </p:grpSpPr>
-      <p:sp>
-        <p:nvSpPr>
-          <p:cNvPr id="2" name="Slide Image Placeholder 1"/>
-          <p:cNvSpPr>
-            <a:spLocks noGrp="1" noRot="1" noChangeAspect="1"/>
-          </p:cNvSpPr>
-          <p:nvPr>
-            <p:ph type="sldImg"/>
-          </p:nvPr>
-        </p:nvSpPr>
-        <p:spPr/>
-      </p:sp>
-      <p:sp>
-        <p:nvSpPr>
-          <p:cNvPr id="3" name="Notes Placeholder 2"/>
-          <p:cNvSpPr>
-            <a:spLocks noGrp="1"/>
-          </p:cNvSpPr>
-          <p:nvPr>
-            <p:ph type="body" idx="1"/>
-          </p:nvPr>
-        </p:nvSpPr>
-        <p:spPr/>
-        <p:txBody>
-          <a:bodyPr/>
-          <a:lstStyle/>
-          <a:p>
-            <a:pPr lvl="0" indent="0" marL="0">
-              <a:buNone/>
-            </a:pPr>
-            <a:r>
-              <a:rPr/>
-              <a:t>Keep conclusions associative. For binary predictors, name the group coded 1 and the reference group coded 0 rather than describing a one-unit quantitative increase.</a:t>
+              <a:t>Use the worksheet’s response spaces and review any checker feedback. Save the syntax and output. The walkthrough does not require an additional APA regression table or standardized beta values.</a:t>
             </a:r>
           </a:p>
         </p:txBody>
@@ -951,7 +855,7 @@
             </a:pPr>
             <a:r>
               <a:rPr/>
-              <a:t>Keep the dataset and saved syntax open together. Inspect variables and cases in the Data Editor; reproduce every command in the Syntax Editor.</a:t>
+              <a:t>Classify each predictor as quantitative or binary in the worksheet. Check units and value labels: temperature is Fahrenheit, conference is 0 = non-conference and 1 = conference, and home is 0 = no and 1 = yes.</a:t>
             </a:r>
           </a:p>
         </p:txBody>
@@ -973,7 +877,7 @@
           <a:p>
             <a:fld id="{18BDFEC3-8487-43E8-A154-7C12CBC1FFF2}" type="slidenum">
               <a:rPr lang="en-US"/>
-              <a:t>3</a:t>
+              <a:t>4</a:t>
             </a:fld>
             <a:endParaRPr lang="en-US"/>
           </a:p>
@@ -1033,7 +937,7 @@
             </a:pPr>
             <a:r>
               <a:rPr/>
-              <a:t>The Output Viewer accumulates tables, charts, warnings, and processing notes. Keep it open beside the data and syntax windows, and export only the results needed for the worksheet or report.</a:t>
+              <a:t>The correlation describes a predictor’s relationship with Nebraska score on its own. The regression coefficient describes that relationship while holding the other predictors constant. Keep the same selected cases across these stages.</a:t>
             </a:r>
           </a:p>
         </p:txBody>
@@ -1055,7 +959,7 @@
           <a:p>
             <a:fld id="{18BDFEC3-8487-43E8-A154-7C12CBC1FFF2}" type="slidenum">
               <a:rPr lang="en-US"/>
-              <a:t>4</a:t>
+              <a:t>5</a:t>
             </a:fld>
             <a:endParaRPr lang="en-US"/>
           </a:p>
@@ -1115,7 +1019,7 @@
             </a:pPr>
             <a:r>
               <a:rPr/>
-              <a:t>The worksheet’s central task is comparing each bivariate correlation with its adjusted regression coefficient.</a:t>
+              <a:t>The cutoff defines the worksheet’s historical sample and stays the same across course semesters. Keep the filter active for the walkthrough. If the case count differs, check the dataset and selection before continuing.</a:t>
             </a:r>
           </a:p>
         </p:txBody>
@@ -1137,7 +1041,7 @@
           <a:p>
             <a:fld id="{18BDFEC3-8487-43E8-A154-7C12CBC1FFF2}" type="slidenum">
               <a:rPr lang="en-US"/>
-              <a:t>5</a:t>
+              <a:t>6</a:t>
             </a:fld>
             <a:endParaRPr lang="en-US"/>
           </a:p>
@@ -1197,7 +1101,7 @@
             </a:pPr>
             <a:r>
               <a:rPr/>
-              <a:t>Quantitative coefficients describe a one-unit change. A binary 0/1 coefficient is an adjusted difference between group 1 and group 0.</a:t>
+              <a:t>Use the frequencies to check variable types and coding. Record each predictor’s correlation and p-value with Nebraska score. LISTWISE keeps the correlation sample aligned with the model variables. All 340 selected games have complete RH1 data.</a:t>
             </a:r>
           </a:p>
         </p:txBody>
@@ -1219,7 +1123,7 @@
           <a:p>
             <a:fld id="{18BDFEC3-8487-43E8-A154-7C12CBC1FFF2}" type="slidenum">
               <a:rPr lang="en-US"/>
-              <a:t>6</a:t>
+              <a:t>7</a:t>
             </a:fld>
             <a:endParaRPr lang="en-US"/>
           </a:p>
@@ -1279,7 +1183,7 @@
             </a:pPr>
             <a:r>
               <a:rPr/>
-              <a:t>Keep this filter active for both models. No game from 1997 or earlier should appear in the active sample.</a:t>
+              <a:t>Enter the five planned predictors together. Nebraska score is the criterion. Keep the worksheet’s model and predictor tables beside the output.</a:t>
             </a:r>
           </a:p>
         </p:txBody>
@@ -1301,7 +1205,7 @@
           <a:p>
             <a:fld id="{18BDFEC3-8487-43E8-A154-7C12CBC1FFF2}" type="slidenum">
               <a:rPr lang="en-US"/>
-              <a:t>7</a:t>
+              <a:t>8</a:t>
             </a:fld>
             <a:endParaRPr lang="en-US"/>
           </a:p>
@@ -1361,7 +1265,7 @@
             </a:pPr>
             <a:r>
               <a:rPr/>
-              <a:t>Classify each predictor as quantitative or binary, then record its r and p with Nebraska total score in the worksheet table.</a:t>
+              <a:t>The omnibus test assesses whether the predictors jointly explain variation in Nebraska score. R squared describes the proportion of variation explained in this sample. Neither result establishes causation or performance on new games.</a:t>
             </a:r>
           </a:p>
         </p:txBody>
@@ -1383,7 +1287,7 @@
           <a:p>
             <a:fld id="{18BDFEC3-8487-43E8-A154-7C12CBC1FFF2}" type="slidenum">
               <a:rPr lang="en-US"/>
-              <a:t>8</a:t>
+              <a:t>9</a:t>
             </a:fld>
             <a:endParaRPr lang="en-US"/>
           </a:p>
@@ -1443,7 +1347,7 @@
             </a:pPr>
             <a:r>
               <a:rPr/>
-              <a:t>Answer whether the full model works from the omnibus F test, and how well it works from R squared. Interpret coefficients only after the model-level result.</a:t>
+              <a:t>Use unstandardized B for the worksheet. The image’s standardized Beta column is blank; beta is not requested in this worksheet. Read the predictor rows rather than the constant. The image retains the original SPSS-style values and colors.</a:t>
             </a:r>
           </a:p>
         </p:txBody>
@@ -1465,7 +1369,7 @@
           <a:p>
             <a:fld id="{18BDFEC3-8487-43E8-A154-7C12CBC1FFF2}" type="slidenum">
               <a:rPr lang="en-US"/>
-              <a:t>9</a:t>
+              <a:t>11</a:t>
             </a:fld>
             <a:endParaRPr lang="en-US"/>
           </a:p>
@@ -1525,7 +1429,7 @@
             </a:pPr>
             <a:r>
               <a:rPr/>
-              <a:t>Read the model-level ANOVA and R squared first, then use this coefficients table to interpret the planned predictors in their original units.</a:t>
+              <a:t>These are bivariate relationships with Nebraska score. For a 0/1 predictor, positive r means the group coded 1 has the higher mean score; negative r means it has the lower mean. Do not add an adjustment claim to a correlation interpretation.</a:t>
             </a:r>
           </a:p>
         </p:txBody>
@@ -1547,7 +1451,7 @@
           <a:p>
             <a:fld id="{18BDFEC3-8487-43E8-A154-7C12CBC1FFF2}" type="slidenum">
               <a:rPr lang="en-US"/>
-              <a:t>11</a:t>
+              <a:t>12</a:t>
             </a:fld>
             <a:endParaRPr lang="en-US"/>
           </a:p>
@@ -2816,8 +2720,8 @@
         </p:nvSpPr>
         <p:spPr>
           <a:xfrm>
-            <a:off x="1583436" y="2313433"/>
-            <a:ext cx="4270248" cy="704087"/>
+            <a:off x="1097280" y="2313433"/>
+            <a:ext cx="4907280" cy="548640"/>
           </a:xfrm>
         </p:spPr>
         <p:txBody>
@@ -2889,8 +2793,8 @@
         </p:nvSpPr>
         <p:spPr>
           <a:xfrm>
-            <a:off x="1583436" y="3143250"/>
-            <a:ext cx="4270248" cy="2596776"/>
+            <a:off x="1097280" y="2926080"/>
+            <a:ext cx="4907280" cy="3177540"/>
           </a:xfrm>
         </p:spPr>
         <p:txBody>
@@ -2946,8 +2850,8 @@
         </p:nvSpPr>
         <p:spPr>
           <a:xfrm>
-            <a:off x="6338316" y="3143250"/>
-            <a:ext cx="4253484" cy="2596776"/>
+            <a:off x="6187440" y="2926080"/>
+            <a:ext cx="4907280" cy="3177540"/>
           </a:xfrm>
         </p:spPr>
         <p:txBody>
@@ -3007,8 +2911,8 @@
         </p:nvSpPr>
         <p:spPr>
           <a:xfrm>
-            <a:off x="6338316" y="2313433"/>
-            <a:ext cx="4270248" cy="704087"/>
+            <a:off x="6187440" y="2313433"/>
+            <a:ext cx="4907280" cy="548640"/>
           </a:xfrm>
         </p:spPr>
         <p:txBody>
@@ -3143,7 +3047,12 @@
             <p:ph type="title"/>
           </p:nvPr>
         </p:nvSpPr>
-        <p:spPr/>
+        <p:spPr>
+          <a:xfrm>
+            <a:off x="1097280" y="964692"/>
+            <a:ext cx="9997440" cy="1188720"/>
+          </a:xfrm>
+        </p:spPr>
         <p:txBody>
           <a:bodyPr/>
           <a:lstStyle/>
@@ -4828,14 +4737,14 @@
             </a:pPr>
             <a:r>
               <a:rPr/>
-              <a:t>9 Read B, SE, t, and p by row</a:t>
+              <a:t>8 Read the coefficient rows</a:t>
             </a:r>
           </a:p>
         </p:txBody>
       </p:sp>
       <p:pic>
         <p:nvPicPr>
-          <p:cNvPr descr="SPSS-style regression coefficients output predicting Nebraska total score after 1997; the displayed standardized Beta column is blank, so students use the package-generated APA table later in the deck for beta values" id="0" name="Picture 1"/>
+          <p:cNvPr descr="Coefficients for Nebraska score in the 340-game walkthrough. B: rushing yards 0.096, passing yards 0.074, temperature 0.003, conference game -3.270, and home game 2.035. Corresponding p-values: below .001, below .001, .915, .005, and .040. The standardized Beta column is blank." id="0" name="Picture 1"/>
           <p:cNvPicPr>
             <a:picLocks noGrp="1" noChangeAspect="1"/>
           </p:cNvPicPr>
@@ -4910,7 +4819,7 @@
             </a:pPr>
             <a:r>
               <a:rPr/>
-              <a:t>9 Read B, SE, t, and p by row (continued)</a:t>
+              <a:t>8 Read the coefficient rows (continued)</a:t>
             </a:r>
           </a:p>
         </p:txBody>
@@ -4934,48 +4843,8 @@
               <a:buNone/>
             </a:pPr>
             <a:r>
-              <a:rPr/>
-              <a:t>The SPSS-style teaching image leaves standardized </a:t>
-            </a:r>
-            <a:r>
               <a:rPr b="1"/>
-              <a:t>Beta</a:t>
-            </a:r>
-            <a:r>
-              <a:rPr/>
-              <a:t> blank. Read </a:t>
-            </a:r>
-            <a:r>
-              <a:rPr i="1"/>
-              <a:t>B</a:t>
-            </a:r>
-            <a:r>
-              <a:rPr/>
-              <a:t>, </a:t>
-            </a:r>
-            <a:r>
-              <a:rPr i="1"/>
-              <a:t>SE</a:t>
-            </a:r>
-            <a:r>
-              <a:rPr/>
-              <a:t>, </a:t>
-            </a:r>
-            <a:r>
-              <a:rPr i="1"/>
-              <a:t>t</a:t>
-            </a:r>
-            <a:r>
-              <a:rPr/>
-              <a:t>, and </a:t>
-            </a:r>
-            <a:r>
-              <a:rPr i="1"/>
-              <a:t>p</a:t>
-            </a:r>
-            <a:r>
-              <a:rPr/>
-              <a:t> here; use the package-generated APA table later in the deck for β.</a:t>
+              <a:t>Record B and Sig. in the worksheet’s b and p fields</a:t>
             </a:r>
           </a:p>
         </p:txBody>
@@ -5027,7 +4896,192 @@
             </a:pPr>
             <a:r>
               <a:rPr/>
-              <a:t>10 Compare r with b</a:t>
+              <a:t>9 Interpret each correlation</a:t>
+            </a:r>
+          </a:p>
+        </p:txBody>
+      </p:sp>
+      <p:sp>
+        <p:nvSpPr>
+          <p:cNvPr id="3" name="Content Placeholder 2"/>
+          <p:cNvSpPr>
+            <a:spLocks noGrp="1"/>
+          </p:cNvSpPr>
+          <p:nvPr>
+            <p:ph idx="1"/>
+          </p:nvPr>
+        </p:nvSpPr>
+        <p:spPr/>
+        <p:txBody>
+          <a:bodyPr/>
+          <a:lstStyle/>
+          <a:p>
+            <a:pPr lvl="0"/>
+            <a:r>
+              <a:rPr/>
+              <a:t>For a quantitative predictor, describe direction and strength</a:t>
+            </a:r>
+          </a:p>
+          <a:p>
+            <a:pPr lvl="0"/>
+            <a:r>
+              <a:rPr/>
+              <a:t>For a binary predictor, name the two groups and their coding</a:t>
+            </a:r>
+          </a:p>
+          <a:p>
+            <a:pPr lvl="0"/>
+            <a:r>
+              <a:rPr/>
+              <a:t>Use the p-value to assess evidence for the relationship</a:t>
+            </a:r>
+          </a:p>
+        </p:txBody>
+      </p:sp>
+    </p:spTree>
+  </p:cSld>
+</p:sld>
+</file>
+
+<file path=ppt/slides/slide13.xml><?xml version="1.0" encoding="utf-8"?>
+<p:sld xmlns:a="http://schemas.openxmlformats.org/drawingml/2006/main" xmlns:r="http://schemas.openxmlformats.org/officeDocument/2006/relationships" xmlns:p="http://schemas.openxmlformats.org/presentationml/2006/main">
+  <p:cSld>
+    <p:spTree>
+      <p:nvGrpSpPr>
+        <p:cNvPr id="1" name=""/>
+        <p:cNvGrpSpPr/>
+        <p:nvPr/>
+      </p:nvGrpSpPr>
+      <p:grpSpPr>
+        <a:xfrm>
+          <a:off x="0" y="0"/>
+          <a:ext cx="0" cy="0"/>
+          <a:chOff x="0" y="0"/>
+          <a:chExt cx="0" cy="0"/>
+        </a:xfrm>
+      </p:grpSpPr>
+      <p:sp>
+        <p:nvSpPr>
+          <p:cNvPr id="2" name="Title 1"/>
+          <p:cNvSpPr>
+            <a:spLocks noGrp="1"/>
+          </p:cNvSpPr>
+          <p:nvPr>
+            <p:ph type="title"/>
+          </p:nvPr>
+        </p:nvSpPr>
+        <p:spPr>
+          <a:xfrm>
+            <a:off x="1097280" y="964692"/>
+            <a:ext cx="9997440" cy="1188720"/>
+          </a:xfrm>
+        </p:spPr>
+        <p:txBody>
+          <a:bodyPr/>
+          <a:lstStyle/>
+          <a:p>
+            <a:pPr lvl="0" indent="0" marL="0">
+              <a:buNone/>
+            </a:pPr>
+            <a:r>
+              <a:rPr/>
+              <a:t>10 Interpret each regression weight</a:t>
+            </a:r>
+          </a:p>
+        </p:txBody>
+      </p:sp>
+      <p:sp>
+        <p:nvSpPr>
+          <p:cNvPr id="3" name="Content Placeholder 2"/>
+          <p:cNvSpPr>
+            <a:spLocks noGrp="1"/>
+          </p:cNvSpPr>
+          <p:nvPr>
+            <p:ph idx="1"/>
+          </p:nvPr>
+        </p:nvSpPr>
+        <p:spPr/>
+        <p:txBody>
+          <a:bodyPr/>
+          <a:lstStyle/>
+          <a:p>
+            <a:pPr lvl="0"/>
+            <a:r>
+              <a:rPr/>
+              <a:t>For a quantitative predictor, describe a one-unit change</a:t>
+            </a:r>
+          </a:p>
+          <a:p>
+            <a:pPr lvl="0"/>
+            <a:r>
+              <a:rPr/>
+              <a:t>For a binary predictor, compare group 1 with group 0</a:t>
+            </a:r>
+          </a:p>
+          <a:p>
+            <a:pPr lvl="0"/>
+            <a:r>
+              <a:rPr/>
+              <a:t>Hold the other predictors constant</a:t>
+            </a:r>
+          </a:p>
+          <a:p>
+            <a:pPr lvl="0"/>
+            <a:r>
+              <a:rPr/>
+              <a:t>Use the coefficient’s p-value to assess the relationship</a:t>
+            </a:r>
+          </a:p>
+        </p:txBody>
+      </p:sp>
+    </p:spTree>
+  </p:cSld>
+</p:sld>
+</file>
+
+<file path=ppt/slides/slide14.xml><?xml version="1.0" encoding="utf-8"?>
+<p:sld xmlns:a="http://schemas.openxmlformats.org/drawingml/2006/main" xmlns:r="http://schemas.openxmlformats.org/officeDocument/2006/relationships" xmlns:p="http://schemas.openxmlformats.org/presentationml/2006/main">
+  <p:cSld>
+    <p:spTree>
+      <p:nvGrpSpPr>
+        <p:cNvPr id="1" name=""/>
+        <p:cNvGrpSpPr/>
+        <p:nvPr/>
+      </p:nvGrpSpPr>
+      <p:grpSpPr>
+        <a:xfrm>
+          <a:off x="0" y="0"/>
+          <a:ext cx="0" cy="0"/>
+          <a:chOff x="0" y="0"/>
+          <a:chExt cx="0" cy="0"/>
+        </a:xfrm>
+      </p:grpSpPr>
+      <p:sp>
+        <p:nvSpPr>
+          <p:cNvPr id="2" name="Title 1"/>
+          <p:cNvSpPr>
+            <a:spLocks noGrp="1"/>
+          </p:cNvSpPr>
+          <p:nvPr>
+            <p:ph type="title"/>
+          </p:nvPr>
+        </p:nvSpPr>
+        <p:spPr>
+          <a:xfrm>
+            <a:off x="1097280" y="964692"/>
+            <a:ext cx="9997440" cy="1188720"/>
+          </a:xfrm>
+        </p:spPr>
+        <p:txBody>
+          <a:bodyPr/>
+          <a:lstStyle/>
+          <a:p>
+            <a:pPr lvl="0" indent="0" marL="0">
+              <a:buNone/>
+            </a:pPr>
+            <a:r>
+              <a:rPr/>
+              <a:t>11 Compare r with b</a:t>
             </a:r>
           </a:p>
         </p:txBody>
@@ -5053,8 +5107,8 @@
                 <a:tableStyleId>{5C22544A-7EE6-4342-B048-85BDC9FD1C3A}</a:tableStyleId>
               </a:tblPr>
               <a:tblGrid>
-                <a:gridCol w="4991100"/>
-                <a:gridCol w="4991100"/>
+                <a:gridCol w="5003800"/>
+                <a:gridCol w="5003800"/>
               </a:tblGrid>
               <a:tr h="0">
                 <a:tc>
@@ -5116,7 +5170,7 @@
                       </a:pPr>
                       <a:r>
                         <a:rPr/>
-                        <a:t>Neither</a:t>
+                        <a:t>a</a:t>
                       </a:r>
                     </a:p>
                   </a:txBody>
@@ -5148,7 +5202,7 @@
                       </a:pPr>
                       <a:r>
                         <a:rPr/>
-                        <a:t>Stable relationship</a:t>
+                        <a:t>b</a:t>
                       </a:r>
                     </a:p>
                   </a:txBody>
@@ -5164,20 +5218,8 @@
                         <a:buNone/>
                       </a:pPr>
                       <a:r>
-                        <a:rPr i="1"/>
-                        <a:t>r</a:t>
-                      </a:r>
-                      <a:r>
                         <a:rPr/>
-                        <a:t> significant, </a:t>
-                      </a:r>
-                      <a:r>
-                        <a:rPr i="1"/>
-                        <a:t>b</a:t>
-                      </a:r>
-                      <a:r>
-                        <a:rPr/>
-                        <a:t> not</a:t>
+                        <a:t>r significant, b not significant</a:t>
                       </a:r>
                     </a:p>
                   </a:txBody>
@@ -5192,7 +5234,7 @@
                       </a:pPr>
                       <a:r>
                         <a:rPr/>
-                        <a:t>Shared prediction</a:t>
+                        <a:t>c</a:t>
                       </a:r>
                     </a:p>
                   </a:txBody>
@@ -5208,12 +5250,8 @@
                         <a:buNone/>
                       </a:pPr>
                       <a:r>
-                        <a:rPr i="1"/>
-                        <a:t>b</a:t>
-                      </a:r>
-                      <a:r>
                         <a:rPr/>
-                        <a:t> emerges or reverses</a:t>
+                        <a:t>b significant, r not significant; or both significant with opposite signs</a:t>
                       </a:r>
                     </a:p>
                   </a:txBody>
@@ -5228,7 +5266,7 @@
                       </a:pPr>
                       <a:r>
                         <a:rPr/>
-                        <a:t>Possible suppression</a:t>
+                        <a:t>d</a:t>
                       </a:r>
                     </a:p>
                   </a:txBody>
@@ -5238,203 +5276,6 @@
           </a:graphicData>
         </a:graphic>
       </p:graphicFrame>
-    </p:spTree>
-  </p:cSld>
-</p:sld>
-</file>
-
-<file path=ppt/slides/slide13.xml><?xml version="1.0" encoding="utf-8"?>
-<p:sld xmlns:a="http://schemas.openxmlformats.org/drawingml/2006/main" xmlns:r="http://schemas.openxmlformats.org/officeDocument/2006/relationships" xmlns:p="http://schemas.openxmlformats.org/presentationml/2006/main">
-  <p:cSld>
-    <p:spTree>
-      <p:nvGrpSpPr>
-        <p:cNvPr id="1" name=""/>
-        <p:cNvGrpSpPr/>
-        <p:nvPr/>
-      </p:nvGrpSpPr>
-      <p:grpSpPr>
-        <a:xfrm>
-          <a:off x="0" y="0"/>
-          <a:ext cx="0" cy="0"/>
-          <a:chOff x="0" y="0"/>
-          <a:chExt cx="0" cy="0"/>
-        </a:xfrm>
-      </p:grpSpPr>
-      <p:sp>
-        <p:nvSpPr>
-          <p:cNvPr id="2" name="Title 1"/>
-          <p:cNvSpPr>
-            <a:spLocks noGrp="1"/>
-          </p:cNvSpPr>
-          <p:nvPr>
-            <p:ph type="title"/>
-          </p:nvPr>
-        </p:nvSpPr>
-        <p:spPr>
-          <a:xfrm>
-            <a:off x="1097280" y="964692"/>
-            <a:ext cx="9997440" cy="1188720"/>
-          </a:xfrm>
-        </p:spPr>
-        <p:txBody>
-          <a:bodyPr/>
-          <a:lstStyle/>
-          <a:p>
-            <a:pPr lvl="0" indent="0" marL="0">
-              <a:buNone/>
-            </a:pPr>
-            <a:r>
-              <a:rPr/>
-              <a:t>11 Complete the second model</a:t>
-            </a:r>
-          </a:p>
-        </p:txBody>
-      </p:sp>
-      <p:sp>
-        <p:nvSpPr>
-          <p:cNvPr id="3" name="Content Placeholder 2"/>
-          <p:cNvSpPr>
-            <a:spLocks noGrp="1"/>
-          </p:cNvSpPr>
-          <p:nvPr>
-            <p:ph idx="1"/>
-          </p:nvPr>
-        </p:nvSpPr>
-        <p:spPr/>
-        <p:txBody>
-          <a:bodyPr/>
-          <a:lstStyle/>
-          <a:p>
-            <a:pPr lvl="0" indent="0" marL="0">
-              <a:buNone/>
-            </a:pPr>
-            <a:r>
-              <a:rPr/>
-              <a:t>Predict opponent total score from:</a:t>
-            </a:r>
-          </a:p>
-          <a:p>
-            <a:pPr lvl="0"/>
-            <a:r>
-              <a:rPr/>
-              <a:t>opponent rushing and passing yards</a:t>
-            </a:r>
-          </a:p>
-          <a:p>
-            <a:pPr lvl="0"/>
-            <a:r>
-              <a:rPr/>
-              <a:t>Nebraska penalty yards and temperature</a:t>
-            </a:r>
-          </a:p>
-          <a:p>
-            <a:pPr lvl="0"/>
-            <a:r>
-              <a:rPr/>
-              <a:t>Nebraska win and home game</a:t>
-            </a:r>
-          </a:p>
-          <a:p>
-            <a:pPr lvl="0" indent="0" marL="0">
-              <a:buNone/>
-            </a:pPr>
-            <a:r>
-              <a:rPr/>
-              <a:t>Repeat </a:t>
-            </a:r>
-            <a:r>
-              <a:rPr b="1"/>
-              <a:t>univariate → bivariate → multivariate</a:t>
-            </a:r>
-            <a:r>
-              <a:rPr/>
-              <a:t> with the same filter.</a:t>
-            </a:r>
-          </a:p>
-        </p:txBody>
-      </p:sp>
-    </p:spTree>
-  </p:cSld>
-</p:sld>
-</file>
-
-<file path=ppt/slides/slide14.xml><?xml version="1.0" encoding="utf-8"?>
-<p:sld xmlns:a="http://schemas.openxmlformats.org/drawingml/2006/main" xmlns:r="http://schemas.openxmlformats.org/officeDocument/2006/relationships" xmlns:p="http://schemas.openxmlformats.org/presentationml/2006/main">
-  <p:cSld>
-    <p:spTree>
-      <p:nvGrpSpPr>
-        <p:cNvPr id="1" name=""/>
-        <p:cNvGrpSpPr/>
-        <p:nvPr/>
-      </p:nvGrpSpPr>
-      <p:grpSpPr>
-        <a:xfrm>
-          <a:off x="0" y="0"/>
-          <a:ext cx="0" cy="0"/>
-          <a:chOff x="0" y="0"/>
-          <a:chExt cx="0" cy="0"/>
-        </a:xfrm>
-      </p:grpSpPr>
-      <p:sp>
-        <p:nvSpPr>
-          <p:cNvPr id="2" name="Title 1"/>
-          <p:cNvSpPr>
-            <a:spLocks noGrp="1"/>
-          </p:cNvSpPr>
-          <p:nvPr>
-            <p:ph type="title"/>
-          </p:nvPr>
-        </p:nvSpPr>
-        <p:spPr>
-          <a:xfrm>
-            <a:off x="1097280" y="964692"/>
-            <a:ext cx="9997440" cy="1188720"/>
-          </a:xfrm>
-        </p:spPr>
-        <p:txBody>
-          <a:bodyPr/>
-          <a:lstStyle/>
-          <a:p>
-            <a:pPr lvl="0" indent="0" marL="0">
-              <a:buNone/>
-            </a:pPr>
-            <a:r>
-              <a:rPr/>
-              <a:t>12 Make the APA regression table</a:t>
-            </a:r>
-          </a:p>
-        </p:txBody>
-      </p:sp>
-      <p:pic>
-        <p:nvPicPr>
-          <p:cNvPr descr="APA-style multiple regression table with unstandardized and standardized coefficients for rushing yards, passing yards, temperature, conference game, and home game predicting Nebraska total score" id="0" name="Picture 1"/>
-          <p:cNvPicPr>
-            <a:picLocks noGrp="1" noChangeAspect="1"/>
-          </p:cNvPicPr>
-          <p:nvPr/>
-        </p:nvPicPr>
-        <p:blipFill>
-          <a:blip r:embed="rId3"/>
-          <a:stretch>
-            <a:fillRect/>
-          </a:stretch>
-        </p:blipFill>
-        <p:spPr bwMode="auto">
-          <a:xfrm>
-            <a:off x="1828800" y="2628900"/>
-            <a:ext cx="8521700" cy="3098800"/>
-          </a:xfrm>
-          <a:prstGeom prst="rect">
-            <a:avLst/>
-          </a:prstGeom>
-          <a:noFill/>
-          <a:ln w="9525">
-            <a:noFill/>
-            <a:headEnd/>
-            <a:tailEnd/>
-          </a:ln>
-        </p:spPr>
-      </p:pic>
     </p:spTree>
   </p:cSld>
 </p:sld>
@@ -5482,7 +5323,7 @@
             </a:pPr>
             <a:r>
               <a:rPr/>
-              <a:t>13 Write model, then predictors</a:t>
+              <a:t>12 Finish the RH1 worksheet</a:t>
             </a:r>
           </a:p>
         </p:txBody>
@@ -5502,96 +5343,31 @@
           <a:bodyPr/>
           <a:lstStyle/>
           <a:p>
-            <a:pPr lvl="0" indent="-457200" marL="457200">
-              <a:buAutoNum type="arabicPeriod"/>
-            </a:pPr>
+            <a:pPr lvl="0"/>
             <a:r>
               <a:rPr/>
-              <a:t>State the sample, criterion, and predictor set.</a:t>
-            </a:r>
-          </a:p>
-          <a:p>
-            <a:pPr lvl="0" indent="-457200" marL="457200">
-              <a:buAutoNum type="arabicPeriod"/>
-            </a:pPr>
+              <a:t>Complete variable types, r, b, p-values, and categories</a:t>
+            </a:r>
+          </a:p>
+          <a:p>
+            <a:pPr lvl="0"/>
             <a:r>
               <a:rPr/>
-              <a:t>Report </a:t>
-            </a:r>
-            <a:r>
-              <a:rPr i="1"/>
-              <a:t>F</a:t>
-            </a:r>
+              <a:t>Answer whether the model works and how well</a:t>
+            </a:r>
+          </a:p>
+          <a:p>
+            <a:pPr lvl="0"/>
             <a:r>
               <a:rPr/>
-              <a:t>, both </a:t>
-            </a:r>
-            <a:r>
-              <a:rPr i="1"/>
-              <a:t>df</a:t>
-            </a:r>
+              <a:t>Interpret each correlation and regression weight</a:t>
+            </a:r>
+          </a:p>
+          <a:p>
+            <a:pPr lvl="0"/>
             <a:r>
               <a:rPr/>
-              <a:t>, </a:t>
-            </a:r>
-            <a:r>
-              <a:rPr i="1"/>
-              <a:t>p</a:t>
-            </a:r>
-            <a:r>
-              <a:rPr/>
-              <a:t>, and R².</a:t>
-            </a:r>
-          </a:p>
-          <a:p>
-            <a:pPr lvl="0" indent="-457200" marL="457200">
-              <a:buAutoNum type="arabicPeriod"/>
-            </a:pPr>
-            <a:r>
-              <a:rPr/>
-              <a:t>Interpret each planned </a:t>
-            </a:r>
-            <a:r>
-              <a:rPr i="1"/>
-              <a:t>b</a:t>
-            </a:r>
-            <a:r>
-              <a:rPr/>
-              <a:t> in its units.</a:t>
-            </a:r>
-          </a:p>
-          <a:p>
-            <a:pPr lvl="0" indent="-457200" marL="457200">
-              <a:buAutoNum type="arabicPeriod"/>
-            </a:pPr>
-            <a:r>
-              <a:rPr/>
-              <a:t>Compare each </a:t>
-            </a:r>
-            <a:r>
-              <a:rPr i="1"/>
-              <a:t>r</a:t>
-            </a:r>
-            <a:r>
-              <a:rPr/>
-              <a:t> with its adjusted </a:t>
-            </a:r>
-            <a:r>
-              <a:rPr i="1"/>
-              <a:t>b</a:t>
-            </a:r>
-            <a:r>
-              <a:rPr/>
-              <a:t>.</a:t>
-            </a:r>
-          </a:p>
-          <a:p>
-            <a:pPr lvl="0" indent="-457200" marL="457200">
-              <a:buAutoNum type="arabicPeriod"/>
-            </a:pPr>
-            <a:r>
-              <a:rPr/>
-              <a:t>Add the all-green checker screenshots.</a:t>
+              <a:t>Add the required checker screenshot</a:t>
             </a:r>
           </a:p>
         </p:txBody>
@@ -5643,14 +5419,14 @@
             </a:pPr>
             <a:r>
               <a:rPr/>
-              <a:t>1 Download the Lab 13 files</a:t>
-            </a:r>
-          </a:p>
-        </p:txBody>
-      </p:sp>
-      <p:sp>
-        <p:nvSpPr>
-          <p:cNvPr id="1001" name="card-steel" descr="card: Worksheet. Download worksheet"/>
+              <a:t>1 Open the Lab 13 files</a:t>
+            </a:r>
+          </a:p>
+        </p:txBody>
+      </p:sp>
+      <p:sp>
+        <p:nvSpPr>
+          <p:cNvPr id="1001" name="card-steel" descr="card: Walkthrough data. Husker data"/>
           <p:cNvSpPr/>
           <p:nvPr/>
         </p:nvSpPr>
@@ -5686,7 +5462,7 @@
                   <a:srgbClr val="010B13"/>
                 </a:solidFill>
               </a:rPr>
-              <a:t>Worksheet</a:t>
+              <a:t>Walkthrough data</a:t>
             </a:r>
           </a:p>
           <a:p>
@@ -5698,14 +5474,20 @@
                 </a:solidFill>
                 <a:hlinkClick r:id="rId3"/>
               </a:rPr>
-              <a:t>Download worksheet</a:t>
-            </a:r>
-          </a:p>
-        </p:txBody>
-      </p:sp>
-      <p:sp>
-        <p:nvSpPr>
-          <p:cNvPr id="1002" name="card-rail" descr=""/>
+              <a:t>Husker data</a:t>
+            </a:r>
+          </a:p>
+        </p:txBody>
+      </p:sp>
+      <p:sp>
+        <p:nvSpPr>
+          <p:cNvPr id="1002" name="card-rail" descr="">
+            <a:extLst>
+              <a:ext uri="{C183D7F6-B498-43B3-948B-1728B52AA6E4}">
+                <adec:decorative xmlns:adec="http://schemas.microsoft.com/office/drawing/2017/decorative" val="1"/>
+              </a:ext>
+            </a:extLst>
+          </p:cNvPr>
           <p:cNvSpPr/>
           <p:nvPr/>
         </p:nvSpPr>
@@ -5736,7 +5518,7 @@
       </p:sp>
       <p:sp>
         <p:nvSpPr>
-          <p:cNvPr id="1003" name="card-steel" descr="card: Dataset. Download Husker data"/>
+          <p:cNvPr id="1003" name="card-steel" descr="card: Simple SPSS guide. Multiple regression PDF"/>
           <p:cNvSpPr/>
           <p:nvPr/>
         </p:nvSpPr>
@@ -5772,7 +5554,7 @@
                   <a:srgbClr val="010B13"/>
                 </a:solidFill>
               </a:rPr>
-              <a:t>Dataset</a:t>
+              <a:t>Simple SPSS guide</a:t>
             </a:r>
           </a:p>
           <a:p>
@@ -5784,192 +5566,26 @@
                 </a:solidFill>
                 <a:hlinkClick r:id="rId4"/>
               </a:rPr>
-              <a:t>Download Husker data</a:t>
-            </a:r>
-          </a:p>
-        </p:txBody>
-      </p:sp>
-      <p:sp>
-        <p:nvSpPr>
-          <p:cNvPr id="1004" name="card-rail" descr=""/>
+              <a:t>Multiple regression PDF</a:t>
+            </a:r>
+          </a:p>
+        </p:txBody>
+      </p:sp>
+      <p:sp>
+        <p:nvSpPr>
+          <p:cNvPr id="1004" name="card-rail" descr="">
+            <a:extLst>
+              <a:ext uri="{C183D7F6-B498-43B3-948B-1728B52AA6E4}">
+                <adec:decorative xmlns:adec="http://schemas.microsoft.com/office/drawing/2017/decorative" val="1"/>
+              </a:ext>
+            </a:extLst>
+          </p:cNvPr>
           <p:cNvSpPr/>
           <p:nvPr/>
         </p:nvSpPr>
         <p:spPr>
           <a:xfrm>
             <a:off x="6167628" y="2633472"/>
-            <a:ext cx="54864" cy="1005840"/>
-          </a:xfrm>
-          <a:prstGeom prst="roundRect">
-            <a:avLst>
-              <a:gd name="adj" fmla="val 20000"/>
-            </a:avLst>
-          </a:prstGeom>
-          <a:solidFill>
-            <a:srgbClr val="010B13"/>
-          </a:solidFill>
-          <a:ln>
-            <a:noFill/>
-          </a:ln>
-        </p:spPr>
-        <p:txBody>
-          <a:bodyPr lIns="182880" tIns="182880" rIns="182880" bIns="182880" anchor="t" wrap="square">
-            <a:normAutofit/>
-          </a:bodyPr>
-          <a:lstStyle/>
-          <a:p/>
-        </p:txBody>
-      </p:sp>
-      <p:sp>
-        <p:nvSpPr>
-          <p:cNvPr id="1005" name="card-steel" descr="card: Regression guide. Open the SPSS handout"/>
-          <p:cNvSpPr/>
-          <p:nvPr/>
-        </p:nvSpPr>
-        <p:spPr>
-          <a:xfrm>
-            <a:off x="1097280" y="3785616"/>
-            <a:ext cx="4924044" cy="1005840"/>
-          </a:xfrm>
-          <a:prstGeom prst="roundRect">
-            <a:avLst>
-              <a:gd name="adj" fmla="val 6000"/>
-            </a:avLst>
-          </a:prstGeom>
-          <a:solidFill>
-            <a:srgbClr val="FEFDFA"/>
-          </a:solidFill>
-          <a:ln w="19050">
-            <a:solidFill>
-              <a:srgbClr val="CCCCCC"/>
-            </a:solidFill>
-          </a:ln>
-        </p:spPr>
-        <p:txBody>
-          <a:bodyPr lIns="182880" tIns="182880" rIns="182880" bIns="182880" anchor="t" wrap="square">
-            <a:normAutofit/>
-          </a:bodyPr>
-          <a:lstStyle/>
-          <a:p>
-            <a:pPr algn="l"/>
-            <a:r>
-              <a:rPr lang="en-US" sz="2200" b="1" dirty="0">
-                <a:solidFill>
-                  <a:srgbClr val="010B13"/>
-                </a:solidFill>
-              </a:rPr>
-              <a:t>Regression guide</a:t>
-            </a:r>
-          </a:p>
-          <a:p>
-            <a:pPr algn="l"/>
-            <a:r>
-              <a:rPr lang="en-US" sz="2000" b="0" dirty="0">
-                <a:solidFill>
-                  <a:srgbClr val="010B13"/>
-                </a:solidFill>
-                <a:hlinkClick r:id="rId5"/>
-              </a:rPr>
-              <a:t>Open the SPSS handout</a:t>
-            </a:r>
-          </a:p>
-        </p:txBody>
-      </p:sp>
-      <p:sp>
-        <p:nvSpPr>
-          <p:cNvPr id="1006" name="card-rail" descr=""/>
-          <p:cNvSpPr/>
-          <p:nvPr/>
-        </p:nvSpPr>
-        <p:spPr>
-          <a:xfrm>
-            <a:off x="1097280" y="3785616"/>
-            <a:ext cx="54864" cy="1005840"/>
-          </a:xfrm>
-          <a:prstGeom prst="roundRect">
-            <a:avLst>
-              <a:gd name="adj" fmla="val 20000"/>
-            </a:avLst>
-          </a:prstGeom>
-          <a:solidFill>
-            <a:srgbClr val="010B13"/>
-          </a:solidFill>
-          <a:ln>
-            <a:noFill/>
-          </a:ln>
-        </p:spPr>
-        <p:txBody>
-          <a:bodyPr lIns="182880" tIns="182880" rIns="182880" bIns="182880" anchor="t" wrap="square">
-            <a:normAutofit/>
-          </a:bodyPr>
-          <a:lstStyle/>
-          <a:p/>
-        </p:txBody>
-      </p:sp>
-      <p:sp>
-        <p:nvSpPr>
-          <p:cNvPr id="1007" name="card-steel" descr="card: Worked example. Open the full example"/>
-          <p:cNvSpPr/>
-          <p:nvPr/>
-        </p:nvSpPr>
-        <p:spPr>
-          <a:xfrm>
-            <a:off x="6167628" y="3785616"/>
-            <a:ext cx="4924044" cy="1005840"/>
-          </a:xfrm>
-          <a:prstGeom prst="roundRect">
-            <a:avLst>
-              <a:gd name="adj" fmla="val 6000"/>
-            </a:avLst>
-          </a:prstGeom>
-          <a:solidFill>
-            <a:srgbClr val="FEFDFA"/>
-          </a:solidFill>
-          <a:ln w="19050">
-            <a:solidFill>
-              <a:srgbClr val="CCCCCC"/>
-            </a:solidFill>
-          </a:ln>
-        </p:spPr>
-        <p:txBody>
-          <a:bodyPr lIns="182880" tIns="182880" rIns="182880" bIns="182880" anchor="t" wrap="square">
-            <a:normAutofit/>
-          </a:bodyPr>
-          <a:lstStyle/>
-          <a:p>
-            <a:pPr algn="l"/>
-            <a:r>
-              <a:rPr lang="en-US" sz="2200" b="1" dirty="0">
-                <a:solidFill>
-                  <a:srgbClr val="010B13"/>
-                </a:solidFill>
-              </a:rPr>
-              <a:t>Worked example</a:t>
-            </a:r>
-          </a:p>
-          <a:p>
-            <a:pPr algn="l"/>
-            <a:r>
-              <a:rPr lang="en-US" sz="2000" b="0" dirty="0">
-                <a:solidFill>
-                  <a:srgbClr val="010B13"/>
-                </a:solidFill>
-                <a:hlinkClick r:id="rId6"/>
-              </a:rPr>
-              <a:t>Open the full example</a:t>
-            </a:r>
-          </a:p>
-        </p:txBody>
-      </p:sp>
-      <p:sp>
-        <p:nvSpPr>
-          <p:cNvPr id="1008" name="card-rail" descr=""/>
-          <p:cNvSpPr/>
-          <p:nvPr/>
-        </p:nvSpPr>
-        <p:spPr>
-          <a:xfrm>
-            <a:off x="6167628" y="3785616"/>
             <a:ext cx="54864" cy="1005840"/>
           </a:xfrm>
           <a:prstGeom prst="roundRect">
@@ -6016,7 +5632,7 @@
       </p:grpSpPr>
       <p:sp>
         <p:nvSpPr>
-          <p:cNvPr id="10" name="Title 9"/>
+          <p:cNvPr id="2" name="Title 1"/>
           <p:cNvSpPr>
             <a:spLocks noGrp="1"/>
           </p:cNvSpPr>
@@ -6024,7 +5640,12 @@
             <p:ph type="title"/>
           </p:nvPr>
         </p:nvSpPr>
-        <p:spPr/>
+        <p:spPr>
+          <a:xfrm>
+            <a:off x="1097280" y="964692"/>
+            <a:ext cx="9997440" cy="1188720"/>
+          </a:xfrm>
+        </p:spPr>
         <p:txBody>
           <a:bodyPr/>
           <a:lstStyle/>
@@ -6034,19 +5655,19 @@
             </a:pPr>
             <a:r>
               <a:rPr/>
-              <a:t>2 Keep Data and Syntax Editors open</a:t>
-            </a:r>
-          </a:p>
-        </p:txBody>
-      </p:sp>
-      <p:sp>
-        <p:nvSpPr>
-          <p:cNvPr id="3" name="Text Placeholder 2"/>
-          <p:cNvSpPr>
-            <a:spLocks noGrp="1"/>
-          </p:cNvSpPr>
-          <p:nvPr>
-            <p:ph idx="1" type="body"/>
+              <a:t>2 Identify the criterion and predictors</a:t>
+            </a:r>
+          </a:p>
+        </p:txBody>
+      </p:sp>
+      <p:sp>
+        <p:nvSpPr>
+          <p:cNvPr id="3" name="Content Placeholder 2"/>
+          <p:cNvSpPr>
+            <a:spLocks noGrp="1"/>
+          </p:cNvSpPr>
+          <p:nvPr>
+            <p:ph idx="1"/>
           </p:nvPr>
         </p:nvSpPr>
         <p:spPr/>
@@ -6059,142 +5680,21 @@
             </a:pPr>
             <a:r>
               <a:rPr b="1"/>
-              <a:t>Data Editor</a:t>
-            </a:r>
-          </a:p>
-        </p:txBody>
-      </p:sp>
-      <p:pic>
-        <p:nvPicPr>
-          <p:cNvPr descr="Focused SPSS Data Editor image showing spreadsheet columns and the Data View and Variable View tabs" id="0" name="Picture 1"/>
-          <p:cNvPicPr>
-            <a:picLocks noGrp="1" noChangeAspect="1"/>
-          </p:cNvPicPr>
-          <p:nvPr/>
-        </p:nvPicPr>
-        <p:blipFill>
-          <a:blip r:embed="rId3"/>
-          <a:stretch>
-            <a:fillRect/>
-          </a:stretch>
-        </p:blipFill>
-        <p:spPr bwMode="auto">
-          <a:xfrm>
-            <a:off x="1574800" y="3416300"/>
-            <a:ext cx="4267200" cy="2032000"/>
-          </a:xfrm>
-          <a:prstGeom prst="rect">
-            <a:avLst/>
-          </a:prstGeom>
-          <a:noFill/>
-          <a:ln w="9525">
-            <a:noFill/>
-            <a:headEnd/>
-            <a:tailEnd/>
-          </a:ln>
-        </p:spPr>
-      </p:pic>
-      <p:sp>
-        <p:nvSpPr>
-          <p:cNvPr id="4" name="Content Placeholder 3"/>
-          <p:cNvSpPr>
-            <a:spLocks noGrp="1"/>
-          </p:cNvSpPr>
-          <p:nvPr>
-            <p:ph idx="2" sz="half"/>
-          </p:nvPr>
-        </p:nvSpPr>
-        <p:spPr/>
-        <p:txBody>
-          <a:bodyPr/>
-          <a:lstStyle/>
-          <a:p>
-            <a:pPr lvl="0" indent="0" marL="0">
-              <a:buNone/>
-            </a:pPr>
-            <a:r>
-              <a:rPr b="1"/>
-              <a:t>Inspect outcomes and predictors</a:t>
-            </a:r>
-          </a:p>
-        </p:txBody>
-      </p:sp>
-      <p:sp>
-        <p:nvSpPr>
-          <p:cNvPr id="11" name="Text Placeholder 4"/>
-          <p:cNvSpPr>
-            <a:spLocks noGrp="1"/>
-          </p:cNvSpPr>
-          <p:nvPr>
-            <p:ph idx="13" sz="quarter" type="body"/>
-          </p:nvPr>
-        </p:nvSpPr>
-        <p:spPr/>
-        <p:txBody>
-          <a:bodyPr/>
-          <a:lstStyle/>
-          <a:p>
-            <a:pPr lvl="0" indent="0" marL="0">
-              <a:buNone/>
-            </a:pPr>
-            <a:r>
-              <a:rPr b="1"/>
-              <a:t>Syntax Editor</a:t>
-            </a:r>
-          </a:p>
-        </p:txBody>
-      </p:sp>
-      <p:pic>
-        <p:nvPicPr>
-          <p:cNvPr descr="Focused SPSS Syntax Editor image showing the command area and an annotation pointing to the green Run button" id="0" name="Picture 1"/>
-          <p:cNvPicPr>
-            <a:picLocks noGrp="1" noChangeAspect="1"/>
-          </p:cNvPicPr>
-          <p:nvPr/>
-        </p:nvPicPr>
-        <p:blipFill>
-          <a:blip r:embed="rId4"/>
-          <a:stretch>
-            <a:fillRect/>
-          </a:stretch>
-        </p:blipFill>
-        <p:spPr bwMode="auto">
-          <a:xfrm>
-            <a:off x="6337300" y="3429000"/>
-            <a:ext cx="4241800" cy="2006600"/>
-          </a:xfrm>
-          <a:prstGeom prst="rect">
-            <a:avLst/>
-          </a:prstGeom>
-          <a:noFill/>
-          <a:ln w="9525">
-            <a:noFill/>
-            <a:headEnd/>
-            <a:tailEnd/>
-          </a:ln>
-        </p:spPr>
-      </p:pic>
-      <p:sp>
-        <p:nvSpPr>
-          <p:cNvPr id="6" name="Content Placeholder 5"/>
-          <p:cNvSpPr>
-            <a:spLocks noGrp="1"/>
-          </p:cNvSpPr>
-          <p:nvPr>
-            <p:ph idx="4" sz="quarter"/>
-          </p:nvPr>
-        </p:nvSpPr>
-        <p:spPr/>
-        <p:txBody>
-          <a:bodyPr/>
-          <a:lstStyle/>
-          <a:p>
-            <a:pPr lvl="0" indent="0" marL="0">
-              <a:buNone/>
-            </a:pPr>
-            <a:r>
-              <a:rPr b="1"/>
-              <a:t>Save and rerun commands</a:t>
+              <a:t>Criterion:</a:t>
+            </a:r>
+            <a:r>
+              <a:rPr/>
+              <a:t> Nebraska total score (</a:t>
+            </a:r>
+            <a:r>
+              <a:rPr>
+                <a:latin typeface="Courier"/>
+              </a:rPr>
+              <a:t>ne_score</a:t>
+            </a:r>
+            <a:r>
+              <a:rPr/>
+              <a:t>)</a:t>
             </a:r>
           </a:p>
         </p:txBody>
@@ -6246,41 +5746,243 @@
             </a:pPr>
             <a:r>
               <a:rPr/>
-              <a:t>3 Read results in Output Viewer</a:t>
-            </a:r>
-          </a:p>
-        </p:txBody>
-      </p:sp>
-      <p:pic>
-        <p:nvPicPr>
-          <p:cNvPr descr="SPSS-style regression coefficients output predicting Nebraska total score after 1997; the displayed standardized Beta column is blank, so students use the package-generated APA table later in the deck for beta values" id="0" name="Picture 1"/>
-          <p:cNvPicPr>
-            <a:picLocks noGrp="1" noChangeAspect="1"/>
-          </p:cNvPicPr>
-          <p:nvPr/>
-        </p:nvPicPr>
-        <p:blipFill>
-          <a:blip r:embed="rId3"/>
-          <a:stretch>
-            <a:fillRect/>
-          </a:stretch>
-        </p:blipFill>
-        <p:spPr bwMode="auto">
-          <a:xfrm>
-            <a:off x="1092200" y="2692400"/>
-            <a:ext cx="9994900" cy="2984500"/>
-          </a:xfrm>
-          <a:prstGeom prst="rect">
-            <a:avLst/>
-          </a:prstGeom>
-          <a:noFill/>
-          <a:ln w="9525">
-            <a:noFill/>
-            <a:headEnd/>
-            <a:tailEnd/>
-          </a:ln>
-        </p:spPr>
-      </p:pic>
+              <a:t>2 Identify the criterion and predictors (continued)</a:t>
+            </a:r>
+          </a:p>
+        </p:txBody>
+      </p:sp>
+      <p:graphicFrame>
+        <p:nvGraphicFramePr>
+          <p:cNvPr id="6" name="Content Placeholder 5"/>
+          <p:cNvGraphicFramePr>
+            <a:graphicFrameLocks noGrp="1"/>
+          </p:cNvGraphicFramePr>
+          <p:nvPr>
+            <p:ph idx="1"/>
+          </p:nvPr>
+        </p:nvGraphicFramePr>
+        <p:xfrm>
+          <a:off x="1092200" y="2628900"/>
+          <a:ext cx="9994900" cy="3098800"/>
+        </p:xfrm>
+        <a:graphic>
+          <a:graphicData uri="http://schemas.openxmlformats.org/drawingml/2006/table">
+            <a:tbl>
+              <a:tblPr firstRow="1" bandRow="1">
+                <a:tableStyleId>{5C22544A-7EE6-4342-B048-85BDC9FD1C3A}</a:tableStyleId>
+              </a:tblPr>
+              <a:tblGrid>
+                <a:gridCol w="4991100"/>
+                <a:gridCol w="4991100"/>
+              </a:tblGrid>
+              <a:tr h="0">
+                <a:tc>
+                  <a:txBody>
+                    <a:bodyPr/>
+                    <a:lstStyle/>
+                    <a:p>
+                      <a:pPr lvl="0" indent="0" marL="0">
+                        <a:buNone/>
+                      </a:pPr>
+                      <a:r>
+                        <a:rPr/>
+                        <a:t>Predictor</a:t>
+                      </a:r>
+                    </a:p>
+                  </a:txBody>
+                  <a:tcPr/>
+                </a:tc>
+                <a:tc>
+                  <a:txBody>
+                    <a:bodyPr/>
+                    <a:lstStyle/>
+                    <a:p>
+                      <a:pPr lvl="0" indent="0" marL="0">
+                        <a:buNone/>
+                      </a:pPr>
+                      <a:r>
+                        <a:rPr/>
+                        <a:t>Variable</a:t>
+                      </a:r>
+                    </a:p>
+                  </a:txBody>
+                  <a:tcPr/>
+                </a:tc>
+              </a:tr>
+              <a:tr h="0">
+                <a:tc>
+                  <a:txBody>
+                    <a:bodyPr/>
+                    <a:lstStyle/>
+                    <a:p>
+                      <a:pPr lvl="0" indent="0" marL="0">
+                        <a:buNone/>
+                      </a:pPr>
+                      <a:r>
+                        <a:rPr/>
+                        <a:t>Nebraska rushing yards</a:t>
+                      </a:r>
+                    </a:p>
+                  </a:txBody>
+                </a:tc>
+                <a:tc>
+                  <a:txBody>
+                    <a:bodyPr/>
+                    <a:lstStyle/>
+                    <a:p>
+                      <a:pPr lvl="0" indent="0" marL="0">
+                        <a:buNone/>
+                      </a:pPr>
+                      <a:r>
+                        <a:rPr>
+                          <a:latin typeface="Courier"/>
+                        </a:rPr>
+                        <a:t>ne_rush_yards</a:t>
+                      </a:r>
+                    </a:p>
+                  </a:txBody>
+                </a:tc>
+              </a:tr>
+              <a:tr h="0">
+                <a:tc>
+                  <a:txBody>
+                    <a:bodyPr/>
+                    <a:lstStyle/>
+                    <a:p>
+                      <a:pPr lvl="0" indent="0" marL="0">
+                        <a:buNone/>
+                      </a:pPr>
+                      <a:r>
+                        <a:rPr/>
+                        <a:t>Nebraska passing yards</a:t>
+                      </a:r>
+                    </a:p>
+                  </a:txBody>
+                </a:tc>
+                <a:tc>
+                  <a:txBody>
+                    <a:bodyPr/>
+                    <a:lstStyle/>
+                    <a:p>
+                      <a:pPr lvl="0" indent="0" marL="0">
+                        <a:buNone/>
+                      </a:pPr>
+                      <a:r>
+                        <a:rPr>
+                          <a:latin typeface="Courier"/>
+                        </a:rPr>
+                        <a:t>ne_pass_yards</a:t>
+                      </a:r>
+                    </a:p>
+                  </a:txBody>
+                </a:tc>
+              </a:tr>
+              <a:tr h="0">
+                <a:tc>
+                  <a:txBody>
+                    <a:bodyPr/>
+                    <a:lstStyle/>
+                    <a:p>
+                      <a:pPr lvl="0" indent="0" marL="0">
+                        <a:buNone/>
+                      </a:pPr>
+                      <a:r>
+                        <a:rPr/>
+                        <a:t>Temperature at kickoff</a:t>
+                      </a:r>
+                    </a:p>
+                  </a:txBody>
+                </a:tc>
+                <a:tc>
+                  <a:txBody>
+                    <a:bodyPr/>
+                    <a:lstStyle/>
+                    <a:p>
+                      <a:pPr lvl="0" indent="0" marL="0">
+                        <a:buNone/>
+                      </a:pPr>
+                      <a:r>
+                        <a:rPr>
+                          <a:latin typeface="Courier"/>
+                        </a:rPr>
+                        <a:t>temp</a:t>
+                      </a:r>
+                    </a:p>
+                  </a:txBody>
+                </a:tc>
+              </a:tr>
+              <a:tr h="0">
+                <a:tc>
+                  <a:txBody>
+                    <a:bodyPr/>
+                    <a:lstStyle/>
+                    <a:p>
+                      <a:pPr lvl="0" indent="0" marL="0">
+                        <a:buNone/>
+                      </a:pPr>
+                      <a:r>
+                        <a:rPr/>
+                        <a:t>Conference game</a:t>
+                      </a:r>
+                    </a:p>
+                  </a:txBody>
+                </a:tc>
+                <a:tc>
+                  <a:txBody>
+                    <a:bodyPr/>
+                    <a:lstStyle/>
+                    <a:p>
+                      <a:pPr lvl="0" indent="0" marL="0">
+                        <a:buNone/>
+                      </a:pPr>
+                      <a:r>
+                        <a:rPr>
+                          <a:latin typeface="Courier"/>
+                        </a:rPr>
+                        <a:t>conference</a:t>
+                      </a:r>
+                    </a:p>
+                  </a:txBody>
+                </a:tc>
+              </a:tr>
+              <a:tr h="0">
+                <a:tc>
+                  <a:txBody>
+                    <a:bodyPr/>
+                    <a:lstStyle/>
+                    <a:p>
+                      <a:pPr lvl="0" indent="0" marL="0">
+                        <a:buNone/>
+                      </a:pPr>
+                      <a:r>
+                        <a:rPr/>
+                        <a:t>Home game</a:t>
+                      </a:r>
+                    </a:p>
+                  </a:txBody>
+                </a:tc>
+                <a:tc>
+                  <a:txBody>
+                    <a:bodyPr/>
+                    <a:lstStyle/>
+                    <a:p>
+                      <a:pPr lvl="0" indent="0" marL="0">
+                        <a:buNone/>
+                      </a:pPr>
+                      <a:r>
+                        <a:rPr>
+                          <a:latin typeface="Courier"/>
+                        </a:rPr>
+                        <a:t>home</a:t>
+                      </a:r>
+                    </a:p>
+                  </a:txBody>
+                </a:tc>
+              </a:tr>
+            </a:tbl>
+          </a:graphicData>
+        </a:graphic>
+      </p:graphicFrame>
     </p:spTree>
   </p:cSld>
 </p:sld>
@@ -6328,7 +6030,7 @@
             </a:pPr>
             <a:r>
               <a:rPr/>
-              <a:t>4 Regression adds adjustment</a:t>
+              <a:t>3 Follow the worksheet stages</a:t>
             </a:r>
           </a:p>
         </p:txBody>
@@ -6348,29 +6050,42 @@
           <a:bodyPr/>
           <a:lstStyle/>
           <a:p>
-            <a:pPr lvl="0" indent="0" marL="0">
-              <a:buNone/>
+            <a:pPr lvl="0" indent="-457200" marL="457200">
+              <a:buAutoNum type="arabicPeriod"/>
             </a:pPr>
             <a:r>
               <a:rPr b="1"/>
-              <a:t>Correlation:</a:t>
+              <a:t>Univariate:</a:t>
             </a:r>
             <a:r>
               <a:rPr/>
-              <a:t> How are X and Y related?</a:t>
-            </a:r>
-          </a:p>
-          <a:p>
-            <a:pPr lvl="0" indent="0" marL="0">
-              <a:buNone/>
+              <a:t> inspect and classify each variable</a:t>
+            </a:r>
+          </a:p>
+          <a:p>
+            <a:pPr lvl="0" indent="-457200" marL="457200">
+              <a:buAutoNum type="arabicPeriod"/>
             </a:pPr>
             <a:r>
               <a:rPr b="1"/>
-              <a:t>Regression:</a:t>
+              <a:t>Bivariate:</a:t>
             </a:r>
             <a:r>
               <a:rPr/>
-              <a:t> How is X related to Y while the other predictors are held constant?</a:t>
+              <a:t> correlate each predictor with the criterion</a:t>
+            </a:r>
+          </a:p>
+          <a:p>
+            <a:pPr lvl="0" indent="-457200" marL="457200">
+              <a:buAutoNum type="arabicPeriod"/>
+            </a:pPr>
+            <a:r>
+              <a:rPr b="1"/>
+              <a:t>Multivariate:</a:t>
+            </a:r>
+            <a:r>
+              <a:rPr/>
+              <a:t> enter all predictors together</a:t>
             </a:r>
           </a:p>
         </p:txBody>
@@ -6422,7 +6137,7 @@
             </a:pPr>
             <a:r>
               <a:rPr/>
-              <a:t>5 Follow three analysis stages</a:t>
+              <a:t>4 Select the walkthrough games</a:t>
             </a:r>
           </a:p>
         </p:txBody>
@@ -6442,42 +6157,27 @@
           <a:bodyPr/>
           <a:lstStyle/>
           <a:p>
-            <a:pPr lvl="0" indent="-457200" marL="457200">
-              <a:buAutoNum type="arabicPeriod"/>
+            <a:pPr lvl="0" indent="0">
+              <a:buNone/>
             </a:pPr>
             <a:r>
+              <a:rPr>
+                <a:latin typeface="Courier"/>
+              </a:rPr>
+              <a:t>USE ALL.
+COMPUTE filter_$ = (season &gt; 1997).
+FILTER BY filter_$.
+EXECUTE.
+FREQUENCIES VARIABLES=season.</a:t>
+            </a:r>
+          </a:p>
+          <a:p>
+            <a:pPr lvl="0" indent="0" marL="0">
+              <a:buNone/>
+            </a:pPr>
+            <a:r>
               <a:rPr b="1"/>
-              <a:t>Univariate:</a:t>
-            </a:r>
-            <a:r>
-              <a:rPr/>
-              <a:t> classify and summarize each variable.</a:t>
-            </a:r>
-          </a:p>
-          <a:p>
-            <a:pPr lvl="0" indent="-457200" marL="457200">
-              <a:buAutoNum type="arabicPeriod"/>
-            </a:pPr>
-            <a:r>
-              <a:rPr b="1"/>
-              <a:t>Bivariate:</a:t>
-            </a:r>
-            <a:r>
-              <a:rPr/>
-              <a:t> correlate each predictor with the criterion.</a:t>
-            </a:r>
-          </a:p>
-          <a:p>
-            <a:pPr lvl="0" indent="-457200" marL="457200">
-              <a:buAutoNum type="arabicPeriod"/>
-            </a:pPr>
-            <a:r>
-              <a:rPr b="1"/>
-              <a:t>Multivariate:</a:t>
-            </a:r>
-            <a:r>
-              <a:rPr/>
-              <a:t> enter all predictors together.</a:t>
+              <a:t>Confirm N = 340</a:t>
             </a:r>
           </a:p>
         </p:txBody>
@@ -6529,7 +6229,7 @@
             </a:pPr>
             <a:r>
               <a:rPr/>
-              <a:t>6 Select the walkthrough games</a:t>
+              <a:t>5 Run univariate and bivariate analyses</a:t>
             </a:r>
           </a:p>
         </p:txBody>
@@ -6556,28 +6256,12 @@
               <a:rPr>
                 <a:latin typeface="Courier"/>
               </a:rPr>
-              <a:t>USE ALL.
-COMPUTE filter_$ = (season &gt; 1997).
-FILTER BY filter_$.
-EXECUTE.
-FREQUENCIES VARIABLES=season.</a:t>
-            </a:r>
-          </a:p>
-          <a:p>
-            <a:pPr lvl="0" indent="0" marL="0">
-              <a:buNone/>
-            </a:pPr>
-            <a:r>
-              <a:rPr/>
-              <a:t>Confirm </a:t>
-            </a:r>
-            <a:r>
-              <a:rPr b="1"/>
-              <a:t>N = 340</a:t>
-            </a:r>
-            <a:r>
-              <a:rPr/>
-              <a:t> before continuing.</a:t>
+              <a:t>FREQUENCIES VARIABLES=ne_score ne_rush_yards
+  ne_pass_yards temp conference home.
+CORRELATIONS
+  /VARIABLES=ne_score ne_rush_yards
+    ne_pass_yards temp conference home
+  /PRINT=TWOTAIL /MISSING=LISTWISE.</a:t>
             </a:r>
           </a:p>
         </p:txBody>
@@ -6629,7 +6313,7 @@
             </a:pPr>
             <a:r>
               <a:rPr/>
-              <a:t>7 Run univariate and bivariate checks</a:t>
+              <a:t>6 Run the RH1 regression</a:t>
             </a:r>
           </a:p>
         </p:txBody>
@@ -6656,13 +6340,14 @@
               <a:rPr>
                 <a:latin typeface="Courier"/>
               </a:rPr>
-              <a:t>FREQUENCIES VARIABLES=ne_score ne_rush_yards
-  ne_pass_yards temp conference home
-  /STATISTICS=MEAN STDDEV.
-CORRELATIONS
-  /VARIABLES=ne_score ne_rush_yards
-    ne_pass_yards temp conference home
-  /PRINT=TWOTAIL /MISSING=LISTWISE.</a:t>
+              <a:t>REGRESSION
+  /STATISTICS COEFF OUTS R ANOVA
+    DESCRIPTIVES CORR
+  /DEPENDENT ne_score
+  /METHOD=ENTER
+    ne_rush_yards
+    ne_pass_yards
+    temp conference home.</a:t>
             </a:r>
           </a:p>
         </p:txBody>
@@ -6714,7 +6399,7 @@
             </a:pPr>
             <a:r>
               <a:rPr/>
-              <a:t>8 Run the RH1 regression</a:t>
+              <a:t>7 Evaluate the full model</a:t>
             </a:r>
           </a:p>
         </p:txBody>
@@ -6734,21 +6419,32 @@
           <a:bodyPr/>
           <a:lstStyle/>
           <a:p>
-            <a:pPr lvl="0" indent="0">
-              <a:buNone/>
-            </a:pPr>
-            <a:r>
-              <a:rPr>
-                <a:latin typeface="Courier"/>
-              </a:rPr>
-              <a:t>REGRESSION
-  /STATISTICS COEFF OUTS R ANOVA
-    DESCRIPTIVES CORR
-  /DEPENDENT ne_score
-  /METHOD=ENTER
-    ne_rush_yards
-    ne_pass_yards
-    temp conference home.</a:t>
+            <a:pPr lvl="0"/>
+            <a:r>
+              <a:rPr b="1"/>
+              <a:t>Does it work?</a:t>
+            </a:r>
+            <a:r>
+              <a:rPr/>
+              <a:t> Find the model F test and p-value</a:t>
+            </a:r>
+          </a:p>
+          <a:p>
+            <a:pPr lvl="0"/>
+            <a:r>
+              <a:rPr b="1"/>
+              <a:t>How well?</a:t>
+            </a:r>
+            <a:r>
+              <a:rPr/>
+              <a:t> Find R² in Model Summary</a:t>
+            </a:r>
+          </a:p>
+          <a:p>
+            <a:pPr lvl="0"/>
+            <a:r>
+              <a:rPr/>
+              <a:t>Record the model statistics requested by the worksheet</a:t>
             </a:r>
           </a:p>
         </p:txBody>
